--- a/物件一覧.pptx
+++ b/物件一覧.pptx
@@ -3709,7 +3709,7 @@
           <a:noFill/>
         </p:spPr>
         <p:txBody>
-          <a:bodyPr wrap="square">
+          <a:bodyPr wrap="none">
             <a:spAutoFit/>
           </a:bodyPr>
           <a:lstStyle/>
@@ -3735,7 +3735,7 @@
         <p:spPr>
           <a:xfrm>
             <a:off x="838799" y="1432800"/>
-            <a:ext cx="648000" cy="259200"/>
+            <a:ext cx="802800" cy="259200"/>
           </a:xfrm>
           <a:prstGeom prst="rect">
             <a:avLst/>
@@ -3778,15 +3778,15 @@
         <p:spPr>
           <a:xfrm>
             <a:off x="881999" y="1432800"/>
-            <a:ext cx="604800" cy="259200"/>
-          </a:xfrm>
-          <a:prstGeom prst="rect">
-            <a:avLst/>
-          </a:prstGeom>
-          <a:noFill/>
-        </p:spPr>
-        <p:txBody>
-          <a:bodyPr wrap="square">
+            <a:ext cx="759600" cy="259200"/>
+          </a:xfrm>
+          <a:prstGeom prst="rect">
+            <a:avLst/>
+          </a:prstGeom>
+          <a:noFill/>
+        </p:spPr>
+        <p:txBody>
+          <a:bodyPr wrap="none">
             <a:spAutoFit/>
           </a:bodyPr>
           <a:lstStyle/>
@@ -3811,8 +3811,8 @@
         </p:nvSpPr>
         <p:spPr>
           <a:xfrm>
-            <a:off x="1551599" y="1432800"/>
-            <a:ext cx="680400" cy="259200"/>
+            <a:off x="1706399" y="1432800"/>
+            <a:ext cx="903600" cy="259200"/>
           </a:xfrm>
           <a:prstGeom prst="rect">
             <a:avLst/>
@@ -3854,16 +3854,16 @@
         </p:nvSpPr>
         <p:spPr>
           <a:xfrm>
-            <a:off x="1594799" y="1432800"/>
-            <a:ext cx="637200" cy="259200"/>
-          </a:xfrm>
-          <a:prstGeom prst="rect">
-            <a:avLst/>
-          </a:prstGeom>
-          <a:noFill/>
-        </p:spPr>
-        <p:txBody>
-          <a:bodyPr wrap="square">
+            <a:off x="1749599" y="1432800"/>
+            <a:ext cx="860400" cy="259200"/>
+          </a:xfrm>
+          <a:prstGeom prst="rect">
+            <a:avLst/>
+          </a:prstGeom>
+          <a:noFill/>
+        </p:spPr>
+        <p:txBody>
+          <a:bodyPr wrap="none">
             <a:spAutoFit/>
           </a:bodyPr>
           <a:lstStyle/>
@@ -3888,7 +3888,7 @@
         </p:nvSpPr>
         <p:spPr>
           <a:xfrm>
-            <a:off x="2296799" y="1432800"/>
+            <a:off x="2674799" y="1432800"/>
             <a:ext cx="648000" cy="259200"/>
           </a:xfrm>
           <a:prstGeom prst="rect">
@@ -3931,7 +3931,7 @@
         </p:nvSpPr>
         <p:spPr>
           <a:xfrm>
-            <a:off x="2339999" y="1432800"/>
+            <a:off x="2717999" y="1432800"/>
             <a:ext cx="604800" cy="259200"/>
           </a:xfrm>
           <a:prstGeom prst="rect">
@@ -3940,7 +3940,7 @@
           <a:noFill/>
         </p:spPr>
         <p:txBody>
-          <a:bodyPr wrap="square">
+          <a:bodyPr wrap="none">
             <a:spAutoFit/>
           </a:bodyPr>
           <a:lstStyle/>
@@ -3965,8 +3965,8 @@
         </p:nvSpPr>
         <p:spPr>
           <a:xfrm>
-            <a:off x="3009599" y="1432800"/>
-            <a:ext cx="648000" cy="259200"/>
+            <a:off x="3387599" y="1432800"/>
+            <a:ext cx="802800" cy="259200"/>
           </a:xfrm>
           <a:prstGeom prst="rect">
             <a:avLst/>
@@ -4008,16 +4008,16 @@
         </p:nvSpPr>
         <p:spPr>
           <a:xfrm>
-            <a:off x="3052799" y="1432800"/>
-            <a:ext cx="604800" cy="259200"/>
-          </a:xfrm>
-          <a:prstGeom prst="rect">
-            <a:avLst/>
-          </a:prstGeom>
-          <a:noFill/>
-        </p:spPr>
-        <p:txBody>
-          <a:bodyPr wrap="square">
+            <a:off x="3430799" y="1432800"/>
+            <a:ext cx="759600" cy="259200"/>
+          </a:xfrm>
+          <a:prstGeom prst="rect">
+            <a:avLst/>
+          </a:prstGeom>
+          <a:noFill/>
+        </p:spPr>
+        <p:txBody>
+          <a:bodyPr wrap="none">
             <a:spAutoFit/>
           </a:bodyPr>
           <a:lstStyle/>
@@ -5409,33 +5409,9 @@
           </a:p>
         </p:txBody>
       </p:sp>
-      <p:pic>
-        <p:nvPicPr>
-          <p:cNvPr id="59" name="Picture 58" descr="1779266493906_uklnd.jpg"/>
-          <p:cNvPicPr>
-            <a:picLocks noChangeAspect="1"/>
-          </p:cNvPicPr>
-          <p:nvPr/>
-        </p:nvPicPr>
-        <p:blipFill>
-          <a:blip r:embed="rId2"/>
-          <a:stretch>
-            <a:fillRect/>
-          </a:stretch>
-        </p:blipFill>
-        <p:spPr>
-          <a:xfrm>
-            <a:off x="6929999" y="2043600"/>
-            <a:ext cx="2550601" cy="3400801"/>
-          </a:xfrm>
-          <a:prstGeom prst="rect">
-            <a:avLst/>
-          </a:prstGeom>
-        </p:spPr>
-      </p:pic>
-      <p:sp>
-        <p:nvSpPr>
-          <p:cNvPr id="60" name="Rectangle 59"/>
+      <p:sp>
+        <p:nvSpPr>
+          <p:cNvPr id="59" name="Rectangle 58"/>
           <p:cNvSpPr/>
           <p:nvPr/>
         </p:nvSpPr>
@@ -5476,30 +5452,6 @@
           </a:p>
         </p:txBody>
       </p:sp>
-      <p:pic>
-        <p:nvPicPr>
-          <p:cNvPr id="61" name="Picture 60" descr="1779266493908_zwzbj.jpg"/>
-          <p:cNvPicPr>
-            <a:picLocks noChangeAspect="1"/>
-          </p:cNvPicPr>
-          <p:nvPr/>
-        </p:nvPicPr>
-        <p:blipFill>
-          <a:blip r:embed="rId3"/>
-          <a:stretch>
-            <a:fillRect/>
-          </a:stretch>
-        </p:blipFill>
-        <p:spPr>
-          <a:xfrm>
-            <a:off x="9516600" y="3259386"/>
-            <a:ext cx="2550601" cy="969228"/>
-          </a:xfrm>
-          <a:prstGeom prst="rect">
-            <a:avLst/>
-          </a:prstGeom>
-        </p:spPr>
-      </p:pic>
     </p:spTree>
   </p:cSld>
   <p:clrMapOvr>
@@ -5954,7 +5906,7 @@
           <a:noFill/>
         </p:spPr>
         <p:txBody>
-          <a:bodyPr wrap="square">
+          <a:bodyPr wrap="none">
             <a:spAutoFit/>
           </a:bodyPr>
           <a:lstStyle/>
@@ -5980,7 +5932,7 @@
         <p:spPr>
           <a:xfrm>
             <a:off x="838799" y="1432800"/>
-            <a:ext cx="648000" cy="259200"/>
+            <a:ext cx="802800" cy="259200"/>
           </a:xfrm>
           <a:prstGeom prst="rect">
             <a:avLst/>
@@ -6023,15 +5975,15 @@
         <p:spPr>
           <a:xfrm>
             <a:off x="881999" y="1432800"/>
-            <a:ext cx="604800" cy="259200"/>
-          </a:xfrm>
-          <a:prstGeom prst="rect">
-            <a:avLst/>
-          </a:prstGeom>
-          <a:noFill/>
-        </p:spPr>
-        <p:txBody>
-          <a:bodyPr wrap="square">
+            <a:ext cx="759600" cy="259200"/>
+          </a:xfrm>
+          <a:prstGeom prst="rect">
+            <a:avLst/>
+          </a:prstGeom>
+          <a:noFill/>
+        </p:spPr>
+        <p:txBody>
+          <a:bodyPr wrap="none">
             <a:spAutoFit/>
           </a:bodyPr>
           <a:lstStyle/>
@@ -6056,8 +6008,8 @@
         </p:nvSpPr>
         <p:spPr>
           <a:xfrm>
-            <a:off x="1551599" y="1432800"/>
-            <a:ext cx="741600" cy="259200"/>
+            <a:off x="1706399" y="1432800"/>
+            <a:ext cx="1004400" cy="259200"/>
           </a:xfrm>
           <a:prstGeom prst="rect">
             <a:avLst/>
@@ -6099,16 +6051,16 @@
         </p:nvSpPr>
         <p:spPr>
           <a:xfrm>
-            <a:off x="1594799" y="1432800"/>
-            <a:ext cx="698400" cy="259200"/>
-          </a:xfrm>
-          <a:prstGeom prst="rect">
-            <a:avLst/>
-          </a:prstGeom>
-          <a:noFill/>
-        </p:spPr>
-        <p:txBody>
-          <a:bodyPr wrap="square">
+            <a:off x="1749599" y="1432800"/>
+            <a:ext cx="961200" cy="259200"/>
+          </a:xfrm>
+          <a:prstGeom prst="rect">
+            <a:avLst/>
+          </a:prstGeom>
+          <a:noFill/>
+        </p:spPr>
+        <p:txBody>
+          <a:bodyPr wrap="none">
             <a:spAutoFit/>
           </a:bodyPr>
           <a:lstStyle/>
@@ -6133,8 +6085,8 @@
         </p:nvSpPr>
         <p:spPr>
           <a:xfrm>
-            <a:off x="2357999" y="1432800"/>
-            <a:ext cx="741600" cy="259200"/>
+            <a:off x="2775599" y="1432800"/>
+            <a:ext cx="1004400" cy="259200"/>
           </a:xfrm>
           <a:prstGeom prst="rect">
             <a:avLst/>
@@ -6176,16 +6128,16 @@
         </p:nvSpPr>
         <p:spPr>
           <a:xfrm>
-            <a:off x="2401199" y="1432800"/>
-            <a:ext cx="698400" cy="259200"/>
-          </a:xfrm>
-          <a:prstGeom prst="rect">
-            <a:avLst/>
-          </a:prstGeom>
-          <a:noFill/>
-        </p:spPr>
-        <p:txBody>
-          <a:bodyPr wrap="square">
+            <a:off x="2818799" y="1432800"/>
+            <a:ext cx="961200" cy="259200"/>
+          </a:xfrm>
+          <a:prstGeom prst="rect">
+            <a:avLst/>
+          </a:prstGeom>
+          <a:noFill/>
+        </p:spPr>
+        <p:txBody>
+          <a:bodyPr wrap="none">
             <a:spAutoFit/>
           </a:bodyPr>
           <a:lstStyle/>
@@ -6210,8 +6162,8 @@
         </p:nvSpPr>
         <p:spPr>
           <a:xfrm>
-            <a:off x="3164399" y="1432800"/>
-            <a:ext cx="648000" cy="259200"/>
+            <a:off x="3844799" y="1432800"/>
+            <a:ext cx="802800" cy="259200"/>
           </a:xfrm>
           <a:prstGeom prst="rect">
             <a:avLst/>
@@ -6253,16 +6205,16 @@
         </p:nvSpPr>
         <p:spPr>
           <a:xfrm>
-            <a:off x="3207599" y="1432800"/>
-            <a:ext cx="604800" cy="259200"/>
-          </a:xfrm>
-          <a:prstGeom prst="rect">
-            <a:avLst/>
-          </a:prstGeom>
-          <a:noFill/>
-        </p:spPr>
-        <p:txBody>
-          <a:bodyPr wrap="square">
+            <a:off x="3887999" y="1432800"/>
+            <a:ext cx="759600" cy="259200"/>
+          </a:xfrm>
+          <a:prstGeom prst="rect">
+            <a:avLst/>
+          </a:prstGeom>
+          <a:noFill/>
+        </p:spPr>
+        <p:txBody>
+          <a:bodyPr wrap="none">
             <a:spAutoFit/>
           </a:bodyPr>
           <a:lstStyle/>
@@ -7398,7 +7350,7 @@
         <p:spPr>
           <a:xfrm>
             <a:off x="125999" y="4240800"/>
-            <a:ext cx="1152000" cy="223200"/>
+            <a:ext cx="1152000" cy="349064"/>
           </a:xfrm>
           <a:prstGeom prst="rect">
             <a:avLst/>
@@ -7441,7 +7393,7 @@
         <p:spPr>
           <a:xfrm>
             <a:off x="161999" y="4240800"/>
-            <a:ext cx="1116000" cy="223200"/>
+            <a:ext cx="1116000" cy="349064"/>
           </a:xfrm>
           <a:prstGeom prst="rect">
             <a:avLst/>
@@ -7475,7 +7427,7 @@
         <p:spPr>
           <a:xfrm>
             <a:off x="1299599" y="4240800"/>
-            <a:ext cx="5522400" cy="223200"/>
+            <a:ext cx="5522400" cy="349064"/>
           </a:xfrm>
           <a:prstGeom prst="rect">
             <a:avLst/>
@@ -7508,8 +7460,8 @@
         </p:nvSpPr>
         <p:spPr>
           <a:xfrm>
-            <a:off x="125999" y="4489200"/>
-            <a:ext cx="1152000" cy="223200"/>
+            <a:off x="125999" y="4615064"/>
+            <a:ext cx="1152000" cy="349064"/>
           </a:xfrm>
           <a:prstGeom prst="rect">
             <a:avLst/>
@@ -7551,8 +7503,8 @@
         </p:nvSpPr>
         <p:spPr>
           <a:xfrm>
-            <a:off x="161999" y="4489200"/>
-            <a:ext cx="1116000" cy="223200"/>
+            <a:off x="161999" y="4615064"/>
+            <a:ext cx="1116000" cy="349064"/>
           </a:xfrm>
           <a:prstGeom prst="rect">
             <a:avLst/>
@@ -7585,8 +7537,8 @@
         </p:nvSpPr>
         <p:spPr>
           <a:xfrm>
-            <a:off x="1299599" y="4489200"/>
-            <a:ext cx="5522400" cy="223200"/>
+            <a:off x="1299599" y="4615064"/>
+            <a:ext cx="5522400" cy="349064"/>
           </a:xfrm>
           <a:prstGeom prst="rect">
             <a:avLst/>
@@ -7654,33 +7606,9 @@
           </a:p>
         </p:txBody>
       </p:sp>
-      <p:pic>
-        <p:nvPicPr>
-          <p:cNvPr id="59" name="Picture 58" descr="1779266493910_33qi5.jpg"/>
-          <p:cNvPicPr>
-            <a:picLocks noChangeAspect="1"/>
-          </p:cNvPicPr>
-          <p:nvPr/>
-        </p:nvPicPr>
-        <p:blipFill>
-          <a:blip r:embed="rId2"/>
-          <a:stretch>
-            <a:fillRect/>
-          </a:stretch>
-        </p:blipFill>
-        <p:spPr>
-          <a:xfrm>
-            <a:off x="6929999" y="2468700"/>
-            <a:ext cx="2550601" cy="2550601"/>
-          </a:xfrm>
-          <a:prstGeom prst="rect">
-            <a:avLst/>
-          </a:prstGeom>
-        </p:spPr>
-      </p:pic>
-      <p:sp>
-        <p:nvSpPr>
-          <p:cNvPr id="60" name="Rectangle 59"/>
+      <p:sp>
+        <p:nvSpPr>
+          <p:cNvPr id="59" name="Rectangle 58"/>
           <p:cNvSpPr/>
           <p:nvPr/>
         </p:nvSpPr>
@@ -7721,30 +7649,6 @@
           </a:p>
         </p:txBody>
       </p:sp>
-      <p:pic>
-        <p:nvPicPr>
-          <p:cNvPr id="61" name="Picture 60" descr="1779266493911_yhc4b.jpg"/>
-          <p:cNvPicPr>
-            <a:picLocks noChangeAspect="1"/>
-          </p:cNvPicPr>
-          <p:nvPr/>
-        </p:nvPicPr>
-        <p:blipFill>
-          <a:blip r:embed="rId3"/>
-          <a:stretch>
-            <a:fillRect/>
-          </a:stretch>
-        </p:blipFill>
-        <p:spPr>
-          <a:xfrm>
-            <a:off x="9576863" y="756000"/>
-            <a:ext cx="2430075" cy="5976001"/>
-          </a:xfrm>
-          <a:prstGeom prst="rect">
-            <a:avLst/>
-          </a:prstGeom>
-        </p:spPr>
-      </p:pic>
     </p:spTree>
   </p:cSld>
   <p:clrMapOvr>
@@ -8199,7 +8103,7 @@
           <a:noFill/>
         </p:spPr>
         <p:txBody>
-          <a:bodyPr wrap="square">
+          <a:bodyPr wrap="none">
             <a:spAutoFit/>
           </a:bodyPr>
           <a:lstStyle/>
@@ -8225,7 +8129,7 @@
         <p:spPr>
           <a:xfrm>
             <a:off x="838799" y="1432800"/>
-            <a:ext cx="648000" cy="259200"/>
+            <a:ext cx="802800" cy="259200"/>
           </a:xfrm>
           <a:prstGeom prst="rect">
             <a:avLst/>
@@ -8268,15 +8172,15 @@
         <p:spPr>
           <a:xfrm>
             <a:off x="881999" y="1432800"/>
-            <a:ext cx="604800" cy="259200"/>
-          </a:xfrm>
-          <a:prstGeom prst="rect">
-            <a:avLst/>
-          </a:prstGeom>
-          <a:noFill/>
-        </p:spPr>
-        <p:txBody>
-          <a:bodyPr wrap="square">
+            <a:ext cx="759600" cy="259200"/>
+          </a:xfrm>
+          <a:prstGeom prst="rect">
+            <a:avLst/>
+          </a:prstGeom>
+          <a:noFill/>
+        </p:spPr>
+        <p:txBody>
+          <a:bodyPr wrap="none">
             <a:spAutoFit/>
           </a:bodyPr>
           <a:lstStyle/>
@@ -8301,8 +8205,8 @@
         </p:nvSpPr>
         <p:spPr>
           <a:xfrm>
-            <a:off x="1551599" y="1432800"/>
-            <a:ext cx="648000" cy="259200"/>
+            <a:off x="1706399" y="1432800"/>
+            <a:ext cx="802800" cy="259200"/>
           </a:xfrm>
           <a:prstGeom prst="rect">
             <a:avLst/>
@@ -8344,16 +8248,16 @@
         </p:nvSpPr>
         <p:spPr>
           <a:xfrm>
-            <a:off x="1594799" y="1432800"/>
-            <a:ext cx="604800" cy="259200"/>
-          </a:xfrm>
-          <a:prstGeom prst="rect">
-            <a:avLst/>
-          </a:prstGeom>
-          <a:noFill/>
-        </p:spPr>
-        <p:txBody>
-          <a:bodyPr wrap="square">
+            <a:off x="1749599" y="1432800"/>
+            <a:ext cx="759600" cy="259200"/>
+          </a:xfrm>
+          <a:prstGeom prst="rect">
+            <a:avLst/>
+          </a:prstGeom>
+          <a:noFill/>
+        </p:spPr>
+        <p:txBody>
+          <a:bodyPr wrap="none">
             <a:spAutoFit/>
           </a:bodyPr>
           <a:lstStyle/>
@@ -8378,8 +8282,8 @@
         </p:nvSpPr>
         <p:spPr>
           <a:xfrm>
-            <a:off x="2264399" y="1432800"/>
-            <a:ext cx="741600" cy="259200"/>
+            <a:off x="2573999" y="1432800"/>
+            <a:ext cx="1004400" cy="259200"/>
           </a:xfrm>
           <a:prstGeom prst="rect">
             <a:avLst/>
@@ -8421,16 +8325,16 @@
         </p:nvSpPr>
         <p:spPr>
           <a:xfrm>
-            <a:off x="2307599" y="1432800"/>
-            <a:ext cx="698400" cy="259200"/>
-          </a:xfrm>
-          <a:prstGeom prst="rect">
-            <a:avLst/>
-          </a:prstGeom>
-          <a:noFill/>
-        </p:spPr>
-        <p:txBody>
-          <a:bodyPr wrap="square">
+            <a:off x="2617199" y="1432800"/>
+            <a:ext cx="961200" cy="259200"/>
+          </a:xfrm>
+          <a:prstGeom prst="rect">
+            <a:avLst/>
+          </a:prstGeom>
+          <a:noFill/>
+        </p:spPr>
+        <p:txBody>
+          <a:bodyPr wrap="none">
             <a:spAutoFit/>
           </a:bodyPr>
           <a:lstStyle/>
@@ -8455,8 +8359,8 @@
         </p:nvSpPr>
         <p:spPr>
           <a:xfrm>
-            <a:off x="3070799" y="1432800"/>
-            <a:ext cx="648000" cy="259200"/>
+            <a:off x="3643199" y="1432800"/>
+            <a:ext cx="802800" cy="259200"/>
           </a:xfrm>
           <a:prstGeom prst="rect">
             <a:avLst/>
@@ -8498,16 +8402,16 @@
         </p:nvSpPr>
         <p:spPr>
           <a:xfrm>
-            <a:off x="3113999" y="1432800"/>
-            <a:ext cx="604800" cy="259200"/>
-          </a:xfrm>
-          <a:prstGeom prst="rect">
-            <a:avLst/>
-          </a:prstGeom>
-          <a:noFill/>
-        </p:spPr>
-        <p:txBody>
-          <a:bodyPr wrap="square">
+            <a:off x="3686399" y="1432800"/>
+            <a:ext cx="759600" cy="259200"/>
+          </a:xfrm>
+          <a:prstGeom prst="rect">
+            <a:avLst/>
+          </a:prstGeom>
+          <a:noFill/>
+        </p:spPr>
+        <p:txBody>
+          <a:bodyPr wrap="none">
             <a:spAutoFit/>
           </a:bodyPr>
           <a:lstStyle/>
@@ -9643,7 +9547,7 @@
         <p:spPr>
           <a:xfrm>
             <a:off x="125999" y="4240800"/>
-            <a:ext cx="1152000" cy="223200"/>
+            <a:ext cx="1152000" cy="349064"/>
           </a:xfrm>
           <a:prstGeom prst="rect">
             <a:avLst/>
@@ -9686,7 +9590,7 @@
         <p:spPr>
           <a:xfrm>
             <a:off x="161999" y="4240800"/>
-            <a:ext cx="1116000" cy="223200"/>
+            <a:ext cx="1116000" cy="349064"/>
           </a:xfrm>
           <a:prstGeom prst="rect">
             <a:avLst/>
@@ -9720,7 +9624,7 @@
         <p:spPr>
           <a:xfrm>
             <a:off x="1299599" y="4240800"/>
-            <a:ext cx="5522400" cy="223200"/>
+            <a:ext cx="5522400" cy="349064"/>
           </a:xfrm>
           <a:prstGeom prst="rect">
             <a:avLst/>
@@ -9753,8 +9657,8 @@
         </p:nvSpPr>
         <p:spPr>
           <a:xfrm>
-            <a:off x="125999" y="4489200"/>
-            <a:ext cx="1152000" cy="338270"/>
+            <a:off x="125999" y="4615064"/>
+            <a:ext cx="1152000" cy="349064"/>
           </a:xfrm>
           <a:prstGeom prst="rect">
             <a:avLst/>
@@ -9796,8 +9700,8 @@
         </p:nvSpPr>
         <p:spPr>
           <a:xfrm>
-            <a:off x="161999" y="4489200"/>
-            <a:ext cx="1116000" cy="338270"/>
+            <a:off x="161999" y="4615064"/>
+            <a:ext cx="1116000" cy="349064"/>
           </a:xfrm>
           <a:prstGeom prst="rect">
             <a:avLst/>
@@ -9830,8 +9734,8 @@
         </p:nvSpPr>
         <p:spPr>
           <a:xfrm>
-            <a:off x="1299599" y="4489200"/>
-            <a:ext cx="5522400" cy="338270"/>
+            <a:off x="1299599" y="4615064"/>
+            <a:ext cx="5522400" cy="349064"/>
           </a:xfrm>
           <a:prstGeom prst="rect">
             <a:avLst/>
@@ -9899,33 +9803,9 @@
           </a:p>
         </p:txBody>
       </p:sp>
-      <p:pic>
-        <p:nvPicPr>
-          <p:cNvPr id="59" name="Picture 58" descr="1779266493913_rax0d.jpg"/>
-          <p:cNvPicPr>
-            <a:picLocks noChangeAspect="1"/>
-          </p:cNvPicPr>
-          <p:nvPr/>
-        </p:nvPicPr>
-        <p:blipFill>
-          <a:blip r:embed="rId2"/>
-          <a:stretch>
-            <a:fillRect/>
-          </a:stretch>
-        </p:blipFill>
-        <p:spPr>
-          <a:xfrm>
-            <a:off x="7221299" y="756000"/>
-            <a:ext cx="1968000" cy="1968000"/>
-          </a:xfrm>
-          <a:prstGeom prst="rect">
-            <a:avLst/>
-          </a:prstGeom>
-        </p:spPr>
-      </p:pic>
-      <p:sp>
-        <p:nvSpPr>
-          <p:cNvPr id="60" name="Rectangle 59"/>
+      <p:sp>
+        <p:nvSpPr>
+          <p:cNvPr id="59" name="Rectangle 58"/>
           <p:cNvSpPr/>
           <p:nvPr/>
         </p:nvSpPr>
@@ -9966,33 +9846,9 @@
           </a:p>
         </p:txBody>
       </p:sp>
-      <p:pic>
-        <p:nvPicPr>
-          <p:cNvPr id="61" name="Picture 60" descr="1779266493914_itmy2.jpg"/>
-          <p:cNvPicPr>
-            <a:picLocks noChangeAspect="1"/>
-          </p:cNvPicPr>
-          <p:nvPr/>
-        </p:nvPicPr>
-        <p:blipFill>
-          <a:blip r:embed="rId3"/>
-          <a:stretch>
-            <a:fillRect/>
-          </a:stretch>
-        </p:blipFill>
-        <p:spPr>
-          <a:xfrm>
-            <a:off x="10299900" y="756000"/>
-            <a:ext cx="984000" cy="1968000"/>
-          </a:xfrm>
-          <a:prstGeom prst="rect">
-            <a:avLst/>
-          </a:prstGeom>
-        </p:spPr>
-      </p:pic>
-      <p:sp>
-        <p:nvSpPr>
-          <p:cNvPr id="62" name="Rectangle 61"/>
+      <p:sp>
+        <p:nvSpPr>
+          <p:cNvPr id="60" name="Rectangle 59"/>
           <p:cNvSpPr/>
           <p:nvPr/>
         </p:nvSpPr>
@@ -10033,33 +9889,9 @@
           </a:p>
         </p:txBody>
       </p:sp>
-      <p:pic>
-        <p:nvPicPr>
-          <p:cNvPr id="63" name="Picture 62" descr="1779266493915_g11l4.jpg"/>
-          <p:cNvPicPr>
-            <a:picLocks noChangeAspect="1"/>
-          </p:cNvPicPr>
-          <p:nvPr/>
-        </p:nvPicPr>
-        <p:blipFill>
-          <a:blip r:embed="rId4"/>
-          <a:stretch>
-            <a:fillRect/>
-          </a:stretch>
-        </p:blipFill>
-        <p:spPr>
-          <a:xfrm>
-            <a:off x="7356144" y="2760000"/>
-            <a:ext cx="1698311" cy="1968000"/>
-          </a:xfrm>
-          <a:prstGeom prst="rect">
-            <a:avLst/>
-          </a:prstGeom>
-        </p:spPr>
-      </p:pic>
-      <p:sp>
-        <p:nvSpPr>
-          <p:cNvPr id="64" name="Rectangle 63"/>
+      <p:sp>
+        <p:nvSpPr>
+          <p:cNvPr id="61" name="Rectangle 60"/>
           <p:cNvSpPr/>
           <p:nvPr/>
         </p:nvSpPr>
@@ -10100,33 +9932,9 @@
           </a:p>
         </p:txBody>
       </p:sp>
-      <p:pic>
-        <p:nvPicPr>
-          <p:cNvPr id="65" name="Picture 64" descr="1779266493916_a1snz.jpg"/>
-          <p:cNvPicPr>
-            <a:picLocks noChangeAspect="1"/>
-          </p:cNvPicPr>
-          <p:nvPr/>
-        </p:nvPicPr>
-        <p:blipFill>
-          <a:blip r:embed="rId5"/>
-          <a:stretch>
-            <a:fillRect/>
-          </a:stretch>
-        </p:blipFill>
-        <p:spPr>
-          <a:xfrm>
-            <a:off x="9937050" y="2760000"/>
-            <a:ext cx="1709700" cy="1968000"/>
-          </a:xfrm>
-          <a:prstGeom prst="rect">
-            <a:avLst/>
-          </a:prstGeom>
-        </p:spPr>
-      </p:pic>
-      <p:sp>
-        <p:nvSpPr>
-          <p:cNvPr id="66" name="Rectangle 65"/>
+      <p:sp>
+        <p:nvSpPr>
+          <p:cNvPr id="62" name="Rectangle 61"/>
           <p:cNvSpPr/>
           <p:nvPr/>
         </p:nvSpPr>
@@ -10167,33 +9975,9 @@
           </a:p>
         </p:txBody>
       </p:sp>
-      <p:pic>
-        <p:nvPicPr>
-          <p:cNvPr id="67" name="Picture 66" descr="1779266493918_oydm3.jpg"/>
-          <p:cNvPicPr>
-            <a:picLocks noChangeAspect="1"/>
-          </p:cNvPicPr>
-          <p:nvPr/>
-        </p:nvPicPr>
-        <p:blipFill>
-          <a:blip r:embed="rId6"/>
-          <a:stretch>
-            <a:fillRect/>
-          </a:stretch>
-        </p:blipFill>
-        <p:spPr>
-          <a:xfrm>
-            <a:off x="7713299" y="4764000"/>
-            <a:ext cx="984000" cy="1968000"/>
-          </a:xfrm>
-          <a:prstGeom prst="rect">
-            <a:avLst/>
-          </a:prstGeom>
-        </p:spPr>
-      </p:pic>
-      <p:sp>
-        <p:nvSpPr>
-          <p:cNvPr id="68" name="Rectangle 67"/>
+      <p:sp>
+        <p:nvSpPr>
+          <p:cNvPr id="63" name="Rectangle 62"/>
           <p:cNvSpPr/>
           <p:nvPr/>
         </p:nvSpPr>
@@ -10234,33 +10018,9 @@
           </a:p>
         </p:txBody>
       </p:sp>
-      <p:pic>
-        <p:nvPicPr>
-          <p:cNvPr id="69" name="Picture 68" descr="1779266493920_va8h2.jpg"/>
-          <p:cNvPicPr>
-            <a:picLocks noChangeAspect="1"/>
-          </p:cNvPicPr>
-          <p:nvPr/>
-        </p:nvPicPr>
-        <p:blipFill>
-          <a:blip r:embed="rId7"/>
-          <a:stretch>
-            <a:fillRect/>
-          </a:stretch>
-        </p:blipFill>
-        <p:spPr>
-          <a:xfrm>
-            <a:off x="9917370" y="4764000"/>
-            <a:ext cx="1749060" cy="1968000"/>
-          </a:xfrm>
-          <a:prstGeom prst="rect">
-            <a:avLst/>
-          </a:prstGeom>
-        </p:spPr>
-      </p:pic>
-      <p:sp>
-        <p:nvSpPr>
-          <p:cNvPr id="70" name="Rectangle 69"/>
+      <p:sp>
+        <p:nvSpPr>
+          <p:cNvPr id="64" name="Rectangle 63"/>
           <p:cNvSpPr/>
           <p:nvPr/>
         </p:nvSpPr>
@@ -10305,7 +10065,7 @@
       </p:sp>
       <p:sp>
         <p:nvSpPr>
-          <p:cNvPr id="71" name="TextBox 70"/>
+          <p:cNvPr id="65" name="TextBox 64"/>
           <p:cNvSpPr txBox="1"/>
           <p:nvPr/>
         </p:nvSpPr>
@@ -10791,7 +10551,7 @@
           <a:noFill/>
         </p:spPr>
         <p:txBody>
-          <a:bodyPr wrap="square">
+          <a:bodyPr wrap="none">
             <a:spAutoFit/>
           </a:bodyPr>
           <a:lstStyle/>
@@ -10817,7 +10577,7 @@
         <p:spPr>
           <a:xfrm>
             <a:off x="838799" y="1432800"/>
-            <a:ext cx="648000" cy="259200"/>
+            <a:ext cx="802800" cy="259200"/>
           </a:xfrm>
           <a:prstGeom prst="rect">
             <a:avLst/>
@@ -10860,15 +10620,15 @@
         <p:spPr>
           <a:xfrm>
             <a:off x="881999" y="1432800"/>
-            <a:ext cx="604800" cy="259200"/>
-          </a:xfrm>
-          <a:prstGeom prst="rect">
-            <a:avLst/>
-          </a:prstGeom>
-          <a:noFill/>
-        </p:spPr>
-        <p:txBody>
-          <a:bodyPr wrap="square">
+            <a:ext cx="759600" cy="259200"/>
+          </a:xfrm>
+          <a:prstGeom prst="rect">
+            <a:avLst/>
+          </a:prstGeom>
+          <a:noFill/>
+        </p:spPr>
+        <p:txBody>
+          <a:bodyPr wrap="none">
             <a:spAutoFit/>
           </a:bodyPr>
           <a:lstStyle/>
@@ -10893,8 +10653,8 @@
         </p:nvSpPr>
         <p:spPr>
           <a:xfrm>
-            <a:off x="1551599" y="1432800"/>
-            <a:ext cx="680400" cy="259200"/>
+            <a:off x="1706399" y="1432800"/>
+            <a:ext cx="903600" cy="259200"/>
           </a:xfrm>
           <a:prstGeom prst="rect">
             <a:avLst/>
@@ -10936,16 +10696,16 @@
         </p:nvSpPr>
         <p:spPr>
           <a:xfrm>
-            <a:off x="1594799" y="1432800"/>
-            <a:ext cx="637200" cy="259200"/>
-          </a:xfrm>
-          <a:prstGeom prst="rect">
-            <a:avLst/>
-          </a:prstGeom>
-          <a:noFill/>
-        </p:spPr>
-        <p:txBody>
-          <a:bodyPr wrap="square">
+            <a:off x="1749599" y="1432800"/>
+            <a:ext cx="860400" cy="259200"/>
+          </a:xfrm>
+          <a:prstGeom prst="rect">
+            <a:avLst/>
+          </a:prstGeom>
+          <a:noFill/>
+        </p:spPr>
+        <p:txBody>
+          <a:bodyPr wrap="none">
             <a:spAutoFit/>
           </a:bodyPr>
           <a:lstStyle/>
@@ -10970,8 +10730,8 @@
         </p:nvSpPr>
         <p:spPr>
           <a:xfrm>
-            <a:off x="2296799" y="1432800"/>
-            <a:ext cx="741600" cy="259200"/>
+            <a:off x="2674799" y="1432800"/>
+            <a:ext cx="1004400" cy="259200"/>
           </a:xfrm>
           <a:prstGeom prst="rect">
             <a:avLst/>
@@ -11013,16 +10773,16 @@
         </p:nvSpPr>
         <p:spPr>
           <a:xfrm>
-            <a:off x="2339999" y="1432800"/>
-            <a:ext cx="698400" cy="259200"/>
-          </a:xfrm>
-          <a:prstGeom prst="rect">
-            <a:avLst/>
-          </a:prstGeom>
-          <a:noFill/>
-        </p:spPr>
-        <p:txBody>
-          <a:bodyPr wrap="square">
+            <a:off x="2717999" y="1432800"/>
+            <a:ext cx="961200" cy="259200"/>
+          </a:xfrm>
+          <a:prstGeom prst="rect">
+            <a:avLst/>
+          </a:prstGeom>
+          <a:noFill/>
+        </p:spPr>
+        <p:txBody>
+          <a:bodyPr wrap="none">
             <a:spAutoFit/>
           </a:bodyPr>
           <a:lstStyle/>
@@ -11047,8 +10807,8 @@
         </p:nvSpPr>
         <p:spPr>
           <a:xfrm>
-            <a:off x="3103199" y="1432800"/>
-            <a:ext cx="648000" cy="259200"/>
+            <a:off x="3743999" y="1432800"/>
+            <a:ext cx="802800" cy="259200"/>
           </a:xfrm>
           <a:prstGeom prst="rect">
             <a:avLst/>
@@ -11090,16 +10850,16 @@
         </p:nvSpPr>
         <p:spPr>
           <a:xfrm>
-            <a:off x="3146399" y="1432800"/>
-            <a:ext cx="604800" cy="259200"/>
-          </a:xfrm>
-          <a:prstGeom prst="rect">
-            <a:avLst/>
-          </a:prstGeom>
-          <a:noFill/>
-        </p:spPr>
-        <p:txBody>
-          <a:bodyPr wrap="square">
+            <a:off x="3787199" y="1432800"/>
+            <a:ext cx="759600" cy="259200"/>
+          </a:xfrm>
+          <a:prstGeom prst="rect">
+            <a:avLst/>
+          </a:prstGeom>
+          <a:noFill/>
+        </p:spPr>
+        <p:txBody>
+          <a:bodyPr wrap="none">
             <a:spAutoFit/>
           </a:bodyPr>
           <a:lstStyle/>
@@ -12235,7 +11995,7 @@
         <p:spPr>
           <a:xfrm>
             <a:off x="125999" y="4240800"/>
-            <a:ext cx="1152000" cy="338270"/>
+            <a:ext cx="1152000" cy="494796"/>
           </a:xfrm>
           <a:prstGeom prst="rect">
             <a:avLst/>
@@ -12278,7 +12038,7 @@
         <p:spPr>
           <a:xfrm>
             <a:off x="161999" y="4240800"/>
-            <a:ext cx="1116000" cy="338270"/>
+            <a:ext cx="1116000" cy="494796"/>
           </a:xfrm>
           <a:prstGeom prst="rect">
             <a:avLst/>
@@ -12312,7 +12072,7 @@
         <p:spPr>
           <a:xfrm>
             <a:off x="1299599" y="4240800"/>
-            <a:ext cx="5522400" cy="338270"/>
+            <a:ext cx="5522400" cy="494796"/>
           </a:xfrm>
           <a:prstGeom prst="rect">
             <a:avLst/>
@@ -12345,7 +12105,7 @@
         </p:nvSpPr>
         <p:spPr>
           <a:xfrm>
-            <a:off x="125999" y="4604270"/>
+            <a:off x="125999" y="4760796"/>
             <a:ext cx="1152000" cy="223200"/>
           </a:xfrm>
           <a:prstGeom prst="rect">
@@ -12388,7 +12148,7 @@
         </p:nvSpPr>
         <p:spPr>
           <a:xfrm>
-            <a:off x="161999" y="4604270"/>
+            <a:off x="161999" y="4760796"/>
             <a:ext cx="1116000" cy="223200"/>
           </a:xfrm>
           <a:prstGeom prst="rect">
@@ -12422,7 +12182,7 @@
         </p:nvSpPr>
         <p:spPr>
           <a:xfrm>
-            <a:off x="1299599" y="4604270"/>
+            <a:off x="1299599" y="4760796"/>
             <a:ext cx="5522400" cy="223200"/>
           </a:xfrm>
           <a:prstGeom prst="rect">
@@ -12491,33 +12251,9 @@
           </a:p>
         </p:txBody>
       </p:sp>
-      <p:pic>
-        <p:nvPicPr>
-          <p:cNvPr id="59" name="Picture 58" descr="1779266493924_pg1l0.jpg"/>
-          <p:cNvPicPr>
-            <a:picLocks noChangeAspect="1"/>
-          </p:cNvPicPr>
-          <p:nvPr/>
-        </p:nvPicPr>
-        <p:blipFill>
-          <a:blip r:embed="rId2"/>
-          <a:stretch>
-            <a:fillRect/>
-          </a:stretch>
-        </p:blipFill>
-        <p:spPr>
-          <a:xfrm>
-            <a:off x="6929999" y="965699"/>
-            <a:ext cx="2550601" cy="2550601"/>
-          </a:xfrm>
-          <a:prstGeom prst="rect">
-            <a:avLst/>
-          </a:prstGeom>
-        </p:spPr>
-      </p:pic>
-      <p:sp>
-        <p:nvSpPr>
-          <p:cNvPr id="60" name="Rectangle 59"/>
+      <p:sp>
+        <p:nvSpPr>
+          <p:cNvPr id="59" name="Rectangle 58"/>
           <p:cNvSpPr/>
           <p:nvPr/>
         </p:nvSpPr>
@@ -12558,33 +12294,9 @@
           </a:p>
         </p:txBody>
       </p:sp>
-      <p:pic>
-        <p:nvPicPr>
-          <p:cNvPr id="61" name="Picture 60" descr="1779266493926_o9heg.jpg"/>
-          <p:cNvPicPr>
-            <a:picLocks noChangeAspect="1"/>
-          </p:cNvPicPr>
-          <p:nvPr/>
-        </p:nvPicPr>
-        <p:blipFill>
-          <a:blip r:embed="rId3"/>
-          <a:stretch>
-            <a:fillRect/>
-          </a:stretch>
-        </p:blipFill>
-        <p:spPr>
-          <a:xfrm>
-            <a:off x="9516600" y="965699"/>
-            <a:ext cx="2550601" cy="2550601"/>
-          </a:xfrm>
-          <a:prstGeom prst="rect">
-            <a:avLst/>
-          </a:prstGeom>
-        </p:spPr>
-      </p:pic>
-      <p:sp>
-        <p:nvSpPr>
-          <p:cNvPr id="62" name="Rectangle 61"/>
+      <p:sp>
+        <p:nvSpPr>
+          <p:cNvPr id="60" name="Rectangle 59"/>
           <p:cNvSpPr/>
           <p:nvPr/>
         </p:nvSpPr>
@@ -12625,33 +12337,9 @@
           </a:p>
         </p:txBody>
       </p:sp>
-      <p:pic>
-        <p:nvPicPr>
-          <p:cNvPr id="63" name="Picture 62" descr="1779266493927_ue5qp.jpg"/>
-          <p:cNvPicPr>
-            <a:picLocks noChangeAspect="1"/>
-          </p:cNvPicPr>
-          <p:nvPr/>
-        </p:nvPicPr>
-        <p:blipFill>
-          <a:blip r:embed="rId4"/>
-          <a:stretch>
-            <a:fillRect/>
-          </a:stretch>
-        </p:blipFill>
-        <p:spPr>
-          <a:xfrm>
-            <a:off x="6929999" y="3971699"/>
-            <a:ext cx="2550601" cy="2550601"/>
-          </a:xfrm>
-          <a:prstGeom prst="rect">
-            <a:avLst/>
-          </a:prstGeom>
-        </p:spPr>
-      </p:pic>
-      <p:sp>
-        <p:nvSpPr>
-          <p:cNvPr id="64" name="Rectangle 63"/>
+      <p:sp>
+        <p:nvSpPr>
+          <p:cNvPr id="61" name="Rectangle 60"/>
           <p:cNvSpPr/>
           <p:nvPr/>
         </p:nvSpPr>
@@ -12692,30 +12380,6 @@
           </a:p>
         </p:txBody>
       </p:sp>
-      <p:pic>
-        <p:nvPicPr>
-          <p:cNvPr id="65" name="Picture 64" descr="1779266493928_jr5aw.jpg"/>
-          <p:cNvPicPr>
-            <a:picLocks noChangeAspect="1"/>
-          </p:cNvPicPr>
-          <p:nvPr/>
-        </p:nvPicPr>
-        <p:blipFill>
-          <a:blip r:embed="rId5"/>
-          <a:stretch>
-            <a:fillRect/>
-          </a:stretch>
-        </p:blipFill>
-        <p:spPr>
-          <a:xfrm>
-            <a:off x="9516600" y="3971699"/>
-            <a:ext cx="2550601" cy="2550601"/>
-          </a:xfrm>
-          <a:prstGeom prst="rect">
-            <a:avLst/>
-          </a:prstGeom>
-        </p:spPr>
-      </p:pic>
     </p:spTree>
   </p:cSld>
   <p:clrMapOvr>
@@ -13170,7 +12834,7 @@
           <a:noFill/>
         </p:spPr>
         <p:txBody>
-          <a:bodyPr wrap="square">
+          <a:bodyPr wrap="none">
             <a:spAutoFit/>
           </a:bodyPr>
           <a:lstStyle/>
@@ -13196,7 +12860,7 @@
         <p:spPr>
           <a:xfrm>
             <a:off x="838799" y="1432800"/>
-            <a:ext cx="648000" cy="259200"/>
+            <a:ext cx="802800" cy="259200"/>
           </a:xfrm>
           <a:prstGeom prst="rect">
             <a:avLst/>
@@ -13239,15 +12903,15 @@
         <p:spPr>
           <a:xfrm>
             <a:off x="881999" y="1432800"/>
-            <a:ext cx="604800" cy="259200"/>
-          </a:xfrm>
-          <a:prstGeom prst="rect">
-            <a:avLst/>
-          </a:prstGeom>
-          <a:noFill/>
-        </p:spPr>
-        <p:txBody>
-          <a:bodyPr wrap="square">
+            <a:ext cx="759600" cy="259200"/>
+          </a:xfrm>
+          <a:prstGeom prst="rect">
+            <a:avLst/>
+          </a:prstGeom>
+          <a:noFill/>
+        </p:spPr>
+        <p:txBody>
+          <a:bodyPr wrap="none">
             <a:spAutoFit/>
           </a:bodyPr>
           <a:lstStyle/>
@@ -13272,8 +12936,8 @@
         </p:nvSpPr>
         <p:spPr>
           <a:xfrm>
-            <a:off x="1551599" y="1432800"/>
-            <a:ext cx="648000" cy="259200"/>
+            <a:off x="1706399" y="1432800"/>
+            <a:ext cx="802800" cy="259200"/>
           </a:xfrm>
           <a:prstGeom prst="rect">
             <a:avLst/>
@@ -13315,16 +12979,16 @@
         </p:nvSpPr>
         <p:spPr>
           <a:xfrm>
-            <a:off x="1594799" y="1432800"/>
-            <a:ext cx="604800" cy="259200"/>
-          </a:xfrm>
-          <a:prstGeom prst="rect">
-            <a:avLst/>
-          </a:prstGeom>
-          <a:noFill/>
-        </p:spPr>
-        <p:txBody>
-          <a:bodyPr wrap="square">
+            <a:off x="1749599" y="1432800"/>
+            <a:ext cx="759600" cy="259200"/>
+          </a:xfrm>
+          <a:prstGeom prst="rect">
+            <a:avLst/>
+          </a:prstGeom>
+          <a:noFill/>
+        </p:spPr>
+        <p:txBody>
+          <a:bodyPr wrap="none">
             <a:spAutoFit/>
           </a:bodyPr>
           <a:lstStyle/>
@@ -13349,8 +13013,8 @@
         </p:nvSpPr>
         <p:spPr>
           <a:xfrm>
-            <a:off x="2264399" y="1432800"/>
-            <a:ext cx="741600" cy="259200"/>
+            <a:off x="2573999" y="1432800"/>
+            <a:ext cx="1004400" cy="259200"/>
           </a:xfrm>
           <a:prstGeom prst="rect">
             <a:avLst/>
@@ -13392,16 +13056,16 @@
         </p:nvSpPr>
         <p:spPr>
           <a:xfrm>
-            <a:off x="2307599" y="1432800"/>
-            <a:ext cx="698400" cy="259200"/>
-          </a:xfrm>
-          <a:prstGeom prst="rect">
-            <a:avLst/>
-          </a:prstGeom>
-          <a:noFill/>
-        </p:spPr>
-        <p:txBody>
-          <a:bodyPr wrap="square">
+            <a:off x="2617199" y="1432800"/>
+            <a:ext cx="961200" cy="259200"/>
+          </a:xfrm>
+          <a:prstGeom prst="rect">
+            <a:avLst/>
+          </a:prstGeom>
+          <a:noFill/>
+        </p:spPr>
+        <p:txBody>
+          <a:bodyPr wrap="none">
             <a:spAutoFit/>
           </a:bodyPr>
           <a:lstStyle/>
@@ -13426,8 +13090,8 @@
         </p:nvSpPr>
         <p:spPr>
           <a:xfrm>
-            <a:off x="3070799" y="1432800"/>
-            <a:ext cx="648000" cy="259200"/>
+            <a:off x="3643199" y="1432800"/>
+            <a:ext cx="802800" cy="259200"/>
           </a:xfrm>
           <a:prstGeom prst="rect">
             <a:avLst/>
@@ -13469,16 +13133,16 @@
         </p:nvSpPr>
         <p:spPr>
           <a:xfrm>
-            <a:off x="3113999" y="1432800"/>
-            <a:ext cx="604800" cy="259200"/>
-          </a:xfrm>
-          <a:prstGeom prst="rect">
-            <a:avLst/>
-          </a:prstGeom>
-          <a:noFill/>
-        </p:spPr>
-        <p:txBody>
-          <a:bodyPr wrap="square">
+            <a:off x="3686399" y="1432800"/>
+            <a:ext cx="759600" cy="259200"/>
+          </a:xfrm>
+          <a:prstGeom prst="rect">
+            <a:avLst/>
+          </a:prstGeom>
+          <a:noFill/>
+        </p:spPr>
+        <p:txBody>
+          <a:bodyPr wrap="none">
             <a:spAutoFit/>
           </a:bodyPr>
           <a:lstStyle/>
@@ -14614,7 +14278,7 @@
         <p:spPr>
           <a:xfrm>
             <a:off x="125999" y="4240800"/>
-            <a:ext cx="1152000" cy="338270"/>
+            <a:ext cx="1152000" cy="349064"/>
           </a:xfrm>
           <a:prstGeom prst="rect">
             <a:avLst/>
@@ -14657,7 +14321,7 @@
         <p:spPr>
           <a:xfrm>
             <a:off x="161999" y="4240800"/>
-            <a:ext cx="1116000" cy="338270"/>
+            <a:ext cx="1116000" cy="349064"/>
           </a:xfrm>
           <a:prstGeom prst="rect">
             <a:avLst/>
@@ -14691,7 +14355,7 @@
         <p:spPr>
           <a:xfrm>
             <a:off x="1299599" y="4240800"/>
-            <a:ext cx="5522400" cy="338270"/>
+            <a:ext cx="5522400" cy="349064"/>
           </a:xfrm>
           <a:prstGeom prst="rect">
             <a:avLst/>
@@ -14724,7 +14388,7 @@
         </p:nvSpPr>
         <p:spPr>
           <a:xfrm>
-            <a:off x="125999" y="4604270"/>
+            <a:off x="125999" y="4615064"/>
             <a:ext cx="1152000" cy="223200"/>
           </a:xfrm>
           <a:prstGeom prst="rect">
@@ -14767,7 +14431,7 @@
         </p:nvSpPr>
         <p:spPr>
           <a:xfrm>
-            <a:off x="161999" y="4604270"/>
+            <a:off x="161999" y="4615064"/>
             <a:ext cx="1116000" cy="223200"/>
           </a:xfrm>
           <a:prstGeom prst="rect">
@@ -14801,7 +14465,7 @@
         </p:nvSpPr>
         <p:spPr>
           <a:xfrm>
-            <a:off x="1299599" y="4604270"/>
+            <a:off x="1299599" y="4615064"/>
             <a:ext cx="5522400" cy="223200"/>
           </a:xfrm>
           <a:prstGeom prst="rect">
@@ -14870,33 +14534,9 @@
           </a:p>
         </p:txBody>
       </p:sp>
-      <p:pic>
-        <p:nvPicPr>
-          <p:cNvPr id="59" name="Picture 58" descr="1779266493930_yt6kq.jpg"/>
-          <p:cNvPicPr>
-            <a:picLocks noChangeAspect="1"/>
-          </p:cNvPicPr>
-          <p:nvPr/>
-        </p:nvPicPr>
-        <p:blipFill>
-          <a:blip r:embed="rId2"/>
-          <a:stretch>
-            <a:fillRect/>
-          </a:stretch>
-        </p:blipFill>
-        <p:spPr>
-          <a:xfrm>
-            <a:off x="6929999" y="2468700"/>
-            <a:ext cx="2550601" cy="2550601"/>
-          </a:xfrm>
-          <a:prstGeom prst="rect">
-            <a:avLst/>
-          </a:prstGeom>
-        </p:spPr>
-      </p:pic>
-      <p:sp>
-        <p:nvSpPr>
-          <p:cNvPr id="60" name="Rectangle 59"/>
+      <p:sp>
+        <p:nvSpPr>
+          <p:cNvPr id="59" name="Rectangle 58"/>
           <p:cNvSpPr/>
           <p:nvPr/>
         </p:nvSpPr>
@@ -14937,30 +14577,6 @@
           </a:p>
         </p:txBody>
       </p:sp>
-      <p:pic>
-        <p:nvPicPr>
-          <p:cNvPr id="61" name="Picture 60" descr="1779266493931_dinsd.jpg"/>
-          <p:cNvPicPr>
-            <a:picLocks noChangeAspect="1"/>
-          </p:cNvPicPr>
-          <p:nvPr/>
-        </p:nvPicPr>
-        <p:blipFill>
-          <a:blip r:embed="rId3"/>
-          <a:stretch>
-            <a:fillRect/>
-          </a:stretch>
-        </p:blipFill>
-        <p:spPr>
-          <a:xfrm>
-            <a:off x="9516600" y="2468700"/>
-            <a:ext cx="2550601" cy="2550601"/>
-          </a:xfrm>
-          <a:prstGeom prst="rect">
-            <a:avLst/>
-          </a:prstGeom>
-        </p:spPr>
-      </p:pic>
     </p:spTree>
   </p:cSld>
   <p:clrMapOvr>
@@ -15415,7 +15031,7 @@
           <a:noFill/>
         </p:spPr>
         <p:txBody>
-          <a:bodyPr wrap="square">
+          <a:bodyPr wrap="none">
             <a:spAutoFit/>
           </a:bodyPr>
           <a:lstStyle/>
@@ -15441,7 +15057,7 @@
         <p:spPr>
           <a:xfrm>
             <a:off x="838799" y="1432800"/>
-            <a:ext cx="648000" cy="259200"/>
+            <a:ext cx="802800" cy="259200"/>
           </a:xfrm>
           <a:prstGeom prst="rect">
             <a:avLst/>
@@ -15484,15 +15100,15 @@
         <p:spPr>
           <a:xfrm>
             <a:off x="881999" y="1432800"/>
-            <a:ext cx="604800" cy="259200"/>
-          </a:xfrm>
-          <a:prstGeom prst="rect">
-            <a:avLst/>
-          </a:prstGeom>
-          <a:noFill/>
-        </p:spPr>
-        <p:txBody>
-          <a:bodyPr wrap="square">
+            <a:ext cx="759600" cy="259200"/>
+          </a:xfrm>
+          <a:prstGeom prst="rect">
+            <a:avLst/>
+          </a:prstGeom>
+          <a:noFill/>
+        </p:spPr>
+        <p:txBody>
+          <a:bodyPr wrap="none">
             <a:spAutoFit/>
           </a:bodyPr>
           <a:lstStyle/>
@@ -15517,8 +15133,8 @@
         </p:nvSpPr>
         <p:spPr>
           <a:xfrm>
-            <a:off x="1551599" y="1432800"/>
-            <a:ext cx="680400" cy="259200"/>
+            <a:off x="1706399" y="1432800"/>
+            <a:ext cx="903600" cy="259200"/>
           </a:xfrm>
           <a:prstGeom prst="rect">
             <a:avLst/>
@@ -15560,16 +15176,16 @@
         </p:nvSpPr>
         <p:spPr>
           <a:xfrm>
-            <a:off x="1594799" y="1432800"/>
-            <a:ext cx="637200" cy="259200"/>
-          </a:xfrm>
-          <a:prstGeom prst="rect">
-            <a:avLst/>
-          </a:prstGeom>
-          <a:noFill/>
-        </p:spPr>
-        <p:txBody>
-          <a:bodyPr wrap="square">
+            <a:off x="1749599" y="1432800"/>
+            <a:ext cx="860400" cy="259200"/>
+          </a:xfrm>
+          <a:prstGeom prst="rect">
+            <a:avLst/>
+          </a:prstGeom>
+          <a:noFill/>
+        </p:spPr>
+        <p:txBody>
+          <a:bodyPr wrap="none">
             <a:spAutoFit/>
           </a:bodyPr>
           <a:lstStyle/>
@@ -15594,8 +15210,8 @@
         </p:nvSpPr>
         <p:spPr>
           <a:xfrm>
-            <a:off x="2296799" y="1432800"/>
-            <a:ext cx="741600" cy="259200"/>
+            <a:off x="2674799" y="1432800"/>
+            <a:ext cx="1004400" cy="259200"/>
           </a:xfrm>
           <a:prstGeom prst="rect">
             <a:avLst/>
@@ -15637,16 +15253,16 @@
         </p:nvSpPr>
         <p:spPr>
           <a:xfrm>
-            <a:off x="2339999" y="1432800"/>
-            <a:ext cx="698400" cy="259200"/>
-          </a:xfrm>
-          <a:prstGeom prst="rect">
-            <a:avLst/>
-          </a:prstGeom>
-          <a:noFill/>
-        </p:spPr>
-        <p:txBody>
-          <a:bodyPr wrap="square">
+            <a:off x="2717999" y="1432800"/>
+            <a:ext cx="961200" cy="259200"/>
+          </a:xfrm>
+          <a:prstGeom prst="rect">
+            <a:avLst/>
+          </a:prstGeom>
+          <a:noFill/>
+        </p:spPr>
+        <p:txBody>
+          <a:bodyPr wrap="none">
             <a:spAutoFit/>
           </a:bodyPr>
           <a:lstStyle/>
@@ -15671,7 +15287,7 @@
         </p:nvSpPr>
         <p:spPr>
           <a:xfrm>
-            <a:off x="3103199" y="1432800"/>
+            <a:off x="3743999" y="1432800"/>
             <a:ext cx="648000" cy="259200"/>
           </a:xfrm>
           <a:prstGeom prst="rect">
@@ -15714,7 +15330,7 @@
         </p:nvSpPr>
         <p:spPr>
           <a:xfrm>
-            <a:off x="3146399" y="1432800"/>
+            <a:off x="3787199" y="1432800"/>
             <a:ext cx="604800" cy="259200"/>
           </a:xfrm>
           <a:prstGeom prst="rect">
@@ -15723,7 +15339,7 @@
           <a:noFill/>
         </p:spPr>
         <p:txBody>
-          <a:bodyPr wrap="square">
+          <a:bodyPr wrap="none">
             <a:spAutoFit/>
           </a:bodyPr>
           <a:lstStyle/>
@@ -16859,7 +16475,7 @@
         <p:spPr>
           <a:xfrm>
             <a:off x="125999" y="4240800"/>
-            <a:ext cx="1152000" cy="223200"/>
+            <a:ext cx="1152000" cy="349064"/>
           </a:xfrm>
           <a:prstGeom prst="rect">
             <a:avLst/>
@@ -16902,7 +16518,7 @@
         <p:spPr>
           <a:xfrm>
             <a:off x="161999" y="4240800"/>
-            <a:ext cx="1116000" cy="223200"/>
+            <a:ext cx="1116000" cy="349064"/>
           </a:xfrm>
           <a:prstGeom prst="rect">
             <a:avLst/>
@@ -16936,7 +16552,7 @@
         <p:spPr>
           <a:xfrm>
             <a:off x="1299599" y="4240800"/>
-            <a:ext cx="5522400" cy="223200"/>
+            <a:ext cx="5522400" cy="349064"/>
           </a:xfrm>
           <a:prstGeom prst="rect">
             <a:avLst/>
@@ -16969,8 +16585,8 @@
         </p:nvSpPr>
         <p:spPr>
           <a:xfrm>
-            <a:off x="125999" y="4489200"/>
-            <a:ext cx="1152000" cy="338270"/>
+            <a:off x="125999" y="4615064"/>
+            <a:ext cx="1152000" cy="349064"/>
           </a:xfrm>
           <a:prstGeom prst="rect">
             <a:avLst/>
@@ -17012,8 +16628,8 @@
         </p:nvSpPr>
         <p:spPr>
           <a:xfrm>
-            <a:off x="161999" y="4489200"/>
-            <a:ext cx="1116000" cy="338270"/>
+            <a:off x="161999" y="4615064"/>
+            <a:ext cx="1116000" cy="349064"/>
           </a:xfrm>
           <a:prstGeom prst="rect">
             <a:avLst/>
@@ -17046,8 +16662,8 @@
         </p:nvSpPr>
         <p:spPr>
           <a:xfrm>
-            <a:off x="1299599" y="4489200"/>
-            <a:ext cx="5522400" cy="338270"/>
+            <a:off x="1299599" y="4615064"/>
+            <a:ext cx="5522400" cy="349064"/>
           </a:xfrm>
           <a:prstGeom prst="rect">
             <a:avLst/>
@@ -17115,33 +16731,9 @@
           </a:p>
         </p:txBody>
       </p:sp>
-      <p:pic>
-        <p:nvPicPr>
-          <p:cNvPr id="59" name="Picture 58" descr="1779266493933_wxm5q.jpg"/>
-          <p:cNvPicPr>
-            <a:picLocks noChangeAspect="1"/>
-          </p:cNvPicPr>
-          <p:nvPr/>
-        </p:nvPicPr>
-        <p:blipFill>
-          <a:blip r:embed="rId2"/>
-          <a:stretch>
-            <a:fillRect/>
-          </a:stretch>
-        </p:blipFill>
-        <p:spPr>
-          <a:xfrm>
-            <a:off x="6929999" y="2787525"/>
-            <a:ext cx="2550601" cy="1912950"/>
-          </a:xfrm>
-          <a:prstGeom prst="rect">
-            <a:avLst/>
-          </a:prstGeom>
-        </p:spPr>
-      </p:pic>
-      <p:sp>
-        <p:nvSpPr>
-          <p:cNvPr id="60" name="Rectangle 59"/>
+      <p:sp>
+        <p:nvSpPr>
+          <p:cNvPr id="59" name="Rectangle 58"/>
           <p:cNvSpPr/>
           <p:nvPr/>
         </p:nvSpPr>
@@ -17182,30 +16774,6 @@
           </a:p>
         </p:txBody>
       </p:sp>
-      <p:pic>
-        <p:nvPicPr>
-          <p:cNvPr id="61" name="Picture 60" descr="1779266493934_f1ymd.jpg"/>
-          <p:cNvPicPr>
-            <a:picLocks noChangeAspect="1"/>
-          </p:cNvPicPr>
-          <p:nvPr/>
-        </p:nvPicPr>
-        <p:blipFill>
-          <a:blip r:embed="rId3"/>
-          <a:stretch>
-            <a:fillRect/>
-          </a:stretch>
-        </p:blipFill>
-        <p:spPr>
-          <a:xfrm>
-            <a:off x="9516600" y="2468700"/>
-            <a:ext cx="2550601" cy="2550601"/>
-          </a:xfrm>
-          <a:prstGeom prst="rect">
-            <a:avLst/>
-          </a:prstGeom>
-        </p:spPr>
-      </p:pic>
     </p:spTree>
   </p:cSld>
   <p:clrMapOvr>
@@ -17660,7 +17228,7 @@
           <a:noFill/>
         </p:spPr>
         <p:txBody>
-          <a:bodyPr wrap="square">
+          <a:bodyPr wrap="none">
             <a:spAutoFit/>
           </a:bodyPr>
           <a:lstStyle/>
@@ -17686,7 +17254,7 @@
         <p:spPr>
           <a:xfrm>
             <a:off x="838799" y="1432800"/>
-            <a:ext cx="648000" cy="259200"/>
+            <a:ext cx="802800" cy="259200"/>
           </a:xfrm>
           <a:prstGeom prst="rect">
             <a:avLst/>
@@ -17729,15 +17297,15 @@
         <p:spPr>
           <a:xfrm>
             <a:off x="881999" y="1432800"/>
-            <a:ext cx="604800" cy="259200"/>
-          </a:xfrm>
-          <a:prstGeom prst="rect">
-            <a:avLst/>
-          </a:prstGeom>
-          <a:noFill/>
-        </p:spPr>
-        <p:txBody>
-          <a:bodyPr wrap="square">
+            <a:ext cx="759600" cy="259200"/>
+          </a:xfrm>
+          <a:prstGeom prst="rect">
+            <a:avLst/>
+          </a:prstGeom>
+          <a:noFill/>
+        </p:spPr>
+        <p:txBody>
+          <a:bodyPr wrap="none">
             <a:spAutoFit/>
           </a:bodyPr>
           <a:lstStyle/>
@@ -17762,8 +17330,8 @@
         </p:nvSpPr>
         <p:spPr>
           <a:xfrm>
-            <a:off x="1551599" y="1432800"/>
-            <a:ext cx="680400" cy="259200"/>
+            <a:off x="1706399" y="1432800"/>
+            <a:ext cx="903600" cy="259200"/>
           </a:xfrm>
           <a:prstGeom prst="rect">
             <a:avLst/>
@@ -17805,16 +17373,16 @@
         </p:nvSpPr>
         <p:spPr>
           <a:xfrm>
-            <a:off x="1594799" y="1432800"/>
-            <a:ext cx="637200" cy="259200"/>
-          </a:xfrm>
-          <a:prstGeom prst="rect">
-            <a:avLst/>
-          </a:prstGeom>
-          <a:noFill/>
-        </p:spPr>
-        <p:txBody>
-          <a:bodyPr wrap="square">
+            <a:off x="1749599" y="1432800"/>
+            <a:ext cx="860400" cy="259200"/>
+          </a:xfrm>
+          <a:prstGeom prst="rect">
+            <a:avLst/>
+          </a:prstGeom>
+          <a:noFill/>
+        </p:spPr>
+        <p:txBody>
+          <a:bodyPr wrap="none">
             <a:spAutoFit/>
           </a:bodyPr>
           <a:lstStyle/>
@@ -17839,8 +17407,8 @@
         </p:nvSpPr>
         <p:spPr>
           <a:xfrm>
-            <a:off x="2296799" y="1432800"/>
-            <a:ext cx="741600" cy="259200"/>
+            <a:off x="2674799" y="1432800"/>
+            <a:ext cx="1004400" cy="259200"/>
           </a:xfrm>
           <a:prstGeom prst="rect">
             <a:avLst/>
@@ -17882,16 +17450,16 @@
         </p:nvSpPr>
         <p:spPr>
           <a:xfrm>
-            <a:off x="2339999" y="1432800"/>
-            <a:ext cx="698400" cy="259200"/>
-          </a:xfrm>
-          <a:prstGeom prst="rect">
-            <a:avLst/>
-          </a:prstGeom>
-          <a:noFill/>
-        </p:spPr>
-        <p:txBody>
-          <a:bodyPr wrap="square">
+            <a:off x="2717999" y="1432800"/>
+            <a:ext cx="961200" cy="259200"/>
+          </a:xfrm>
+          <a:prstGeom prst="rect">
+            <a:avLst/>
+          </a:prstGeom>
+          <a:noFill/>
+        </p:spPr>
+        <p:txBody>
+          <a:bodyPr wrap="none">
             <a:spAutoFit/>
           </a:bodyPr>
           <a:lstStyle/>
@@ -17916,8 +17484,8 @@
         </p:nvSpPr>
         <p:spPr>
           <a:xfrm>
-            <a:off x="3103199" y="1432800"/>
-            <a:ext cx="648000" cy="259200"/>
+            <a:off x="3743999" y="1432800"/>
+            <a:ext cx="802800" cy="259200"/>
           </a:xfrm>
           <a:prstGeom prst="rect">
             <a:avLst/>
@@ -17959,16 +17527,16 @@
         </p:nvSpPr>
         <p:spPr>
           <a:xfrm>
-            <a:off x="3146399" y="1432800"/>
-            <a:ext cx="604800" cy="259200"/>
-          </a:xfrm>
-          <a:prstGeom prst="rect">
-            <a:avLst/>
-          </a:prstGeom>
-          <a:noFill/>
-        </p:spPr>
-        <p:txBody>
-          <a:bodyPr wrap="square">
+            <a:off x="3787199" y="1432800"/>
+            <a:ext cx="759600" cy="259200"/>
+          </a:xfrm>
+          <a:prstGeom prst="rect">
+            <a:avLst/>
+          </a:prstGeom>
+          <a:noFill/>
+        </p:spPr>
+        <p:txBody>
+          <a:bodyPr wrap="none">
             <a:spAutoFit/>
           </a:bodyPr>
           <a:lstStyle/>
@@ -17993,7 +17561,7 @@
         </p:nvSpPr>
         <p:spPr>
           <a:xfrm>
-            <a:off x="3815999" y="1432800"/>
+            <a:off x="4611599" y="1432800"/>
             <a:ext cx="648000" cy="259200"/>
           </a:xfrm>
           <a:prstGeom prst="rect">
@@ -18036,7 +17604,7 @@
         </p:nvSpPr>
         <p:spPr>
           <a:xfrm>
-            <a:off x="3859199" y="1432800"/>
+            <a:off x="4654799" y="1432800"/>
             <a:ext cx="604800" cy="259200"/>
           </a:xfrm>
           <a:prstGeom prst="rect">
@@ -18045,7 +17613,7 @@
           <a:noFill/>
         </p:spPr>
         <p:txBody>
-          <a:bodyPr wrap="square">
+          <a:bodyPr wrap="none">
             <a:spAutoFit/>
           </a:bodyPr>
           <a:lstStyle/>
@@ -19292,7 +18860,7 @@
         <p:spPr>
           <a:xfrm>
             <a:off x="125999" y="4489200"/>
-            <a:ext cx="1152000" cy="338270"/>
+            <a:ext cx="1152000" cy="349064"/>
           </a:xfrm>
           <a:prstGeom prst="rect">
             <a:avLst/>
@@ -19335,7 +18903,7 @@
         <p:spPr>
           <a:xfrm>
             <a:off x="161999" y="4489200"/>
-            <a:ext cx="1116000" cy="338270"/>
+            <a:ext cx="1116000" cy="349064"/>
           </a:xfrm>
           <a:prstGeom prst="rect">
             <a:avLst/>
@@ -19369,7 +18937,7 @@
         <p:spPr>
           <a:xfrm>
             <a:off x="1299599" y="4489200"/>
-            <a:ext cx="5522400" cy="338270"/>
+            <a:ext cx="5522400" cy="349064"/>
           </a:xfrm>
           <a:prstGeom prst="rect">
             <a:avLst/>
@@ -19437,33 +19005,9 @@
           </a:p>
         </p:txBody>
       </p:sp>
-      <p:pic>
-        <p:nvPicPr>
-          <p:cNvPr id="61" name="Picture 60" descr="1779266493936_8ygdh.jpg"/>
-          <p:cNvPicPr>
-            <a:picLocks noChangeAspect="1"/>
-          </p:cNvPicPr>
-          <p:nvPr/>
-        </p:nvPicPr>
-        <p:blipFill>
-          <a:blip r:embed="rId2"/>
-          <a:stretch>
-            <a:fillRect/>
-          </a:stretch>
-        </p:blipFill>
-        <p:spPr>
-          <a:xfrm>
-            <a:off x="6929999" y="2787525"/>
-            <a:ext cx="2550601" cy="1912950"/>
-          </a:xfrm>
-          <a:prstGeom prst="rect">
-            <a:avLst/>
-          </a:prstGeom>
-        </p:spPr>
-      </p:pic>
-      <p:sp>
-        <p:nvSpPr>
-          <p:cNvPr id="62" name="Rectangle 61"/>
+      <p:sp>
+        <p:nvSpPr>
+          <p:cNvPr id="61" name="Rectangle 60"/>
           <p:cNvSpPr/>
           <p:nvPr/>
         </p:nvSpPr>
@@ -19504,30 +19048,6 @@
           </a:p>
         </p:txBody>
       </p:sp>
-      <p:pic>
-        <p:nvPicPr>
-          <p:cNvPr id="63" name="Picture 62" descr="1779266493938_bfux8.jpg"/>
-          <p:cNvPicPr>
-            <a:picLocks noChangeAspect="1"/>
-          </p:cNvPicPr>
-          <p:nvPr/>
-        </p:nvPicPr>
-        <p:blipFill>
-          <a:blip r:embed="rId3"/>
-          <a:stretch>
-            <a:fillRect/>
-          </a:stretch>
-        </p:blipFill>
-        <p:spPr>
-          <a:xfrm>
-            <a:off x="9516600" y="2468700"/>
-            <a:ext cx="2550601" cy="2550601"/>
-          </a:xfrm>
-          <a:prstGeom prst="rect">
-            <a:avLst/>
-          </a:prstGeom>
-        </p:spPr>
-      </p:pic>
     </p:spTree>
   </p:cSld>
   <p:clrMapOvr>
@@ -20111,7 +19631,7 @@
           <a:noFill/>
         </p:spPr>
         <p:txBody>
-          <a:bodyPr wrap="square">
+          <a:bodyPr wrap="none">
             <a:spAutoFit/>
           </a:bodyPr>
           <a:lstStyle/>
@@ -20137,7 +19657,7 @@
         <p:spPr>
           <a:xfrm>
             <a:off x="838799" y="1432800"/>
-            <a:ext cx="648000" cy="259200"/>
+            <a:ext cx="802800" cy="259200"/>
           </a:xfrm>
           <a:prstGeom prst="rect">
             <a:avLst/>
@@ -20180,15 +19700,15 @@
         <p:spPr>
           <a:xfrm>
             <a:off x="881999" y="1432800"/>
-            <a:ext cx="604800" cy="259200"/>
-          </a:xfrm>
-          <a:prstGeom prst="rect">
-            <a:avLst/>
-          </a:prstGeom>
-          <a:noFill/>
-        </p:spPr>
-        <p:txBody>
-          <a:bodyPr wrap="square">
+            <a:ext cx="759600" cy="259200"/>
+          </a:xfrm>
+          <a:prstGeom prst="rect">
+            <a:avLst/>
+          </a:prstGeom>
+          <a:noFill/>
+        </p:spPr>
+        <p:txBody>
+          <a:bodyPr wrap="none">
             <a:spAutoFit/>
           </a:bodyPr>
           <a:lstStyle/>
@@ -20213,8 +19733,8 @@
         </p:nvSpPr>
         <p:spPr>
           <a:xfrm>
-            <a:off x="1551599" y="1432800"/>
-            <a:ext cx="648000" cy="259200"/>
+            <a:off x="1706399" y="1432800"/>
+            <a:ext cx="802800" cy="259200"/>
           </a:xfrm>
           <a:prstGeom prst="rect">
             <a:avLst/>
@@ -20256,16 +19776,16 @@
         </p:nvSpPr>
         <p:spPr>
           <a:xfrm>
-            <a:off x="1594799" y="1432800"/>
-            <a:ext cx="604800" cy="259200"/>
-          </a:xfrm>
-          <a:prstGeom prst="rect">
-            <a:avLst/>
-          </a:prstGeom>
-          <a:noFill/>
-        </p:spPr>
-        <p:txBody>
-          <a:bodyPr wrap="square">
+            <a:off x="1749599" y="1432800"/>
+            <a:ext cx="759600" cy="259200"/>
+          </a:xfrm>
+          <a:prstGeom prst="rect">
+            <a:avLst/>
+          </a:prstGeom>
+          <a:noFill/>
+        </p:spPr>
+        <p:txBody>
+          <a:bodyPr wrap="none">
             <a:spAutoFit/>
           </a:bodyPr>
           <a:lstStyle/>
@@ -20290,8 +19810,8 @@
         </p:nvSpPr>
         <p:spPr>
           <a:xfrm>
-            <a:off x="2264399" y="1432800"/>
-            <a:ext cx="741600" cy="259200"/>
+            <a:off x="2573999" y="1432800"/>
+            <a:ext cx="1004400" cy="259200"/>
           </a:xfrm>
           <a:prstGeom prst="rect">
             <a:avLst/>
@@ -20333,16 +19853,16 @@
         </p:nvSpPr>
         <p:spPr>
           <a:xfrm>
-            <a:off x="2307599" y="1432800"/>
-            <a:ext cx="698400" cy="259200"/>
-          </a:xfrm>
-          <a:prstGeom prst="rect">
-            <a:avLst/>
-          </a:prstGeom>
-          <a:noFill/>
-        </p:spPr>
-        <p:txBody>
-          <a:bodyPr wrap="square">
+            <a:off x="2617199" y="1432800"/>
+            <a:ext cx="961200" cy="259200"/>
+          </a:xfrm>
+          <a:prstGeom prst="rect">
+            <a:avLst/>
+          </a:prstGeom>
+          <a:noFill/>
+        </p:spPr>
+        <p:txBody>
+          <a:bodyPr wrap="none">
             <a:spAutoFit/>
           </a:bodyPr>
           <a:lstStyle/>
@@ -21478,7 +20998,7 @@
         <p:spPr>
           <a:xfrm>
             <a:off x="125999" y="4240800"/>
-            <a:ext cx="1152000" cy="338270"/>
+            <a:ext cx="1152000" cy="494796"/>
           </a:xfrm>
           <a:prstGeom prst="rect">
             <a:avLst/>
@@ -21521,7 +21041,7 @@
         <p:spPr>
           <a:xfrm>
             <a:off x="161999" y="4240800"/>
-            <a:ext cx="1116000" cy="338270"/>
+            <a:ext cx="1116000" cy="494796"/>
           </a:xfrm>
           <a:prstGeom prst="rect">
             <a:avLst/>
@@ -21555,7 +21075,7 @@
         <p:spPr>
           <a:xfrm>
             <a:off x="1299599" y="4240800"/>
-            <a:ext cx="5522400" cy="338270"/>
+            <a:ext cx="5522400" cy="494796"/>
           </a:xfrm>
           <a:prstGeom prst="rect">
             <a:avLst/>
@@ -21588,8 +21108,8 @@
         </p:nvSpPr>
         <p:spPr>
           <a:xfrm>
-            <a:off x="125999" y="4604270"/>
-            <a:ext cx="1152000" cy="478605"/>
+            <a:off x="125999" y="4760796"/>
+            <a:ext cx="1152000" cy="494796"/>
           </a:xfrm>
           <a:prstGeom prst="rect">
             <a:avLst/>
@@ -21631,8 +21151,8 @@
         </p:nvSpPr>
         <p:spPr>
           <a:xfrm>
-            <a:off x="161999" y="4604270"/>
-            <a:ext cx="1116000" cy="478605"/>
+            <a:off x="161999" y="4760796"/>
+            <a:ext cx="1116000" cy="494796"/>
           </a:xfrm>
           <a:prstGeom prst="rect">
             <a:avLst/>
@@ -21665,8 +21185,8 @@
         </p:nvSpPr>
         <p:spPr>
           <a:xfrm>
-            <a:off x="1299599" y="4604270"/>
-            <a:ext cx="5522400" cy="478605"/>
+            <a:off x="1299599" y="4760796"/>
+            <a:ext cx="5522400" cy="494796"/>
           </a:xfrm>
           <a:prstGeom prst="rect">
             <a:avLst/>
@@ -21734,33 +21254,9 @@
           </a:p>
         </p:txBody>
       </p:sp>
-      <p:pic>
-        <p:nvPicPr>
-          <p:cNvPr id="57" name="Picture 56" descr="1779265156830_a0xmv.jpg"/>
-          <p:cNvPicPr>
-            <a:picLocks noChangeAspect="1"/>
-          </p:cNvPicPr>
-          <p:nvPr/>
-        </p:nvPicPr>
-        <p:blipFill>
-          <a:blip r:embed="rId2"/>
-          <a:stretch>
-            <a:fillRect/>
-          </a:stretch>
-        </p:blipFill>
-        <p:spPr>
-          <a:xfrm>
-            <a:off x="7368749" y="756000"/>
-            <a:ext cx="1673100" cy="2970000"/>
-          </a:xfrm>
-          <a:prstGeom prst="rect">
-            <a:avLst/>
-          </a:prstGeom>
-        </p:spPr>
-      </p:pic>
-      <p:sp>
-        <p:nvSpPr>
-          <p:cNvPr id="58" name="Rectangle 57"/>
+      <p:sp>
+        <p:nvSpPr>
+          <p:cNvPr id="57" name="Rectangle 56"/>
           <p:cNvSpPr/>
           <p:nvPr/>
         </p:nvSpPr>
@@ -21801,33 +21297,9 @@
           </a:p>
         </p:txBody>
       </p:sp>
-      <p:pic>
-        <p:nvPicPr>
-          <p:cNvPr id="59" name="Picture 58" descr="1779266421349_v405i.jpg"/>
-          <p:cNvPicPr>
-            <a:picLocks noChangeAspect="1"/>
-          </p:cNvPicPr>
-          <p:nvPr/>
-        </p:nvPicPr>
-        <p:blipFill>
-          <a:blip r:embed="rId3"/>
-          <a:stretch>
-            <a:fillRect/>
-          </a:stretch>
-        </p:blipFill>
-        <p:spPr>
-          <a:xfrm>
-            <a:off x="10009773" y="756000"/>
-            <a:ext cx="1564255" cy="2970000"/>
-          </a:xfrm>
-          <a:prstGeom prst="rect">
-            <a:avLst/>
-          </a:prstGeom>
-        </p:spPr>
-      </p:pic>
-      <p:sp>
-        <p:nvSpPr>
-          <p:cNvPr id="60" name="Rectangle 59"/>
+      <p:sp>
+        <p:nvSpPr>
+          <p:cNvPr id="58" name="Rectangle 57"/>
           <p:cNvSpPr/>
           <p:nvPr/>
         </p:nvSpPr>
@@ -21868,30 +21340,6 @@
           </a:p>
         </p:txBody>
       </p:sp>
-      <p:pic>
-        <p:nvPicPr>
-          <p:cNvPr id="61" name="Picture 60" descr="1779266476803_np7vt.jpg"/>
-          <p:cNvPicPr>
-            <a:picLocks noChangeAspect="1"/>
-          </p:cNvPicPr>
-          <p:nvPr/>
-        </p:nvPicPr>
-        <p:blipFill>
-          <a:blip r:embed="rId4"/>
-          <a:stretch>
-            <a:fillRect/>
-          </a:stretch>
-        </p:blipFill>
-        <p:spPr>
-          <a:xfrm>
-            <a:off x="7091549" y="3762000"/>
-            <a:ext cx="2227500" cy="2970000"/>
-          </a:xfrm>
-          <a:prstGeom prst="rect">
-            <a:avLst/>
-          </a:prstGeom>
-        </p:spPr>
-      </p:pic>
     </p:spTree>
   </p:cSld>
   <p:clrMapOvr>
@@ -22346,7 +21794,7 @@
           <a:noFill/>
         </p:spPr>
         <p:txBody>
-          <a:bodyPr wrap="square">
+          <a:bodyPr wrap="none">
             <a:spAutoFit/>
           </a:bodyPr>
           <a:lstStyle/>
@@ -22372,7 +21820,7 @@
         <p:spPr>
           <a:xfrm>
             <a:off x="838799" y="1432800"/>
-            <a:ext cx="648000" cy="259200"/>
+            <a:ext cx="802800" cy="259200"/>
           </a:xfrm>
           <a:prstGeom prst="rect">
             <a:avLst/>
@@ -22415,15 +21863,15 @@
         <p:spPr>
           <a:xfrm>
             <a:off x="881999" y="1432800"/>
-            <a:ext cx="604800" cy="259200"/>
-          </a:xfrm>
-          <a:prstGeom prst="rect">
-            <a:avLst/>
-          </a:prstGeom>
-          <a:noFill/>
-        </p:spPr>
-        <p:txBody>
-          <a:bodyPr wrap="square">
+            <a:ext cx="759600" cy="259200"/>
+          </a:xfrm>
+          <a:prstGeom prst="rect">
+            <a:avLst/>
+          </a:prstGeom>
+          <a:noFill/>
+        </p:spPr>
+        <p:txBody>
+          <a:bodyPr wrap="none">
             <a:spAutoFit/>
           </a:bodyPr>
           <a:lstStyle/>
@@ -22448,8 +21896,8 @@
         </p:nvSpPr>
         <p:spPr>
           <a:xfrm>
-            <a:off x="1551599" y="1432800"/>
-            <a:ext cx="741600" cy="259200"/>
+            <a:off x="1706399" y="1432800"/>
+            <a:ext cx="1004400" cy="259200"/>
           </a:xfrm>
           <a:prstGeom prst="rect">
             <a:avLst/>
@@ -22491,16 +21939,16 @@
         </p:nvSpPr>
         <p:spPr>
           <a:xfrm>
-            <a:off x="1594799" y="1432800"/>
-            <a:ext cx="698400" cy="259200"/>
-          </a:xfrm>
-          <a:prstGeom prst="rect">
-            <a:avLst/>
-          </a:prstGeom>
-          <a:noFill/>
-        </p:spPr>
-        <p:txBody>
-          <a:bodyPr wrap="square">
+            <a:off x="1749599" y="1432800"/>
+            <a:ext cx="961200" cy="259200"/>
+          </a:xfrm>
+          <a:prstGeom prst="rect">
+            <a:avLst/>
+          </a:prstGeom>
+          <a:noFill/>
+        </p:spPr>
+        <p:txBody>
+          <a:bodyPr wrap="none">
             <a:spAutoFit/>
           </a:bodyPr>
           <a:lstStyle/>
@@ -22525,8 +21973,8 @@
         </p:nvSpPr>
         <p:spPr>
           <a:xfrm>
-            <a:off x="2357999" y="1432800"/>
-            <a:ext cx="741600" cy="259200"/>
+            <a:off x="2775599" y="1432800"/>
+            <a:ext cx="1004400" cy="259200"/>
           </a:xfrm>
           <a:prstGeom prst="rect">
             <a:avLst/>
@@ -22568,16 +22016,16 @@
         </p:nvSpPr>
         <p:spPr>
           <a:xfrm>
-            <a:off x="2401199" y="1432800"/>
-            <a:ext cx="698400" cy="259200"/>
-          </a:xfrm>
-          <a:prstGeom prst="rect">
-            <a:avLst/>
-          </a:prstGeom>
-          <a:noFill/>
-        </p:spPr>
-        <p:txBody>
-          <a:bodyPr wrap="square">
+            <a:off x="2818799" y="1432800"/>
+            <a:ext cx="961200" cy="259200"/>
+          </a:xfrm>
+          <a:prstGeom prst="rect">
+            <a:avLst/>
+          </a:prstGeom>
+          <a:noFill/>
+        </p:spPr>
+        <p:txBody>
+          <a:bodyPr wrap="none">
             <a:spAutoFit/>
           </a:bodyPr>
           <a:lstStyle/>
@@ -22602,8 +22050,8 @@
         </p:nvSpPr>
         <p:spPr>
           <a:xfrm>
-            <a:off x="3164399" y="1432800"/>
-            <a:ext cx="648000" cy="259200"/>
+            <a:off x="3844799" y="1432800"/>
+            <a:ext cx="802800" cy="259200"/>
           </a:xfrm>
           <a:prstGeom prst="rect">
             <a:avLst/>
@@ -22645,16 +22093,16 @@
         </p:nvSpPr>
         <p:spPr>
           <a:xfrm>
-            <a:off x="3207599" y="1432800"/>
-            <a:ext cx="604800" cy="259200"/>
-          </a:xfrm>
-          <a:prstGeom prst="rect">
-            <a:avLst/>
-          </a:prstGeom>
-          <a:noFill/>
-        </p:spPr>
-        <p:txBody>
-          <a:bodyPr wrap="square">
+            <a:off x="3887999" y="1432800"/>
+            <a:ext cx="759600" cy="259200"/>
+          </a:xfrm>
+          <a:prstGeom prst="rect">
+            <a:avLst/>
+          </a:prstGeom>
+          <a:noFill/>
+        </p:spPr>
+        <p:txBody>
+          <a:bodyPr wrap="none">
             <a:spAutoFit/>
           </a:bodyPr>
           <a:lstStyle/>
@@ -22791,7 +22239,7 @@
         <p:spPr>
           <a:xfrm>
             <a:off x="125999" y="2005200"/>
-            <a:ext cx="1152000" cy="338270"/>
+            <a:ext cx="1152000" cy="349064"/>
           </a:xfrm>
           <a:prstGeom prst="rect">
             <a:avLst/>
@@ -22834,7 +22282,7 @@
         <p:spPr>
           <a:xfrm>
             <a:off x="161999" y="2005200"/>
-            <a:ext cx="1116000" cy="338270"/>
+            <a:ext cx="1116000" cy="349064"/>
           </a:xfrm>
           <a:prstGeom prst="rect">
             <a:avLst/>
@@ -22868,7 +22316,7 @@
         <p:spPr>
           <a:xfrm>
             <a:off x="1299599" y="2005200"/>
-            <a:ext cx="5522400" cy="338270"/>
+            <a:ext cx="5522400" cy="349064"/>
           </a:xfrm>
           <a:prstGeom prst="rect">
             <a:avLst/>
@@ -22901,8 +22349,8 @@
         </p:nvSpPr>
         <p:spPr>
           <a:xfrm>
-            <a:off x="125999" y="2368670"/>
-            <a:ext cx="1152000" cy="223200"/>
+            <a:off x="125999" y="2379464"/>
+            <a:ext cx="1152000" cy="349064"/>
           </a:xfrm>
           <a:prstGeom prst="rect">
             <a:avLst/>
@@ -22944,8 +22392,8 @@
         </p:nvSpPr>
         <p:spPr>
           <a:xfrm>
-            <a:off x="161999" y="2368670"/>
-            <a:ext cx="1116000" cy="223200"/>
+            <a:off x="161999" y="2379464"/>
+            <a:ext cx="1116000" cy="349064"/>
           </a:xfrm>
           <a:prstGeom prst="rect">
             <a:avLst/>
@@ -22978,8 +22426,8 @@
         </p:nvSpPr>
         <p:spPr>
           <a:xfrm>
-            <a:off x="1299599" y="2368670"/>
-            <a:ext cx="5522400" cy="223200"/>
+            <a:off x="1299599" y="2379464"/>
+            <a:ext cx="5522400" cy="349064"/>
           </a:xfrm>
           <a:prstGeom prst="rect">
             <a:avLst/>
@@ -23012,7 +22460,7 @@
         </p:nvSpPr>
         <p:spPr>
           <a:xfrm>
-            <a:off x="125999" y="2617070"/>
+            <a:off x="125999" y="2753728"/>
             <a:ext cx="1152000" cy="223200"/>
           </a:xfrm>
           <a:prstGeom prst="rect">
@@ -23055,7 +22503,7 @@
         </p:nvSpPr>
         <p:spPr>
           <a:xfrm>
-            <a:off x="161999" y="2617070"/>
+            <a:off x="161999" y="2753728"/>
             <a:ext cx="1116000" cy="223200"/>
           </a:xfrm>
           <a:prstGeom prst="rect">
@@ -23089,7 +22537,7 @@
         </p:nvSpPr>
         <p:spPr>
           <a:xfrm>
-            <a:off x="1299599" y="2617070"/>
+            <a:off x="1299599" y="2753728"/>
             <a:ext cx="5522400" cy="223200"/>
           </a:xfrm>
           <a:prstGeom prst="rect">
@@ -23123,7 +22571,7 @@
         </p:nvSpPr>
         <p:spPr>
           <a:xfrm>
-            <a:off x="125999" y="2865470"/>
+            <a:off x="125999" y="3002128"/>
             <a:ext cx="1152000" cy="223200"/>
           </a:xfrm>
           <a:prstGeom prst="rect">
@@ -23166,7 +22614,7 @@
         </p:nvSpPr>
         <p:spPr>
           <a:xfrm>
-            <a:off x="161999" y="2865470"/>
+            <a:off x="161999" y="3002128"/>
             <a:ext cx="1116000" cy="223200"/>
           </a:xfrm>
           <a:prstGeom prst="rect">
@@ -23200,7 +22648,7 @@
         </p:nvSpPr>
         <p:spPr>
           <a:xfrm>
-            <a:off x="1299599" y="2865470"/>
+            <a:off x="1299599" y="3002128"/>
             <a:ext cx="5522400" cy="223200"/>
           </a:xfrm>
           <a:prstGeom prst="rect">
@@ -23234,7 +22682,7 @@
         </p:nvSpPr>
         <p:spPr>
           <a:xfrm>
-            <a:off x="125999" y="3113870"/>
+            <a:off x="125999" y="3250528"/>
             <a:ext cx="1152000" cy="223200"/>
           </a:xfrm>
           <a:prstGeom prst="rect">
@@ -23277,7 +22725,7 @@
         </p:nvSpPr>
         <p:spPr>
           <a:xfrm>
-            <a:off x="161999" y="3113870"/>
+            <a:off x="161999" y="3250528"/>
             <a:ext cx="1116000" cy="223200"/>
           </a:xfrm>
           <a:prstGeom prst="rect">
@@ -23311,7 +22759,7 @@
         </p:nvSpPr>
         <p:spPr>
           <a:xfrm>
-            <a:off x="1299599" y="3113870"/>
+            <a:off x="1299599" y="3250528"/>
             <a:ext cx="5522400" cy="223200"/>
           </a:xfrm>
           <a:prstGeom prst="rect">
@@ -23345,7 +22793,7 @@
         </p:nvSpPr>
         <p:spPr>
           <a:xfrm>
-            <a:off x="125999" y="3362270"/>
+            <a:off x="125999" y="3498928"/>
             <a:ext cx="1152000" cy="223200"/>
           </a:xfrm>
           <a:prstGeom prst="rect">
@@ -23388,7 +22836,7 @@
         </p:nvSpPr>
         <p:spPr>
           <a:xfrm>
-            <a:off x="161999" y="3362270"/>
+            <a:off x="161999" y="3498928"/>
             <a:ext cx="1116000" cy="223200"/>
           </a:xfrm>
           <a:prstGeom prst="rect">
@@ -23422,7 +22870,7 @@
         </p:nvSpPr>
         <p:spPr>
           <a:xfrm>
-            <a:off x="1299599" y="3362270"/>
+            <a:off x="1299599" y="3498928"/>
             <a:ext cx="5522400" cy="223200"/>
           </a:xfrm>
           <a:prstGeom prst="rect">
@@ -23456,7 +22904,7 @@
         </p:nvSpPr>
         <p:spPr>
           <a:xfrm>
-            <a:off x="125999" y="3610670"/>
+            <a:off x="125999" y="3747328"/>
             <a:ext cx="1152000" cy="223200"/>
           </a:xfrm>
           <a:prstGeom prst="rect">
@@ -23499,7 +22947,7 @@
         </p:nvSpPr>
         <p:spPr>
           <a:xfrm>
-            <a:off x="161999" y="3610670"/>
+            <a:off x="161999" y="3747328"/>
             <a:ext cx="1116000" cy="223200"/>
           </a:xfrm>
           <a:prstGeom prst="rect">
@@ -23533,7 +22981,7 @@
         </p:nvSpPr>
         <p:spPr>
           <a:xfrm>
-            <a:off x="1299599" y="3610670"/>
+            <a:off x="1299599" y="3747328"/>
             <a:ext cx="5522400" cy="223200"/>
           </a:xfrm>
           <a:prstGeom prst="rect">
@@ -23567,7 +23015,7 @@
         </p:nvSpPr>
         <p:spPr>
           <a:xfrm>
-            <a:off x="125999" y="3859070"/>
+            <a:off x="125999" y="3995728"/>
             <a:ext cx="1152000" cy="223200"/>
           </a:xfrm>
           <a:prstGeom prst="rect">
@@ -23610,7 +23058,7 @@
         </p:nvSpPr>
         <p:spPr>
           <a:xfrm>
-            <a:off x="161999" y="3859070"/>
+            <a:off x="161999" y="3995728"/>
             <a:ext cx="1116000" cy="223200"/>
           </a:xfrm>
           <a:prstGeom prst="rect">
@@ -23644,7 +23092,7 @@
         </p:nvSpPr>
         <p:spPr>
           <a:xfrm>
-            <a:off x="1299599" y="3859070"/>
+            <a:off x="1299599" y="3995728"/>
             <a:ext cx="5522400" cy="223200"/>
           </a:xfrm>
           <a:prstGeom prst="rect">
@@ -23678,7 +23126,7 @@
         </p:nvSpPr>
         <p:spPr>
           <a:xfrm>
-            <a:off x="125999" y="4107470"/>
+            <a:off x="125999" y="4244128"/>
             <a:ext cx="1152000" cy="223200"/>
           </a:xfrm>
           <a:prstGeom prst="rect">
@@ -23721,7 +23169,7 @@
         </p:nvSpPr>
         <p:spPr>
           <a:xfrm>
-            <a:off x="161999" y="4107470"/>
+            <a:off x="161999" y="4244128"/>
             <a:ext cx="1116000" cy="223200"/>
           </a:xfrm>
           <a:prstGeom prst="rect">
@@ -23755,7 +23203,7 @@
         </p:nvSpPr>
         <p:spPr>
           <a:xfrm>
-            <a:off x="1299599" y="4107470"/>
+            <a:off x="1299599" y="4244128"/>
             <a:ext cx="5522400" cy="223200"/>
           </a:xfrm>
           <a:prstGeom prst="rect">
@@ -23789,8 +23237,8 @@
         </p:nvSpPr>
         <p:spPr>
           <a:xfrm>
-            <a:off x="125999" y="4355870"/>
-            <a:ext cx="1152000" cy="618940"/>
+            <a:off x="125999" y="4492528"/>
+            <a:ext cx="1152000" cy="786260"/>
           </a:xfrm>
           <a:prstGeom prst="rect">
             <a:avLst/>
@@ -23832,8 +23280,8 @@
         </p:nvSpPr>
         <p:spPr>
           <a:xfrm>
-            <a:off x="161999" y="4355870"/>
-            <a:ext cx="1116000" cy="618940"/>
+            <a:off x="161999" y="4492528"/>
+            <a:ext cx="1116000" cy="786260"/>
           </a:xfrm>
           <a:prstGeom prst="rect">
             <a:avLst/>
@@ -23866,8 +23314,8 @@
         </p:nvSpPr>
         <p:spPr>
           <a:xfrm>
-            <a:off x="1299599" y="4355870"/>
-            <a:ext cx="5522400" cy="618940"/>
+            <a:off x="1299599" y="4492528"/>
+            <a:ext cx="5522400" cy="786260"/>
           </a:xfrm>
           <a:prstGeom prst="rect">
             <a:avLst/>
@@ -23900,8 +23348,8 @@
         </p:nvSpPr>
         <p:spPr>
           <a:xfrm>
-            <a:off x="125999" y="5000010"/>
-            <a:ext cx="1152000" cy="478605"/>
+            <a:off x="125999" y="5303988"/>
+            <a:ext cx="1152000" cy="640528"/>
           </a:xfrm>
           <a:prstGeom prst="rect">
             <a:avLst/>
@@ -23943,8 +23391,8 @@
         </p:nvSpPr>
         <p:spPr>
           <a:xfrm>
-            <a:off x="161999" y="5000010"/>
-            <a:ext cx="1116000" cy="478605"/>
+            <a:off x="161999" y="5303988"/>
+            <a:ext cx="1116000" cy="640528"/>
           </a:xfrm>
           <a:prstGeom prst="rect">
             <a:avLst/>
@@ -23977,8 +23425,8 @@
         </p:nvSpPr>
         <p:spPr>
           <a:xfrm>
-            <a:off x="1299599" y="5000010"/>
-            <a:ext cx="5522400" cy="478605"/>
+            <a:off x="1299599" y="5303988"/>
+            <a:ext cx="5522400" cy="640528"/>
           </a:xfrm>
           <a:prstGeom prst="rect">
             <a:avLst/>
@@ -24046,33 +23494,9 @@
           </a:p>
         </p:txBody>
       </p:sp>
-      <p:pic>
-        <p:nvPicPr>
-          <p:cNvPr id="59" name="Picture 58" descr="1779265924924_1niqd.jpg"/>
-          <p:cNvPicPr>
-            <a:picLocks noChangeAspect="1"/>
-          </p:cNvPicPr>
-          <p:nvPr/>
-        </p:nvPicPr>
-        <p:blipFill>
-          <a:blip r:embed="rId2"/>
-          <a:stretch>
-            <a:fillRect/>
-          </a:stretch>
-        </p:blipFill>
-        <p:spPr>
-          <a:xfrm>
-            <a:off x="6929999" y="1300525"/>
-            <a:ext cx="2550601" cy="4886951"/>
-          </a:xfrm>
-          <a:prstGeom prst="rect">
-            <a:avLst/>
-          </a:prstGeom>
-        </p:spPr>
-      </p:pic>
-      <p:sp>
-        <p:nvSpPr>
-          <p:cNvPr id="60" name="Rectangle 59"/>
+      <p:sp>
+        <p:nvSpPr>
+          <p:cNvPr id="59" name="Rectangle 58"/>
           <p:cNvSpPr/>
           <p:nvPr/>
         </p:nvSpPr>
@@ -24113,30 +23537,6 @@
           </a:p>
         </p:txBody>
       </p:sp>
-      <p:pic>
-        <p:nvPicPr>
-          <p:cNvPr id="61" name="Picture 60" descr="1779265934882_ei4zq.jpg"/>
-          <p:cNvPicPr>
-            <a:picLocks noChangeAspect="1"/>
-          </p:cNvPicPr>
-          <p:nvPr/>
-        </p:nvPicPr>
-        <p:blipFill>
-          <a:blip r:embed="rId3"/>
-          <a:stretch>
-            <a:fillRect/>
-          </a:stretch>
-        </p:blipFill>
-        <p:spPr>
-          <a:xfrm>
-            <a:off x="9516600" y="2787525"/>
-            <a:ext cx="2550601" cy="1912950"/>
-          </a:xfrm>
-          <a:prstGeom prst="rect">
-            <a:avLst/>
-          </a:prstGeom>
-        </p:spPr>
-      </p:pic>
     </p:spTree>
   </p:cSld>
   <p:clrMapOvr>
@@ -24720,7 +24120,7 @@
           <a:noFill/>
         </p:spPr>
         <p:txBody>
-          <a:bodyPr wrap="square">
+          <a:bodyPr wrap="none">
             <a:spAutoFit/>
           </a:bodyPr>
           <a:lstStyle/>
@@ -24797,7 +24197,7 @@
           <a:noFill/>
         </p:spPr>
         <p:txBody>
-          <a:bodyPr wrap="square">
+          <a:bodyPr wrap="none">
             <a:spAutoFit/>
           </a:bodyPr>
           <a:lstStyle/>
@@ -24823,7 +24223,7 @@
         <p:spPr>
           <a:xfrm>
             <a:off x="1551599" y="1432800"/>
-            <a:ext cx="648000" cy="259200"/>
+            <a:ext cx="802800" cy="259200"/>
           </a:xfrm>
           <a:prstGeom prst="rect">
             <a:avLst/>
@@ -24866,15 +24266,15 @@
         <p:spPr>
           <a:xfrm>
             <a:off x="1594799" y="1432800"/>
-            <a:ext cx="604800" cy="259200"/>
-          </a:xfrm>
-          <a:prstGeom prst="rect">
-            <a:avLst/>
-          </a:prstGeom>
-          <a:noFill/>
-        </p:spPr>
-        <p:txBody>
-          <a:bodyPr wrap="square">
+            <a:ext cx="759600" cy="259200"/>
+          </a:xfrm>
+          <a:prstGeom prst="rect">
+            <a:avLst/>
+          </a:prstGeom>
+          <a:noFill/>
+        </p:spPr>
+        <p:txBody>
+          <a:bodyPr wrap="none">
             <a:spAutoFit/>
           </a:bodyPr>
           <a:lstStyle/>
@@ -24899,8 +24299,8 @@
         </p:nvSpPr>
         <p:spPr>
           <a:xfrm>
-            <a:off x="2264399" y="1432800"/>
-            <a:ext cx="864000" cy="259200"/>
+            <a:off x="2419199" y="1432800"/>
+            <a:ext cx="1206000" cy="259200"/>
           </a:xfrm>
           <a:prstGeom prst="rect">
             <a:avLst/>
@@ -24942,16 +24342,16 @@
         </p:nvSpPr>
         <p:spPr>
           <a:xfrm>
-            <a:off x="2307599" y="1432800"/>
-            <a:ext cx="820800" cy="259200"/>
-          </a:xfrm>
-          <a:prstGeom prst="rect">
-            <a:avLst/>
-          </a:prstGeom>
-          <a:noFill/>
-        </p:spPr>
-        <p:txBody>
-          <a:bodyPr wrap="square">
+            <a:off x="2462399" y="1432800"/>
+            <a:ext cx="1162800" cy="259200"/>
+          </a:xfrm>
+          <a:prstGeom prst="rect">
+            <a:avLst/>
+          </a:prstGeom>
+          <a:noFill/>
+        </p:spPr>
+        <p:txBody>
+          <a:bodyPr wrap="none">
             <a:spAutoFit/>
           </a:bodyPr>
           <a:lstStyle/>
@@ -24976,8 +24376,8 @@
         </p:nvSpPr>
         <p:spPr>
           <a:xfrm>
-            <a:off x="3193199" y="1432800"/>
-            <a:ext cx="648000" cy="259200"/>
+            <a:off x="3689999" y="1432800"/>
+            <a:ext cx="802800" cy="259200"/>
           </a:xfrm>
           <a:prstGeom prst="rect">
             <a:avLst/>
@@ -25019,16 +24419,16 @@
         </p:nvSpPr>
         <p:spPr>
           <a:xfrm>
-            <a:off x="3236399" y="1432800"/>
-            <a:ext cx="604800" cy="259200"/>
-          </a:xfrm>
-          <a:prstGeom prst="rect">
-            <a:avLst/>
-          </a:prstGeom>
-          <a:noFill/>
-        </p:spPr>
-        <p:txBody>
-          <a:bodyPr wrap="square">
+            <a:off x="3733199" y="1432800"/>
+            <a:ext cx="759600" cy="259200"/>
+          </a:xfrm>
+          <a:prstGeom prst="rect">
+            <a:avLst/>
+          </a:prstGeom>
+          <a:noFill/>
+        </p:spPr>
+        <p:txBody>
+          <a:bodyPr wrap="none">
             <a:spAutoFit/>
           </a:bodyPr>
           <a:lstStyle/>
@@ -25165,7 +24565,7 @@
         <p:spPr>
           <a:xfrm>
             <a:off x="125999" y="2005200"/>
-            <a:ext cx="1152000" cy="338270"/>
+            <a:ext cx="1152000" cy="349064"/>
           </a:xfrm>
           <a:prstGeom prst="rect">
             <a:avLst/>
@@ -25208,7 +24608,7 @@
         <p:spPr>
           <a:xfrm>
             <a:off x="161999" y="2005200"/>
-            <a:ext cx="1116000" cy="338270"/>
+            <a:ext cx="1116000" cy="349064"/>
           </a:xfrm>
           <a:prstGeom prst="rect">
             <a:avLst/>
@@ -25242,7 +24642,7 @@
         <p:spPr>
           <a:xfrm>
             <a:off x="1299599" y="2005200"/>
-            <a:ext cx="5522400" cy="338270"/>
+            <a:ext cx="5522400" cy="349064"/>
           </a:xfrm>
           <a:prstGeom prst="rect">
             <a:avLst/>
@@ -25275,8 +24675,8 @@
         </p:nvSpPr>
         <p:spPr>
           <a:xfrm>
-            <a:off x="125999" y="2368670"/>
-            <a:ext cx="1152000" cy="223200"/>
+            <a:off x="125999" y="2379464"/>
+            <a:ext cx="1152000" cy="349064"/>
           </a:xfrm>
           <a:prstGeom prst="rect">
             <a:avLst/>
@@ -25318,8 +24718,8 @@
         </p:nvSpPr>
         <p:spPr>
           <a:xfrm>
-            <a:off x="161999" y="2368670"/>
-            <a:ext cx="1116000" cy="223200"/>
+            <a:off x="161999" y="2379464"/>
+            <a:ext cx="1116000" cy="349064"/>
           </a:xfrm>
           <a:prstGeom prst="rect">
             <a:avLst/>
@@ -25352,8 +24752,8 @@
         </p:nvSpPr>
         <p:spPr>
           <a:xfrm>
-            <a:off x="1299599" y="2368670"/>
-            <a:ext cx="5522400" cy="223200"/>
+            <a:off x="1299599" y="2379464"/>
+            <a:ext cx="5522400" cy="349064"/>
           </a:xfrm>
           <a:prstGeom prst="rect">
             <a:avLst/>
@@ -25386,7 +24786,7 @@
         </p:nvSpPr>
         <p:spPr>
           <a:xfrm>
-            <a:off x="125999" y="2617070"/>
+            <a:off x="125999" y="2753728"/>
             <a:ext cx="1152000" cy="223200"/>
           </a:xfrm>
           <a:prstGeom prst="rect">
@@ -25429,7 +24829,7 @@
         </p:nvSpPr>
         <p:spPr>
           <a:xfrm>
-            <a:off x="161999" y="2617070"/>
+            <a:off x="161999" y="2753728"/>
             <a:ext cx="1116000" cy="223200"/>
           </a:xfrm>
           <a:prstGeom prst="rect">
@@ -25463,7 +24863,7 @@
         </p:nvSpPr>
         <p:spPr>
           <a:xfrm>
-            <a:off x="1299599" y="2617070"/>
+            <a:off x="1299599" y="2753728"/>
             <a:ext cx="5522400" cy="223200"/>
           </a:xfrm>
           <a:prstGeom prst="rect">
@@ -25497,7 +24897,7 @@
         </p:nvSpPr>
         <p:spPr>
           <a:xfrm>
-            <a:off x="125999" y="2865470"/>
+            <a:off x="125999" y="3002128"/>
             <a:ext cx="1152000" cy="223200"/>
           </a:xfrm>
           <a:prstGeom prst="rect">
@@ -25540,7 +24940,7 @@
         </p:nvSpPr>
         <p:spPr>
           <a:xfrm>
-            <a:off x="161999" y="2865470"/>
+            <a:off x="161999" y="3002128"/>
             <a:ext cx="1116000" cy="223200"/>
           </a:xfrm>
           <a:prstGeom prst="rect">
@@ -25574,7 +24974,7 @@
         </p:nvSpPr>
         <p:spPr>
           <a:xfrm>
-            <a:off x="1299599" y="2865470"/>
+            <a:off x="1299599" y="3002128"/>
             <a:ext cx="5522400" cy="223200"/>
           </a:xfrm>
           <a:prstGeom prst="rect">
@@ -25608,7 +25008,7 @@
         </p:nvSpPr>
         <p:spPr>
           <a:xfrm>
-            <a:off x="125999" y="3113870"/>
+            <a:off x="125999" y="3250528"/>
             <a:ext cx="1152000" cy="223200"/>
           </a:xfrm>
           <a:prstGeom prst="rect">
@@ -25651,7 +25051,7 @@
         </p:nvSpPr>
         <p:spPr>
           <a:xfrm>
-            <a:off x="161999" y="3113870"/>
+            <a:off x="161999" y="3250528"/>
             <a:ext cx="1116000" cy="223200"/>
           </a:xfrm>
           <a:prstGeom prst="rect">
@@ -25685,7 +25085,7 @@
         </p:nvSpPr>
         <p:spPr>
           <a:xfrm>
-            <a:off x="1299599" y="3113870"/>
+            <a:off x="1299599" y="3250528"/>
             <a:ext cx="5522400" cy="223200"/>
           </a:xfrm>
           <a:prstGeom prst="rect">
@@ -25719,7 +25119,7 @@
         </p:nvSpPr>
         <p:spPr>
           <a:xfrm>
-            <a:off x="125999" y="3362270"/>
+            <a:off x="125999" y="3498928"/>
             <a:ext cx="1152000" cy="223200"/>
           </a:xfrm>
           <a:prstGeom prst="rect">
@@ -25762,7 +25162,7 @@
         </p:nvSpPr>
         <p:spPr>
           <a:xfrm>
-            <a:off x="161999" y="3362270"/>
+            <a:off x="161999" y="3498928"/>
             <a:ext cx="1116000" cy="223200"/>
           </a:xfrm>
           <a:prstGeom prst="rect">
@@ -25796,7 +25196,7 @@
         </p:nvSpPr>
         <p:spPr>
           <a:xfrm>
-            <a:off x="1299599" y="3362270"/>
+            <a:off x="1299599" y="3498928"/>
             <a:ext cx="5522400" cy="223200"/>
           </a:xfrm>
           <a:prstGeom prst="rect">
@@ -25830,7 +25230,7 @@
         </p:nvSpPr>
         <p:spPr>
           <a:xfrm>
-            <a:off x="125999" y="3610670"/>
+            <a:off x="125999" y="3747328"/>
             <a:ext cx="1152000" cy="223200"/>
           </a:xfrm>
           <a:prstGeom prst="rect">
@@ -25873,7 +25273,7 @@
         </p:nvSpPr>
         <p:spPr>
           <a:xfrm>
-            <a:off x="161999" y="3610670"/>
+            <a:off x="161999" y="3747328"/>
             <a:ext cx="1116000" cy="223200"/>
           </a:xfrm>
           <a:prstGeom prst="rect">
@@ -25907,7 +25307,7 @@
         </p:nvSpPr>
         <p:spPr>
           <a:xfrm>
-            <a:off x="1299599" y="3610670"/>
+            <a:off x="1299599" y="3747328"/>
             <a:ext cx="5522400" cy="223200"/>
           </a:xfrm>
           <a:prstGeom prst="rect">
@@ -25941,7 +25341,7 @@
         </p:nvSpPr>
         <p:spPr>
           <a:xfrm>
-            <a:off x="125999" y="3859070"/>
+            <a:off x="125999" y="3995728"/>
             <a:ext cx="1152000" cy="223200"/>
           </a:xfrm>
           <a:prstGeom prst="rect">
@@ -25984,7 +25384,7 @@
         </p:nvSpPr>
         <p:spPr>
           <a:xfrm>
-            <a:off x="161999" y="3859070"/>
+            <a:off x="161999" y="3995728"/>
             <a:ext cx="1116000" cy="223200"/>
           </a:xfrm>
           <a:prstGeom prst="rect">
@@ -26018,7 +25418,7 @@
         </p:nvSpPr>
         <p:spPr>
           <a:xfrm>
-            <a:off x="1299599" y="3859070"/>
+            <a:off x="1299599" y="3995728"/>
             <a:ext cx="5522400" cy="223200"/>
           </a:xfrm>
           <a:prstGeom prst="rect">
@@ -26052,7 +25452,7 @@
         </p:nvSpPr>
         <p:spPr>
           <a:xfrm>
-            <a:off x="125999" y="4107470"/>
+            <a:off x="125999" y="4244128"/>
             <a:ext cx="1152000" cy="223200"/>
           </a:xfrm>
           <a:prstGeom prst="rect">
@@ -26095,7 +25495,7 @@
         </p:nvSpPr>
         <p:spPr>
           <a:xfrm>
-            <a:off x="161999" y="4107470"/>
+            <a:off x="161999" y="4244128"/>
             <a:ext cx="1116000" cy="223200"/>
           </a:xfrm>
           <a:prstGeom prst="rect">
@@ -26129,7 +25529,7 @@
         </p:nvSpPr>
         <p:spPr>
           <a:xfrm>
-            <a:off x="1299599" y="4107470"/>
+            <a:off x="1299599" y="4244128"/>
             <a:ext cx="5522400" cy="223200"/>
           </a:xfrm>
           <a:prstGeom prst="rect">
@@ -26163,8 +25563,8 @@
         </p:nvSpPr>
         <p:spPr>
           <a:xfrm>
-            <a:off x="125999" y="4355870"/>
-            <a:ext cx="1152000" cy="338270"/>
+            <a:off x="125999" y="4492528"/>
+            <a:ext cx="1152000" cy="349064"/>
           </a:xfrm>
           <a:prstGeom prst="rect">
             <a:avLst/>
@@ -26206,8 +25606,8 @@
         </p:nvSpPr>
         <p:spPr>
           <a:xfrm>
-            <a:off x="161999" y="4355870"/>
-            <a:ext cx="1116000" cy="338270"/>
+            <a:off x="161999" y="4492528"/>
+            <a:ext cx="1116000" cy="349064"/>
           </a:xfrm>
           <a:prstGeom prst="rect">
             <a:avLst/>
@@ -26240,8 +25640,8 @@
         </p:nvSpPr>
         <p:spPr>
           <a:xfrm>
-            <a:off x="1299599" y="4355870"/>
-            <a:ext cx="5522400" cy="338270"/>
+            <a:off x="1299599" y="4492528"/>
+            <a:ext cx="5522400" cy="349064"/>
           </a:xfrm>
           <a:prstGeom prst="rect">
             <a:avLst/>
@@ -26274,8 +25674,8 @@
         </p:nvSpPr>
         <p:spPr>
           <a:xfrm>
-            <a:off x="125999" y="4719340"/>
-            <a:ext cx="1152000" cy="338270"/>
+            <a:off x="125999" y="4866792"/>
+            <a:ext cx="1152000" cy="494796"/>
           </a:xfrm>
           <a:prstGeom prst="rect">
             <a:avLst/>
@@ -26317,8 +25717,8 @@
         </p:nvSpPr>
         <p:spPr>
           <a:xfrm>
-            <a:off x="161999" y="4719340"/>
-            <a:ext cx="1116000" cy="338270"/>
+            <a:off x="161999" y="4866792"/>
+            <a:ext cx="1116000" cy="494796"/>
           </a:xfrm>
           <a:prstGeom prst="rect">
             <a:avLst/>
@@ -26351,8 +25751,8 @@
         </p:nvSpPr>
         <p:spPr>
           <a:xfrm>
-            <a:off x="1299599" y="4719340"/>
-            <a:ext cx="5522400" cy="338270"/>
+            <a:off x="1299599" y="4866792"/>
+            <a:ext cx="5522400" cy="494796"/>
           </a:xfrm>
           <a:prstGeom prst="rect">
             <a:avLst/>
@@ -26420,33 +25820,9 @@
           </a:p>
         </p:txBody>
       </p:sp>
-      <p:pic>
-        <p:nvPicPr>
-          <p:cNvPr id="59" name="Picture 58" descr="1779267449728_ygvh2.jpg"/>
-          <p:cNvPicPr>
-            <a:picLocks noChangeAspect="1"/>
-          </p:cNvPicPr>
-          <p:nvPr/>
-        </p:nvPicPr>
-        <p:blipFill>
-          <a:blip r:embed="rId2"/>
-          <a:stretch>
-            <a:fillRect/>
-          </a:stretch>
-        </p:blipFill>
-        <p:spPr>
-          <a:xfrm>
-            <a:off x="6929999" y="2043600"/>
-            <a:ext cx="2550601" cy="3400801"/>
-          </a:xfrm>
-          <a:prstGeom prst="rect">
-            <a:avLst/>
-          </a:prstGeom>
-        </p:spPr>
-      </p:pic>
-      <p:sp>
-        <p:nvSpPr>
-          <p:cNvPr id="60" name="Rectangle 59"/>
+      <p:sp>
+        <p:nvSpPr>
+          <p:cNvPr id="59" name="Rectangle 58"/>
           <p:cNvSpPr/>
           <p:nvPr/>
         </p:nvSpPr>
@@ -26487,30 +25863,6 @@
           </a:p>
         </p:txBody>
       </p:sp>
-      <p:pic>
-        <p:nvPicPr>
-          <p:cNvPr id="61" name="Picture 60" descr="1779267467536_cwtm4.jpg"/>
-          <p:cNvPicPr>
-            <a:picLocks noChangeAspect="1"/>
-          </p:cNvPicPr>
-          <p:nvPr/>
-        </p:nvPicPr>
-        <p:blipFill>
-          <a:blip r:embed="rId3"/>
-          <a:stretch>
-            <a:fillRect/>
-          </a:stretch>
-        </p:blipFill>
-        <p:spPr>
-          <a:xfrm>
-            <a:off x="9619110" y="756000"/>
-            <a:ext cx="2345580" cy="5976001"/>
-          </a:xfrm>
-          <a:prstGeom prst="rect">
-            <a:avLst/>
-          </a:prstGeom>
-        </p:spPr>
-      </p:pic>
     </p:spTree>
   </p:cSld>
   <p:clrMapOvr>
@@ -27094,7 +26446,7 @@
           <a:noFill/>
         </p:spPr>
         <p:txBody>
-          <a:bodyPr wrap="square">
+          <a:bodyPr wrap="none">
             <a:spAutoFit/>
           </a:bodyPr>
           <a:lstStyle/>
@@ -27120,7 +26472,7 @@
         <p:spPr>
           <a:xfrm>
             <a:off x="838799" y="1432800"/>
-            <a:ext cx="648000" cy="259200"/>
+            <a:ext cx="802800" cy="259200"/>
           </a:xfrm>
           <a:prstGeom prst="rect">
             <a:avLst/>
@@ -27163,15 +26515,15 @@
         <p:spPr>
           <a:xfrm>
             <a:off x="881999" y="1432800"/>
-            <a:ext cx="604800" cy="259200"/>
-          </a:xfrm>
-          <a:prstGeom prst="rect">
-            <a:avLst/>
-          </a:prstGeom>
-          <a:noFill/>
-        </p:spPr>
-        <p:txBody>
-          <a:bodyPr wrap="square">
+            <a:ext cx="759600" cy="259200"/>
+          </a:xfrm>
+          <a:prstGeom prst="rect">
+            <a:avLst/>
+          </a:prstGeom>
+          <a:noFill/>
+        </p:spPr>
+        <p:txBody>
+          <a:bodyPr wrap="none">
             <a:spAutoFit/>
           </a:bodyPr>
           <a:lstStyle/>
@@ -27196,8 +26548,8 @@
         </p:nvSpPr>
         <p:spPr>
           <a:xfrm>
-            <a:off x="1551599" y="1432800"/>
-            <a:ext cx="648000" cy="259200"/>
+            <a:off x="1706399" y="1432800"/>
+            <a:ext cx="802800" cy="259200"/>
           </a:xfrm>
           <a:prstGeom prst="rect">
             <a:avLst/>
@@ -27239,16 +26591,16 @@
         </p:nvSpPr>
         <p:spPr>
           <a:xfrm>
-            <a:off x="1594799" y="1432800"/>
-            <a:ext cx="604800" cy="259200"/>
-          </a:xfrm>
-          <a:prstGeom prst="rect">
-            <a:avLst/>
-          </a:prstGeom>
-          <a:noFill/>
-        </p:spPr>
-        <p:txBody>
-          <a:bodyPr wrap="square">
+            <a:off x="1749599" y="1432800"/>
+            <a:ext cx="759600" cy="259200"/>
+          </a:xfrm>
+          <a:prstGeom prst="rect">
+            <a:avLst/>
+          </a:prstGeom>
+          <a:noFill/>
+        </p:spPr>
+        <p:txBody>
+          <a:bodyPr wrap="none">
             <a:spAutoFit/>
           </a:bodyPr>
           <a:lstStyle/>
@@ -27273,7 +26625,7 @@
         </p:nvSpPr>
         <p:spPr>
           <a:xfrm>
-            <a:off x="2264399" y="1432800"/>
+            <a:off x="2573999" y="1432800"/>
             <a:ext cx="648000" cy="259200"/>
           </a:xfrm>
           <a:prstGeom prst="rect">
@@ -27316,7 +26668,7 @@
         </p:nvSpPr>
         <p:spPr>
           <a:xfrm>
-            <a:off x="2307599" y="1432800"/>
+            <a:off x="2617199" y="1432800"/>
             <a:ext cx="604800" cy="259200"/>
           </a:xfrm>
           <a:prstGeom prst="rect">
@@ -27325,7 +26677,7 @@
           <a:noFill/>
         </p:spPr>
         <p:txBody>
-          <a:bodyPr wrap="square">
+          <a:bodyPr wrap="none">
             <a:spAutoFit/>
           </a:bodyPr>
           <a:lstStyle/>
@@ -27573,7 +26925,7 @@
         <p:spPr>
           <a:xfrm>
             <a:off x="125999" y="2253600"/>
-            <a:ext cx="1152000" cy="223200"/>
+            <a:ext cx="1152000" cy="349064"/>
           </a:xfrm>
           <a:prstGeom prst="rect">
             <a:avLst/>
@@ -27616,7 +26968,7 @@
         <p:spPr>
           <a:xfrm>
             <a:off x="161999" y="2253600"/>
-            <a:ext cx="1116000" cy="223200"/>
+            <a:ext cx="1116000" cy="349064"/>
           </a:xfrm>
           <a:prstGeom prst="rect">
             <a:avLst/>
@@ -27650,7 +27002,7 @@
         <p:spPr>
           <a:xfrm>
             <a:off x="1299599" y="2253600"/>
-            <a:ext cx="5522400" cy="223200"/>
+            <a:ext cx="5522400" cy="349064"/>
           </a:xfrm>
           <a:prstGeom prst="rect">
             <a:avLst/>
@@ -27683,7 +27035,7 @@
         </p:nvSpPr>
         <p:spPr>
           <a:xfrm>
-            <a:off x="125999" y="2502000"/>
+            <a:off x="125999" y="2627864"/>
             <a:ext cx="1152000" cy="223200"/>
           </a:xfrm>
           <a:prstGeom prst="rect">
@@ -27726,7 +27078,7 @@
         </p:nvSpPr>
         <p:spPr>
           <a:xfrm>
-            <a:off x="161999" y="2502000"/>
+            <a:off x="161999" y="2627864"/>
             <a:ext cx="1116000" cy="223200"/>
           </a:xfrm>
           <a:prstGeom prst="rect">
@@ -27760,7 +27112,7 @@
         </p:nvSpPr>
         <p:spPr>
           <a:xfrm>
-            <a:off x="1299599" y="2502000"/>
+            <a:off x="1299599" y="2627864"/>
             <a:ext cx="5522400" cy="223200"/>
           </a:xfrm>
           <a:prstGeom prst="rect">
@@ -27794,7 +27146,7 @@
         </p:nvSpPr>
         <p:spPr>
           <a:xfrm>
-            <a:off x="125999" y="2750400"/>
+            <a:off x="125999" y="2876264"/>
             <a:ext cx="1152000" cy="223200"/>
           </a:xfrm>
           <a:prstGeom prst="rect">
@@ -27837,7 +27189,7 @@
         </p:nvSpPr>
         <p:spPr>
           <a:xfrm>
-            <a:off x="161999" y="2750400"/>
+            <a:off x="161999" y="2876264"/>
             <a:ext cx="1116000" cy="223200"/>
           </a:xfrm>
           <a:prstGeom prst="rect">
@@ -27871,7 +27223,7 @@
         </p:nvSpPr>
         <p:spPr>
           <a:xfrm>
-            <a:off x="1299599" y="2750400"/>
+            <a:off x="1299599" y="2876264"/>
             <a:ext cx="5522400" cy="223200"/>
           </a:xfrm>
           <a:prstGeom prst="rect">
@@ -27905,7 +27257,7 @@
         </p:nvSpPr>
         <p:spPr>
           <a:xfrm>
-            <a:off x="125999" y="2998800"/>
+            <a:off x="125999" y="3124664"/>
             <a:ext cx="1152000" cy="223200"/>
           </a:xfrm>
           <a:prstGeom prst="rect">
@@ -27948,7 +27300,7 @@
         </p:nvSpPr>
         <p:spPr>
           <a:xfrm>
-            <a:off x="161999" y="2998800"/>
+            <a:off x="161999" y="3124664"/>
             <a:ext cx="1116000" cy="223200"/>
           </a:xfrm>
           <a:prstGeom prst="rect">
@@ -27982,7 +27334,7 @@
         </p:nvSpPr>
         <p:spPr>
           <a:xfrm>
-            <a:off x="1299599" y="2998800"/>
+            <a:off x="1299599" y="3124664"/>
             <a:ext cx="5522400" cy="223200"/>
           </a:xfrm>
           <a:prstGeom prst="rect">
@@ -28016,7 +27368,7 @@
         </p:nvSpPr>
         <p:spPr>
           <a:xfrm>
-            <a:off x="125999" y="3247200"/>
+            <a:off x="125999" y="3373064"/>
             <a:ext cx="1152000" cy="223200"/>
           </a:xfrm>
           <a:prstGeom prst="rect">
@@ -28059,7 +27411,7 @@
         </p:nvSpPr>
         <p:spPr>
           <a:xfrm>
-            <a:off x="161999" y="3247200"/>
+            <a:off x="161999" y="3373064"/>
             <a:ext cx="1116000" cy="223200"/>
           </a:xfrm>
           <a:prstGeom prst="rect">
@@ -28093,7 +27445,7 @@
         </p:nvSpPr>
         <p:spPr>
           <a:xfrm>
-            <a:off x="1299599" y="3247200"/>
+            <a:off x="1299599" y="3373064"/>
             <a:ext cx="5522400" cy="223200"/>
           </a:xfrm>
           <a:prstGeom prst="rect">
@@ -28127,7 +27479,7 @@
         </p:nvSpPr>
         <p:spPr>
           <a:xfrm>
-            <a:off x="125999" y="3495600"/>
+            <a:off x="125999" y="3621464"/>
             <a:ext cx="1152000" cy="223200"/>
           </a:xfrm>
           <a:prstGeom prst="rect">
@@ -28170,7 +27522,7 @@
         </p:nvSpPr>
         <p:spPr>
           <a:xfrm>
-            <a:off x="161999" y="3495600"/>
+            <a:off x="161999" y="3621464"/>
             <a:ext cx="1116000" cy="223200"/>
           </a:xfrm>
           <a:prstGeom prst="rect">
@@ -28204,7 +27556,7 @@
         </p:nvSpPr>
         <p:spPr>
           <a:xfrm>
-            <a:off x="1299599" y="3495600"/>
+            <a:off x="1299599" y="3621464"/>
             <a:ext cx="5522400" cy="223200"/>
           </a:xfrm>
           <a:prstGeom prst="rect">
@@ -28238,7 +27590,7 @@
         </p:nvSpPr>
         <p:spPr>
           <a:xfrm>
-            <a:off x="125999" y="3744000"/>
+            <a:off x="125999" y="3869864"/>
             <a:ext cx="1152000" cy="223200"/>
           </a:xfrm>
           <a:prstGeom prst="rect">
@@ -28281,7 +27633,7 @@
         </p:nvSpPr>
         <p:spPr>
           <a:xfrm>
-            <a:off x="161999" y="3744000"/>
+            <a:off x="161999" y="3869864"/>
             <a:ext cx="1116000" cy="223200"/>
           </a:xfrm>
           <a:prstGeom prst="rect">
@@ -28315,7 +27667,7 @@
         </p:nvSpPr>
         <p:spPr>
           <a:xfrm>
-            <a:off x="1299599" y="3744000"/>
+            <a:off x="1299599" y="3869864"/>
             <a:ext cx="5522400" cy="223200"/>
           </a:xfrm>
           <a:prstGeom prst="rect">
@@ -28349,7 +27701,7 @@
         </p:nvSpPr>
         <p:spPr>
           <a:xfrm>
-            <a:off x="125999" y="3992400"/>
+            <a:off x="125999" y="4118264"/>
             <a:ext cx="1152000" cy="223200"/>
           </a:xfrm>
           <a:prstGeom prst="rect">
@@ -28392,7 +27744,7 @@
         </p:nvSpPr>
         <p:spPr>
           <a:xfrm>
-            <a:off x="161999" y="3992400"/>
+            <a:off x="161999" y="4118264"/>
             <a:ext cx="1116000" cy="223200"/>
           </a:xfrm>
           <a:prstGeom prst="rect">
@@ -28426,7 +27778,7 @@
         </p:nvSpPr>
         <p:spPr>
           <a:xfrm>
-            <a:off x="1299599" y="3992400"/>
+            <a:off x="1299599" y="4118264"/>
             <a:ext cx="5522400" cy="223200"/>
           </a:xfrm>
           <a:prstGeom prst="rect">
@@ -28460,8 +27812,8 @@
         </p:nvSpPr>
         <p:spPr>
           <a:xfrm>
-            <a:off x="125999" y="4240800"/>
-            <a:ext cx="1152000" cy="618940"/>
+            <a:off x="125999" y="4366664"/>
+            <a:ext cx="1152000" cy="786260"/>
           </a:xfrm>
           <a:prstGeom prst="rect">
             <a:avLst/>
@@ -28503,8 +27855,8 @@
         </p:nvSpPr>
         <p:spPr>
           <a:xfrm>
-            <a:off x="161999" y="4240800"/>
-            <a:ext cx="1116000" cy="618940"/>
+            <a:off x="161999" y="4366664"/>
+            <a:ext cx="1116000" cy="786260"/>
           </a:xfrm>
           <a:prstGeom prst="rect">
             <a:avLst/>
@@ -28537,8 +27889,8 @@
         </p:nvSpPr>
         <p:spPr>
           <a:xfrm>
-            <a:off x="1299599" y="4240800"/>
-            <a:ext cx="5522400" cy="618940"/>
+            <a:off x="1299599" y="4366664"/>
+            <a:ext cx="5522400" cy="786260"/>
           </a:xfrm>
           <a:prstGeom prst="rect">
             <a:avLst/>
@@ -28571,8 +27923,8 @@
         </p:nvSpPr>
         <p:spPr>
           <a:xfrm>
-            <a:off x="125999" y="4884940"/>
-            <a:ext cx="1152000" cy="338270"/>
+            <a:off x="125999" y="5178124"/>
+            <a:ext cx="1152000" cy="349064"/>
           </a:xfrm>
           <a:prstGeom prst="rect">
             <a:avLst/>
@@ -28614,8 +27966,8 @@
         </p:nvSpPr>
         <p:spPr>
           <a:xfrm>
-            <a:off x="161999" y="4884940"/>
-            <a:ext cx="1116000" cy="338270"/>
+            <a:off x="161999" y="5178124"/>
+            <a:ext cx="1116000" cy="349064"/>
           </a:xfrm>
           <a:prstGeom prst="rect">
             <a:avLst/>
@@ -28648,8 +28000,8 @@
         </p:nvSpPr>
         <p:spPr>
           <a:xfrm>
-            <a:off x="1299599" y="4884940"/>
-            <a:ext cx="5522400" cy="338270"/>
+            <a:off x="1299599" y="5178124"/>
+            <a:ext cx="5522400" cy="349064"/>
           </a:xfrm>
           <a:prstGeom prst="rect">
             <a:avLst/>
@@ -28717,30 +28069,6 @@
           </a:p>
         </p:txBody>
       </p:sp>
-      <p:pic>
-        <p:nvPicPr>
-          <p:cNvPr id="57" name="Picture 56" descr="1779267690200_0zk74.jpg"/>
-          <p:cNvPicPr>
-            <a:picLocks noChangeAspect="1"/>
-          </p:cNvPicPr>
-          <p:nvPr/>
-        </p:nvPicPr>
-        <p:blipFill>
-          <a:blip r:embed="rId2"/>
-          <a:stretch>
-            <a:fillRect/>
-          </a:stretch>
-        </p:blipFill>
-        <p:spPr>
-          <a:xfrm>
-            <a:off x="6929999" y="1928856"/>
-            <a:ext cx="5137202" cy="3630289"/>
-          </a:xfrm>
-          <a:prstGeom prst="rect">
-            <a:avLst/>
-          </a:prstGeom>
-        </p:spPr>
-      </p:pic>
     </p:spTree>
   </p:cSld>
   <p:clrMapOvr>
@@ -29195,7 +28523,7 @@
           <a:noFill/>
         </p:spPr>
         <p:txBody>
-          <a:bodyPr wrap="square">
+          <a:bodyPr wrap="none">
             <a:spAutoFit/>
           </a:bodyPr>
           <a:lstStyle/>
@@ -29221,7 +28549,7 @@
         <p:spPr>
           <a:xfrm>
             <a:off x="838799" y="1432800"/>
-            <a:ext cx="648000" cy="259200"/>
+            <a:ext cx="802800" cy="259200"/>
           </a:xfrm>
           <a:prstGeom prst="rect">
             <a:avLst/>
@@ -29264,15 +28592,15 @@
         <p:spPr>
           <a:xfrm>
             <a:off x="881999" y="1432800"/>
-            <a:ext cx="604800" cy="259200"/>
-          </a:xfrm>
-          <a:prstGeom prst="rect">
-            <a:avLst/>
-          </a:prstGeom>
-          <a:noFill/>
-        </p:spPr>
-        <p:txBody>
-          <a:bodyPr wrap="square">
+            <a:ext cx="759600" cy="259200"/>
+          </a:xfrm>
+          <a:prstGeom prst="rect">
+            <a:avLst/>
+          </a:prstGeom>
+          <a:noFill/>
+        </p:spPr>
+        <p:txBody>
+          <a:bodyPr wrap="none">
             <a:spAutoFit/>
           </a:bodyPr>
           <a:lstStyle/>
@@ -29297,8 +28625,8 @@
         </p:nvSpPr>
         <p:spPr>
           <a:xfrm>
-            <a:off x="1551599" y="1432800"/>
-            <a:ext cx="680400" cy="259200"/>
+            <a:off x="1706399" y="1432800"/>
+            <a:ext cx="903600" cy="259200"/>
           </a:xfrm>
           <a:prstGeom prst="rect">
             <a:avLst/>
@@ -29340,16 +28668,16 @@
         </p:nvSpPr>
         <p:spPr>
           <a:xfrm>
-            <a:off x="1594799" y="1432800"/>
-            <a:ext cx="637200" cy="259200"/>
-          </a:xfrm>
-          <a:prstGeom prst="rect">
-            <a:avLst/>
-          </a:prstGeom>
-          <a:noFill/>
-        </p:spPr>
-        <p:txBody>
-          <a:bodyPr wrap="square">
+            <a:off x="1749599" y="1432800"/>
+            <a:ext cx="860400" cy="259200"/>
+          </a:xfrm>
+          <a:prstGeom prst="rect">
+            <a:avLst/>
+          </a:prstGeom>
+          <a:noFill/>
+        </p:spPr>
+        <p:txBody>
+          <a:bodyPr wrap="none">
             <a:spAutoFit/>
           </a:bodyPr>
           <a:lstStyle/>
@@ -29374,8 +28702,8 @@
         </p:nvSpPr>
         <p:spPr>
           <a:xfrm>
-            <a:off x="2296799" y="1432800"/>
-            <a:ext cx="864000" cy="259200"/>
+            <a:off x="2674799" y="1432800"/>
+            <a:ext cx="1206000" cy="259200"/>
           </a:xfrm>
           <a:prstGeom prst="rect">
             <a:avLst/>
@@ -29417,16 +28745,16 @@
         </p:nvSpPr>
         <p:spPr>
           <a:xfrm>
-            <a:off x="2339999" y="1432800"/>
-            <a:ext cx="820800" cy="259200"/>
-          </a:xfrm>
-          <a:prstGeom prst="rect">
-            <a:avLst/>
-          </a:prstGeom>
-          <a:noFill/>
-        </p:spPr>
-        <p:txBody>
-          <a:bodyPr wrap="square">
+            <a:off x="2717999" y="1432800"/>
+            <a:ext cx="1162800" cy="259200"/>
+          </a:xfrm>
+          <a:prstGeom prst="rect">
+            <a:avLst/>
+          </a:prstGeom>
+          <a:noFill/>
+        </p:spPr>
+        <p:txBody>
+          <a:bodyPr wrap="none">
             <a:spAutoFit/>
           </a:bodyPr>
           <a:lstStyle/>
@@ -29451,8 +28779,8 @@
         </p:nvSpPr>
         <p:spPr>
           <a:xfrm>
-            <a:off x="3225599" y="1432800"/>
-            <a:ext cx="648000" cy="259200"/>
+            <a:off x="3945599" y="1432800"/>
+            <a:ext cx="802800" cy="259200"/>
           </a:xfrm>
           <a:prstGeom prst="rect">
             <a:avLst/>
@@ -29494,16 +28822,16 @@
         </p:nvSpPr>
         <p:spPr>
           <a:xfrm>
-            <a:off x="3268799" y="1432800"/>
-            <a:ext cx="604800" cy="259200"/>
-          </a:xfrm>
-          <a:prstGeom prst="rect">
-            <a:avLst/>
-          </a:prstGeom>
-          <a:noFill/>
-        </p:spPr>
-        <p:txBody>
-          <a:bodyPr wrap="square">
+            <a:off x="3988799" y="1432800"/>
+            <a:ext cx="759600" cy="259200"/>
+          </a:xfrm>
+          <a:prstGeom prst="rect">
+            <a:avLst/>
+          </a:prstGeom>
+          <a:noFill/>
+        </p:spPr>
+        <p:txBody>
+          <a:bodyPr wrap="none">
             <a:spAutoFit/>
           </a:bodyPr>
           <a:lstStyle/>
@@ -29751,7 +29079,7 @@
         <p:spPr>
           <a:xfrm>
             <a:off x="125999" y="2253600"/>
-            <a:ext cx="1152000" cy="338270"/>
+            <a:ext cx="1152000" cy="349064"/>
           </a:xfrm>
           <a:prstGeom prst="rect">
             <a:avLst/>
@@ -29794,7 +29122,7 @@
         <p:spPr>
           <a:xfrm>
             <a:off x="161999" y="2253600"/>
-            <a:ext cx="1116000" cy="338270"/>
+            <a:ext cx="1116000" cy="349064"/>
           </a:xfrm>
           <a:prstGeom prst="rect">
             <a:avLst/>
@@ -29828,7 +29156,7 @@
         <p:spPr>
           <a:xfrm>
             <a:off x="1299599" y="2253600"/>
-            <a:ext cx="5522400" cy="338270"/>
+            <a:ext cx="5522400" cy="349064"/>
           </a:xfrm>
           <a:prstGeom prst="rect">
             <a:avLst/>
@@ -29861,7 +29189,7 @@
         </p:nvSpPr>
         <p:spPr>
           <a:xfrm>
-            <a:off x="125999" y="2617070"/>
+            <a:off x="125999" y="2627864"/>
             <a:ext cx="1152000" cy="223200"/>
           </a:xfrm>
           <a:prstGeom prst="rect">
@@ -29904,7 +29232,7 @@
         </p:nvSpPr>
         <p:spPr>
           <a:xfrm>
-            <a:off x="161999" y="2617070"/>
+            <a:off x="161999" y="2627864"/>
             <a:ext cx="1116000" cy="223200"/>
           </a:xfrm>
           <a:prstGeom prst="rect">
@@ -29938,7 +29266,7 @@
         </p:nvSpPr>
         <p:spPr>
           <a:xfrm>
-            <a:off x="1299599" y="2617070"/>
+            <a:off x="1299599" y="2627864"/>
             <a:ext cx="5522400" cy="223200"/>
           </a:xfrm>
           <a:prstGeom prst="rect">
@@ -29972,7 +29300,7 @@
         </p:nvSpPr>
         <p:spPr>
           <a:xfrm>
-            <a:off x="125999" y="2865470"/>
+            <a:off x="125999" y="2876264"/>
             <a:ext cx="1152000" cy="223200"/>
           </a:xfrm>
           <a:prstGeom prst="rect">
@@ -30015,7 +29343,7 @@
         </p:nvSpPr>
         <p:spPr>
           <a:xfrm>
-            <a:off x="161999" y="2865470"/>
+            <a:off x="161999" y="2876264"/>
             <a:ext cx="1116000" cy="223200"/>
           </a:xfrm>
           <a:prstGeom prst="rect">
@@ -30049,7 +29377,7 @@
         </p:nvSpPr>
         <p:spPr>
           <a:xfrm>
-            <a:off x="1299599" y="2865470"/>
+            <a:off x="1299599" y="2876264"/>
             <a:ext cx="5522400" cy="223200"/>
           </a:xfrm>
           <a:prstGeom prst="rect">
@@ -30083,7 +29411,7 @@
         </p:nvSpPr>
         <p:spPr>
           <a:xfrm>
-            <a:off x="125999" y="3113870"/>
+            <a:off x="125999" y="3124664"/>
             <a:ext cx="1152000" cy="223200"/>
           </a:xfrm>
           <a:prstGeom prst="rect">
@@ -30126,7 +29454,7 @@
         </p:nvSpPr>
         <p:spPr>
           <a:xfrm>
-            <a:off x="161999" y="3113870"/>
+            <a:off x="161999" y="3124664"/>
             <a:ext cx="1116000" cy="223200"/>
           </a:xfrm>
           <a:prstGeom prst="rect">
@@ -30160,7 +29488,7 @@
         </p:nvSpPr>
         <p:spPr>
           <a:xfrm>
-            <a:off x="1299599" y="3113870"/>
+            <a:off x="1299599" y="3124664"/>
             <a:ext cx="5522400" cy="223200"/>
           </a:xfrm>
           <a:prstGeom prst="rect">
@@ -30194,7 +29522,7 @@
         </p:nvSpPr>
         <p:spPr>
           <a:xfrm>
-            <a:off x="125999" y="3362270"/>
+            <a:off x="125999" y="3373064"/>
             <a:ext cx="1152000" cy="223200"/>
           </a:xfrm>
           <a:prstGeom prst="rect">
@@ -30237,7 +29565,7 @@
         </p:nvSpPr>
         <p:spPr>
           <a:xfrm>
-            <a:off x="161999" y="3362270"/>
+            <a:off x="161999" y="3373064"/>
             <a:ext cx="1116000" cy="223200"/>
           </a:xfrm>
           <a:prstGeom prst="rect">
@@ -30271,7 +29599,7 @@
         </p:nvSpPr>
         <p:spPr>
           <a:xfrm>
-            <a:off x="1299599" y="3362270"/>
+            <a:off x="1299599" y="3373064"/>
             <a:ext cx="5522400" cy="223200"/>
           </a:xfrm>
           <a:prstGeom prst="rect">
@@ -30305,7 +29633,7 @@
         </p:nvSpPr>
         <p:spPr>
           <a:xfrm>
-            <a:off x="125999" y="3610670"/>
+            <a:off x="125999" y="3621464"/>
             <a:ext cx="1152000" cy="223200"/>
           </a:xfrm>
           <a:prstGeom prst="rect">
@@ -30348,7 +29676,7 @@
         </p:nvSpPr>
         <p:spPr>
           <a:xfrm>
-            <a:off x="161999" y="3610670"/>
+            <a:off x="161999" y="3621464"/>
             <a:ext cx="1116000" cy="223200"/>
           </a:xfrm>
           <a:prstGeom prst="rect">
@@ -30382,7 +29710,7 @@
         </p:nvSpPr>
         <p:spPr>
           <a:xfrm>
-            <a:off x="1299599" y="3610670"/>
+            <a:off x="1299599" y="3621464"/>
             <a:ext cx="5522400" cy="223200"/>
           </a:xfrm>
           <a:prstGeom prst="rect">
@@ -30416,8 +29744,8 @@
         </p:nvSpPr>
         <p:spPr>
           <a:xfrm>
-            <a:off x="125999" y="3859070"/>
-            <a:ext cx="1152000" cy="223200"/>
+            <a:off x="125999" y="3869864"/>
+            <a:ext cx="1152000" cy="349064"/>
           </a:xfrm>
           <a:prstGeom prst="rect">
             <a:avLst/>
@@ -30459,8 +29787,8 @@
         </p:nvSpPr>
         <p:spPr>
           <a:xfrm>
-            <a:off x="161999" y="3859070"/>
-            <a:ext cx="1116000" cy="223200"/>
+            <a:off x="161999" y="3869864"/>
+            <a:ext cx="1116000" cy="349064"/>
           </a:xfrm>
           <a:prstGeom prst="rect">
             <a:avLst/>
@@ -30493,8 +29821,8 @@
         </p:nvSpPr>
         <p:spPr>
           <a:xfrm>
-            <a:off x="1299599" y="3859070"/>
-            <a:ext cx="5522400" cy="223200"/>
+            <a:off x="1299599" y="3869864"/>
+            <a:ext cx="5522400" cy="349064"/>
           </a:xfrm>
           <a:prstGeom prst="rect">
             <a:avLst/>
@@ -30527,7 +29855,7 @@
         </p:nvSpPr>
         <p:spPr>
           <a:xfrm>
-            <a:off x="125999" y="4107470"/>
+            <a:off x="125999" y="4244128"/>
             <a:ext cx="1152000" cy="223200"/>
           </a:xfrm>
           <a:prstGeom prst="rect">
@@ -30570,7 +29898,7 @@
         </p:nvSpPr>
         <p:spPr>
           <a:xfrm>
-            <a:off x="161999" y="4107470"/>
+            <a:off x="161999" y="4244128"/>
             <a:ext cx="1116000" cy="223200"/>
           </a:xfrm>
           <a:prstGeom prst="rect">
@@ -30604,7 +29932,7 @@
         </p:nvSpPr>
         <p:spPr>
           <a:xfrm>
-            <a:off x="1299599" y="4107470"/>
+            <a:off x="1299599" y="4244128"/>
             <a:ext cx="5522400" cy="223200"/>
           </a:xfrm>
           <a:prstGeom prst="rect">
@@ -30638,8 +29966,8 @@
         </p:nvSpPr>
         <p:spPr>
           <a:xfrm>
-            <a:off x="125999" y="4355870"/>
-            <a:ext cx="1152000" cy="478605"/>
+            <a:off x="125999" y="4492528"/>
+            <a:ext cx="1152000" cy="640528"/>
           </a:xfrm>
           <a:prstGeom prst="rect">
             <a:avLst/>
@@ -30681,8 +30009,8 @@
         </p:nvSpPr>
         <p:spPr>
           <a:xfrm>
-            <a:off x="161999" y="4355870"/>
-            <a:ext cx="1116000" cy="478605"/>
+            <a:off x="161999" y="4492528"/>
+            <a:ext cx="1116000" cy="640528"/>
           </a:xfrm>
           <a:prstGeom prst="rect">
             <a:avLst/>
@@ -30715,8 +30043,8 @@
         </p:nvSpPr>
         <p:spPr>
           <a:xfrm>
-            <a:off x="1299599" y="4355870"/>
-            <a:ext cx="5522400" cy="478605"/>
+            <a:off x="1299599" y="4492528"/>
+            <a:ext cx="5522400" cy="640528"/>
           </a:xfrm>
           <a:prstGeom prst="rect">
             <a:avLst/>
@@ -30749,8 +30077,8 @@
         </p:nvSpPr>
         <p:spPr>
           <a:xfrm>
-            <a:off x="125999" y="4859675"/>
-            <a:ext cx="1152000" cy="478605"/>
+            <a:off x="125999" y="5158256"/>
+            <a:ext cx="1152000" cy="640528"/>
           </a:xfrm>
           <a:prstGeom prst="rect">
             <a:avLst/>
@@ -30792,8 +30120,8 @@
         </p:nvSpPr>
         <p:spPr>
           <a:xfrm>
-            <a:off x="161999" y="4859675"/>
-            <a:ext cx="1116000" cy="478605"/>
+            <a:off x="161999" y="5158256"/>
+            <a:ext cx="1116000" cy="640528"/>
           </a:xfrm>
           <a:prstGeom prst="rect">
             <a:avLst/>
@@ -30826,8 +30154,8 @@
         </p:nvSpPr>
         <p:spPr>
           <a:xfrm>
-            <a:off x="1299599" y="4859675"/>
-            <a:ext cx="5522400" cy="478605"/>
+            <a:off x="1299599" y="5158256"/>
+            <a:ext cx="5522400" cy="640528"/>
           </a:xfrm>
           <a:prstGeom prst="rect">
             <a:avLst/>
@@ -30895,30 +30223,6 @@
           </a:p>
         </p:txBody>
       </p:sp>
-      <p:pic>
-        <p:nvPicPr>
-          <p:cNvPr id="59" name="Picture 58" descr="1779267814073_qe07r.jpg"/>
-          <p:cNvPicPr>
-            <a:picLocks noChangeAspect="1"/>
-          </p:cNvPicPr>
-          <p:nvPr/>
-        </p:nvPicPr>
-        <p:blipFill>
-          <a:blip r:embed="rId2"/>
-          <a:stretch>
-            <a:fillRect/>
-          </a:stretch>
-        </p:blipFill>
-        <p:spPr>
-          <a:xfrm>
-            <a:off x="6929999" y="1928856"/>
-            <a:ext cx="5137202" cy="3630289"/>
-          </a:xfrm>
-          <a:prstGeom prst="rect">
-            <a:avLst/>
-          </a:prstGeom>
-        </p:spPr>
-      </p:pic>
     </p:spTree>
   </p:cSld>
   <p:clrMapOvr>
@@ -31106,7 +30410,7 @@
             <a:avLst/>
           </a:prstGeom>
           <a:solidFill>
-            <a:srgbClr val="F39C12"/>
+            <a:srgbClr val="1E8A44"/>
           </a:solidFill>
           <a:ln>
             <a:noFill/>
@@ -31163,7 +30467,7 @@
                   <a:srgbClr val="FFFFFF"/>
                 </a:solidFill>
               </a:rPr>
-              <a:t>要注意</a:t>
+              <a:t>確認済</a:t>
             </a:r>
           </a:p>
         </p:txBody>
@@ -31373,7 +30677,7 @@
           <a:noFill/>
         </p:spPr>
         <p:txBody>
-          <a:bodyPr wrap="square">
+          <a:bodyPr wrap="none">
             <a:spAutoFit/>
           </a:bodyPr>
           <a:lstStyle/>
@@ -31399,7 +30703,7 @@
         <p:spPr>
           <a:xfrm>
             <a:off x="838799" y="1432800"/>
-            <a:ext cx="648000" cy="259200"/>
+            <a:ext cx="802800" cy="259200"/>
           </a:xfrm>
           <a:prstGeom prst="rect">
             <a:avLst/>
@@ -31442,15 +30746,15 @@
         <p:spPr>
           <a:xfrm>
             <a:off x="881999" y="1432800"/>
-            <a:ext cx="604800" cy="259200"/>
-          </a:xfrm>
-          <a:prstGeom prst="rect">
-            <a:avLst/>
-          </a:prstGeom>
-          <a:noFill/>
-        </p:spPr>
-        <p:txBody>
-          <a:bodyPr wrap="square">
+            <a:ext cx="759600" cy="259200"/>
+          </a:xfrm>
+          <a:prstGeom prst="rect">
+            <a:avLst/>
+          </a:prstGeom>
+          <a:noFill/>
+        </p:spPr>
+        <p:txBody>
+          <a:bodyPr wrap="none">
             <a:spAutoFit/>
           </a:bodyPr>
           <a:lstStyle/>
@@ -31475,8 +30779,8 @@
         </p:nvSpPr>
         <p:spPr>
           <a:xfrm>
-            <a:off x="1551599" y="1432800"/>
-            <a:ext cx="648000" cy="259200"/>
+            <a:off x="1706399" y="1432800"/>
+            <a:ext cx="802800" cy="259200"/>
           </a:xfrm>
           <a:prstGeom prst="rect">
             <a:avLst/>
@@ -31518,16 +30822,16 @@
         </p:nvSpPr>
         <p:spPr>
           <a:xfrm>
-            <a:off x="1594799" y="1432800"/>
-            <a:ext cx="604800" cy="259200"/>
-          </a:xfrm>
-          <a:prstGeom prst="rect">
-            <a:avLst/>
-          </a:prstGeom>
-          <a:noFill/>
-        </p:spPr>
-        <p:txBody>
-          <a:bodyPr wrap="square">
+            <a:off x="1749599" y="1432800"/>
+            <a:ext cx="759600" cy="259200"/>
+          </a:xfrm>
+          <a:prstGeom prst="rect">
+            <a:avLst/>
+          </a:prstGeom>
+          <a:noFill/>
+        </p:spPr>
+        <p:txBody>
+          <a:bodyPr wrap="none">
             <a:spAutoFit/>
           </a:bodyPr>
           <a:lstStyle/>
@@ -31552,8 +30856,8 @@
         </p:nvSpPr>
         <p:spPr>
           <a:xfrm>
-            <a:off x="2264399" y="1432800"/>
-            <a:ext cx="741600" cy="259200"/>
+            <a:off x="2573999" y="1432800"/>
+            <a:ext cx="1004400" cy="259200"/>
           </a:xfrm>
           <a:prstGeom prst="rect">
             <a:avLst/>
@@ -31595,16 +30899,16 @@
         </p:nvSpPr>
         <p:spPr>
           <a:xfrm>
-            <a:off x="2307599" y="1432800"/>
-            <a:ext cx="698400" cy="259200"/>
-          </a:xfrm>
-          <a:prstGeom prst="rect">
-            <a:avLst/>
-          </a:prstGeom>
-          <a:noFill/>
-        </p:spPr>
-        <p:txBody>
-          <a:bodyPr wrap="square">
+            <a:off x="2617199" y="1432800"/>
+            <a:ext cx="961200" cy="259200"/>
+          </a:xfrm>
+          <a:prstGeom prst="rect">
+            <a:avLst/>
+          </a:prstGeom>
+          <a:noFill/>
+        </p:spPr>
+        <p:txBody>
+          <a:bodyPr wrap="none">
             <a:spAutoFit/>
           </a:bodyPr>
           <a:lstStyle/>
@@ -31629,8 +30933,8 @@
         </p:nvSpPr>
         <p:spPr>
           <a:xfrm>
-            <a:off x="3070799" y="1432800"/>
-            <a:ext cx="648000" cy="259200"/>
+            <a:off x="3643199" y="1432800"/>
+            <a:ext cx="802800" cy="259200"/>
           </a:xfrm>
           <a:prstGeom prst="rect">
             <a:avLst/>
@@ -31672,16 +30976,16 @@
         </p:nvSpPr>
         <p:spPr>
           <a:xfrm>
-            <a:off x="3113999" y="1432800"/>
-            <a:ext cx="604800" cy="259200"/>
-          </a:xfrm>
-          <a:prstGeom prst="rect">
-            <a:avLst/>
-          </a:prstGeom>
-          <a:noFill/>
-        </p:spPr>
-        <p:txBody>
-          <a:bodyPr wrap="square">
+            <a:off x="3686399" y="1432800"/>
+            <a:ext cx="759600" cy="259200"/>
+          </a:xfrm>
+          <a:prstGeom prst="rect">
+            <a:avLst/>
+          </a:prstGeom>
+          <a:noFill/>
+        </p:spPr>
+        <p:txBody>
+          <a:bodyPr wrap="none">
             <a:spAutoFit/>
           </a:bodyPr>
           <a:lstStyle/>
@@ -31929,7 +31233,7 @@
         <p:spPr>
           <a:xfrm>
             <a:off x="125999" y="2253600"/>
-            <a:ext cx="1152000" cy="223200"/>
+            <a:ext cx="1152000" cy="349064"/>
           </a:xfrm>
           <a:prstGeom prst="rect">
             <a:avLst/>
@@ -31972,7 +31276,7 @@
         <p:spPr>
           <a:xfrm>
             <a:off x="161999" y="2253600"/>
-            <a:ext cx="1116000" cy="223200"/>
+            <a:ext cx="1116000" cy="349064"/>
           </a:xfrm>
           <a:prstGeom prst="rect">
             <a:avLst/>
@@ -32006,7 +31310,7 @@
         <p:spPr>
           <a:xfrm>
             <a:off x="1299599" y="2253600"/>
-            <a:ext cx="5522400" cy="223200"/>
+            <a:ext cx="5522400" cy="349064"/>
           </a:xfrm>
           <a:prstGeom prst="rect">
             <a:avLst/>
@@ -32039,7 +31343,7 @@
         </p:nvSpPr>
         <p:spPr>
           <a:xfrm>
-            <a:off x="125999" y="2502000"/>
+            <a:off x="125999" y="2627864"/>
             <a:ext cx="1152000" cy="223200"/>
           </a:xfrm>
           <a:prstGeom prst="rect">
@@ -32082,7 +31386,7 @@
         </p:nvSpPr>
         <p:spPr>
           <a:xfrm>
-            <a:off x="161999" y="2502000"/>
+            <a:off x="161999" y="2627864"/>
             <a:ext cx="1116000" cy="223200"/>
           </a:xfrm>
           <a:prstGeom prst="rect">
@@ -32116,7 +31420,7 @@
         </p:nvSpPr>
         <p:spPr>
           <a:xfrm>
-            <a:off x="1299599" y="2502000"/>
+            <a:off x="1299599" y="2627864"/>
             <a:ext cx="5522400" cy="223200"/>
           </a:xfrm>
           <a:prstGeom prst="rect">
@@ -32150,7 +31454,7 @@
         </p:nvSpPr>
         <p:spPr>
           <a:xfrm>
-            <a:off x="125999" y="2750400"/>
+            <a:off x="125999" y="2876264"/>
             <a:ext cx="1152000" cy="223200"/>
           </a:xfrm>
           <a:prstGeom prst="rect">
@@ -32193,7 +31497,7 @@
         </p:nvSpPr>
         <p:spPr>
           <a:xfrm>
-            <a:off x="161999" y="2750400"/>
+            <a:off x="161999" y="2876264"/>
             <a:ext cx="1116000" cy="223200"/>
           </a:xfrm>
           <a:prstGeom prst="rect">
@@ -32227,7 +31531,7 @@
         </p:nvSpPr>
         <p:spPr>
           <a:xfrm>
-            <a:off x="1299599" y="2750400"/>
+            <a:off x="1299599" y="2876264"/>
             <a:ext cx="5522400" cy="223200"/>
           </a:xfrm>
           <a:prstGeom prst="rect">
@@ -32261,7 +31565,7 @@
         </p:nvSpPr>
         <p:spPr>
           <a:xfrm>
-            <a:off x="125999" y="2998800"/>
+            <a:off x="125999" y="3124664"/>
             <a:ext cx="1152000" cy="223200"/>
           </a:xfrm>
           <a:prstGeom prst="rect">
@@ -32304,7 +31608,7 @@
         </p:nvSpPr>
         <p:spPr>
           <a:xfrm>
-            <a:off x="161999" y="2998800"/>
+            <a:off x="161999" y="3124664"/>
             <a:ext cx="1116000" cy="223200"/>
           </a:xfrm>
           <a:prstGeom prst="rect">
@@ -32338,7 +31642,7 @@
         </p:nvSpPr>
         <p:spPr>
           <a:xfrm>
-            <a:off x="1299599" y="2998800"/>
+            <a:off x="1299599" y="3124664"/>
             <a:ext cx="5522400" cy="223200"/>
           </a:xfrm>
           <a:prstGeom prst="rect">
@@ -32372,7 +31676,7 @@
         </p:nvSpPr>
         <p:spPr>
           <a:xfrm>
-            <a:off x="125999" y="3247200"/>
+            <a:off x="125999" y="3373064"/>
             <a:ext cx="1152000" cy="223200"/>
           </a:xfrm>
           <a:prstGeom prst="rect">
@@ -32415,7 +31719,7 @@
         </p:nvSpPr>
         <p:spPr>
           <a:xfrm>
-            <a:off x="161999" y="3247200"/>
+            <a:off x="161999" y="3373064"/>
             <a:ext cx="1116000" cy="223200"/>
           </a:xfrm>
           <a:prstGeom prst="rect">
@@ -32449,7 +31753,7 @@
         </p:nvSpPr>
         <p:spPr>
           <a:xfrm>
-            <a:off x="1299599" y="3247200"/>
+            <a:off x="1299599" y="3373064"/>
             <a:ext cx="5522400" cy="223200"/>
           </a:xfrm>
           <a:prstGeom prst="rect">
@@ -32483,7 +31787,7 @@
         </p:nvSpPr>
         <p:spPr>
           <a:xfrm>
-            <a:off x="125999" y="3495600"/>
+            <a:off x="125999" y="3621464"/>
             <a:ext cx="1152000" cy="223200"/>
           </a:xfrm>
           <a:prstGeom prst="rect">
@@ -32526,7 +31830,7 @@
         </p:nvSpPr>
         <p:spPr>
           <a:xfrm>
-            <a:off x="161999" y="3495600"/>
+            <a:off x="161999" y="3621464"/>
             <a:ext cx="1116000" cy="223200"/>
           </a:xfrm>
           <a:prstGeom prst="rect">
@@ -32560,7 +31864,7 @@
         </p:nvSpPr>
         <p:spPr>
           <a:xfrm>
-            <a:off x="1299599" y="3495600"/>
+            <a:off x="1299599" y="3621464"/>
             <a:ext cx="5522400" cy="223200"/>
           </a:xfrm>
           <a:prstGeom prst="rect">
@@ -32594,7 +31898,7 @@
         </p:nvSpPr>
         <p:spPr>
           <a:xfrm>
-            <a:off x="125999" y="3744000"/>
+            <a:off x="125999" y="3869864"/>
             <a:ext cx="1152000" cy="223200"/>
           </a:xfrm>
           <a:prstGeom prst="rect">
@@ -32637,7 +31941,7 @@
         </p:nvSpPr>
         <p:spPr>
           <a:xfrm>
-            <a:off x="161999" y="3744000"/>
+            <a:off x="161999" y="3869864"/>
             <a:ext cx="1116000" cy="223200"/>
           </a:xfrm>
           <a:prstGeom prst="rect">
@@ -32671,7 +31975,7 @@
         </p:nvSpPr>
         <p:spPr>
           <a:xfrm>
-            <a:off x="1299599" y="3744000"/>
+            <a:off x="1299599" y="3869864"/>
             <a:ext cx="5522400" cy="223200"/>
           </a:xfrm>
           <a:prstGeom prst="rect">
@@ -32705,7 +32009,7 @@
         </p:nvSpPr>
         <p:spPr>
           <a:xfrm>
-            <a:off x="125999" y="3992400"/>
+            <a:off x="125999" y="4118264"/>
             <a:ext cx="1152000" cy="223200"/>
           </a:xfrm>
           <a:prstGeom prst="rect">
@@ -32748,7 +32052,7 @@
         </p:nvSpPr>
         <p:spPr>
           <a:xfrm>
-            <a:off x="161999" y="3992400"/>
+            <a:off x="161999" y="4118264"/>
             <a:ext cx="1116000" cy="223200"/>
           </a:xfrm>
           <a:prstGeom prst="rect">
@@ -32782,7 +32086,7 @@
         </p:nvSpPr>
         <p:spPr>
           <a:xfrm>
-            <a:off x="1299599" y="3992400"/>
+            <a:off x="1299599" y="4118264"/>
             <a:ext cx="5522400" cy="223200"/>
           </a:xfrm>
           <a:prstGeom prst="rect">
@@ -32816,8 +32120,8 @@
         </p:nvSpPr>
         <p:spPr>
           <a:xfrm>
-            <a:off x="125999" y="4240800"/>
-            <a:ext cx="1152000" cy="338270"/>
+            <a:off x="125999" y="4366664"/>
+            <a:ext cx="1152000" cy="349064"/>
           </a:xfrm>
           <a:prstGeom prst="rect">
             <a:avLst/>
@@ -32859,8 +32163,8 @@
         </p:nvSpPr>
         <p:spPr>
           <a:xfrm>
-            <a:off x="161999" y="4240800"/>
-            <a:ext cx="1116000" cy="338270"/>
+            <a:off x="161999" y="4366664"/>
+            <a:ext cx="1116000" cy="349064"/>
           </a:xfrm>
           <a:prstGeom prst="rect">
             <a:avLst/>
@@ -32893,8 +32197,8 @@
         </p:nvSpPr>
         <p:spPr>
           <a:xfrm>
-            <a:off x="1299599" y="4240800"/>
-            <a:ext cx="5522400" cy="338270"/>
+            <a:off x="1299599" y="4366664"/>
+            <a:ext cx="5522400" cy="349064"/>
           </a:xfrm>
           <a:prstGeom prst="rect">
             <a:avLst/>
@@ -32927,7 +32231,7 @@
         </p:nvSpPr>
         <p:spPr>
           <a:xfrm>
-            <a:off x="125999" y="4604270"/>
+            <a:off x="125999" y="4740928"/>
             <a:ext cx="1152000" cy="223200"/>
           </a:xfrm>
           <a:prstGeom prst="rect">
@@ -32970,7 +32274,7 @@
         </p:nvSpPr>
         <p:spPr>
           <a:xfrm>
-            <a:off x="161999" y="4604270"/>
+            <a:off x="161999" y="4740928"/>
             <a:ext cx="1116000" cy="223200"/>
           </a:xfrm>
           <a:prstGeom prst="rect">
@@ -33004,7 +32308,7 @@
         </p:nvSpPr>
         <p:spPr>
           <a:xfrm>
-            <a:off x="1299599" y="4604270"/>
+            <a:off x="1299599" y="4740928"/>
             <a:ext cx="5522400" cy="223200"/>
           </a:xfrm>
           <a:prstGeom prst="rect">
@@ -33073,33 +32377,9 @@
           </a:p>
         </p:txBody>
       </p:sp>
-      <p:pic>
-        <p:nvPicPr>
-          <p:cNvPr id="59" name="Picture 58" descr="1779266493847_ygpze.jpg"/>
-          <p:cNvPicPr>
-            <a:picLocks noChangeAspect="1"/>
-          </p:cNvPicPr>
-          <p:nvPr/>
-        </p:nvPicPr>
-        <p:blipFill>
-          <a:blip r:embed="rId2"/>
-          <a:stretch>
-            <a:fillRect/>
-          </a:stretch>
-        </p:blipFill>
-        <p:spPr>
-          <a:xfrm>
-            <a:off x="7221299" y="756000"/>
-            <a:ext cx="1968000" cy="1968000"/>
-          </a:xfrm>
-          <a:prstGeom prst="rect">
-            <a:avLst/>
-          </a:prstGeom>
-        </p:spPr>
-      </p:pic>
-      <p:sp>
-        <p:nvSpPr>
-          <p:cNvPr id="60" name="Rectangle 59"/>
+      <p:sp>
+        <p:nvSpPr>
+          <p:cNvPr id="59" name="Rectangle 58"/>
           <p:cNvSpPr/>
           <p:nvPr/>
         </p:nvSpPr>
@@ -33140,33 +32420,9 @@
           </a:p>
         </p:txBody>
       </p:sp>
-      <p:pic>
-        <p:nvPicPr>
-          <p:cNvPr id="61" name="Picture 60" descr="1779266493849_4g0nx.jpg"/>
-          <p:cNvPicPr>
-            <a:picLocks noChangeAspect="1"/>
-          </p:cNvPicPr>
-          <p:nvPr/>
-        </p:nvPicPr>
-        <p:blipFill>
-          <a:blip r:embed="rId3"/>
-          <a:stretch>
-            <a:fillRect/>
-          </a:stretch>
-        </p:blipFill>
-        <p:spPr>
-          <a:xfrm>
-            <a:off x="9807900" y="756000"/>
-            <a:ext cx="1968000" cy="1968000"/>
-          </a:xfrm>
-          <a:prstGeom prst="rect">
-            <a:avLst/>
-          </a:prstGeom>
-        </p:spPr>
-      </p:pic>
-      <p:sp>
-        <p:nvSpPr>
-          <p:cNvPr id="62" name="Rectangle 61"/>
+      <p:sp>
+        <p:nvSpPr>
+          <p:cNvPr id="60" name="Rectangle 59"/>
           <p:cNvSpPr/>
           <p:nvPr/>
         </p:nvSpPr>
@@ -33207,33 +32463,9 @@
           </a:p>
         </p:txBody>
       </p:sp>
-      <p:pic>
-        <p:nvPicPr>
-          <p:cNvPr id="63" name="Picture 62" descr="1779266493850_ejf0l.jpg"/>
-          <p:cNvPicPr>
-            <a:picLocks noChangeAspect="1"/>
-          </p:cNvPicPr>
-          <p:nvPr/>
-        </p:nvPicPr>
-        <p:blipFill>
-          <a:blip r:embed="rId4"/>
-          <a:stretch>
-            <a:fillRect/>
-          </a:stretch>
-        </p:blipFill>
-        <p:spPr>
-          <a:xfrm>
-            <a:off x="7221299" y="2760000"/>
-            <a:ext cx="1968000" cy="1968000"/>
-          </a:xfrm>
-          <a:prstGeom prst="rect">
-            <a:avLst/>
-          </a:prstGeom>
-        </p:spPr>
-      </p:pic>
-      <p:sp>
-        <p:nvSpPr>
-          <p:cNvPr id="64" name="Rectangle 63"/>
+      <p:sp>
+        <p:nvSpPr>
+          <p:cNvPr id="61" name="Rectangle 60"/>
           <p:cNvSpPr/>
           <p:nvPr/>
         </p:nvSpPr>
@@ -33274,33 +32506,9 @@
           </a:p>
         </p:txBody>
       </p:sp>
-      <p:pic>
-        <p:nvPicPr>
-          <p:cNvPr id="65" name="Picture 64" descr="1779266493851_j8xjv.jpg"/>
-          <p:cNvPicPr>
-            <a:picLocks noChangeAspect="1"/>
-          </p:cNvPicPr>
-          <p:nvPr/>
-        </p:nvPicPr>
-        <p:blipFill>
-          <a:blip r:embed="rId5"/>
-          <a:stretch>
-            <a:fillRect/>
-          </a:stretch>
-        </p:blipFill>
-        <p:spPr>
-          <a:xfrm>
-            <a:off x="9807900" y="2760000"/>
-            <a:ext cx="1968000" cy="1968000"/>
-          </a:xfrm>
-          <a:prstGeom prst="rect">
-            <a:avLst/>
-          </a:prstGeom>
-        </p:spPr>
-      </p:pic>
-      <p:sp>
-        <p:nvSpPr>
-          <p:cNvPr id="66" name="Rectangle 65"/>
+      <p:sp>
+        <p:nvSpPr>
+          <p:cNvPr id="62" name="Rectangle 61"/>
           <p:cNvSpPr/>
           <p:nvPr/>
         </p:nvSpPr>
@@ -33341,33 +32549,9 @@
           </a:p>
         </p:txBody>
       </p:sp>
-      <p:pic>
-        <p:nvPicPr>
-          <p:cNvPr id="67" name="Picture 66" descr="1779266493852_c0liv.jpg"/>
-          <p:cNvPicPr>
-            <a:picLocks noChangeAspect="1"/>
-          </p:cNvPicPr>
-          <p:nvPr/>
-        </p:nvPicPr>
-        <p:blipFill>
-          <a:blip r:embed="rId6"/>
-          <a:stretch>
-            <a:fillRect/>
-          </a:stretch>
-        </p:blipFill>
-        <p:spPr>
-          <a:xfrm>
-            <a:off x="7221299" y="4764000"/>
-            <a:ext cx="1968000" cy="1968000"/>
-          </a:xfrm>
-          <a:prstGeom prst="rect">
-            <a:avLst/>
-          </a:prstGeom>
-        </p:spPr>
-      </p:pic>
-      <p:sp>
-        <p:nvSpPr>
-          <p:cNvPr id="68" name="Rectangle 67"/>
+      <p:sp>
+        <p:nvSpPr>
+          <p:cNvPr id="63" name="Rectangle 62"/>
           <p:cNvSpPr/>
           <p:nvPr/>
         </p:nvSpPr>
@@ -33408,33 +32592,9 @@
           </a:p>
         </p:txBody>
       </p:sp>
-      <p:pic>
-        <p:nvPicPr>
-          <p:cNvPr id="69" name="Picture 68" descr="1779266493853_lxo14.jpg"/>
-          <p:cNvPicPr>
-            <a:picLocks noChangeAspect="1"/>
-          </p:cNvPicPr>
-          <p:nvPr/>
-        </p:nvPicPr>
-        <p:blipFill>
-          <a:blip r:embed="rId7"/>
-          <a:stretch>
-            <a:fillRect/>
-          </a:stretch>
-        </p:blipFill>
-        <p:spPr>
-          <a:xfrm>
-            <a:off x="9807900" y="4764000"/>
-            <a:ext cx="1968000" cy="1968000"/>
-          </a:xfrm>
-          <a:prstGeom prst="rect">
-            <a:avLst/>
-          </a:prstGeom>
-        </p:spPr>
-      </p:pic>
-      <p:sp>
-        <p:nvSpPr>
-          <p:cNvPr id="70" name="Rectangle 69"/>
+      <p:sp>
+        <p:nvSpPr>
+          <p:cNvPr id="64" name="Rectangle 63"/>
           <p:cNvSpPr/>
           <p:nvPr/>
         </p:nvSpPr>
@@ -33479,7 +32639,7 @@
       </p:sp>
       <p:sp>
         <p:nvSpPr>
-          <p:cNvPr id="71" name="TextBox 70"/>
+          <p:cNvPr id="65" name="TextBox 64"/>
           <p:cNvSpPr txBox="1"/>
           <p:nvPr/>
         </p:nvSpPr>
@@ -33965,7 +33125,7 @@
           <a:noFill/>
         </p:spPr>
         <p:txBody>
-          <a:bodyPr wrap="square">
+          <a:bodyPr wrap="none">
             <a:spAutoFit/>
           </a:bodyPr>
           <a:lstStyle/>
@@ -33991,7 +33151,7 @@
         <p:spPr>
           <a:xfrm>
             <a:off x="838799" y="1432800"/>
-            <a:ext cx="648000" cy="259200"/>
+            <a:ext cx="802800" cy="259200"/>
           </a:xfrm>
           <a:prstGeom prst="rect">
             <a:avLst/>
@@ -34034,15 +33194,15 @@
         <p:spPr>
           <a:xfrm>
             <a:off x="881999" y="1432800"/>
-            <a:ext cx="604800" cy="259200"/>
-          </a:xfrm>
-          <a:prstGeom prst="rect">
-            <a:avLst/>
-          </a:prstGeom>
-          <a:noFill/>
-        </p:spPr>
-        <p:txBody>
-          <a:bodyPr wrap="square">
+            <a:ext cx="759600" cy="259200"/>
+          </a:xfrm>
+          <a:prstGeom prst="rect">
+            <a:avLst/>
+          </a:prstGeom>
+          <a:noFill/>
+        </p:spPr>
+        <p:txBody>
+          <a:bodyPr wrap="none">
             <a:spAutoFit/>
           </a:bodyPr>
           <a:lstStyle/>
@@ -34067,8 +33227,8 @@
         </p:nvSpPr>
         <p:spPr>
           <a:xfrm>
-            <a:off x="1551599" y="1432800"/>
-            <a:ext cx="680400" cy="259200"/>
+            <a:off x="1706399" y="1432800"/>
+            <a:ext cx="903600" cy="259200"/>
           </a:xfrm>
           <a:prstGeom prst="rect">
             <a:avLst/>
@@ -34110,16 +33270,16 @@
         </p:nvSpPr>
         <p:spPr>
           <a:xfrm>
-            <a:off x="1594799" y="1432800"/>
-            <a:ext cx="637200" cy="259200"/>
-          </a:xfrm>
-          <a:prstGeom prst="rect">
-            <a:avLst/>
-          </a:prstGeom>
-          <a:noFill/>
-        </p:spPr>
-        <p:txBody>
-          <a:bodyPr wrap="square">
+            <a:off x="1749599" y="1432800"/>
+            <a:ext cx="860400" cy="259200"/>
+          </a:xfrm>
+          <a:prstGeom prst="rect">
+            <a:avLst/>
+          </a:prstGeom>
+          <a:noFill/>
+        </p:spPr>
+        <p:txBody>
+          <a:bodyPr wrap="none">
             <a:spAutoFit/>
           </a:bodyPr>
           <a:lstStyle/>
@@ -34144,8 +33304,8 @@
         </p:nvSpPr>
         <p:spPr>
           <a:xfrm>
-            <a:off x="2296799" y="1432800"/>
-            <a:ext cx="741600" cy="259200"/>
+            <a:off x="2674799" y="1432800"/>
+            <a:ext cx="1004400" cy="259200"/>
           </a:xfrm>
           <a:prstGeom prst="rect">
             <a:avLst/>
@@ -34187,16 +33347,16 @@
         </p:nvSpPr>
         <p:spPr>
           <a:xfrm>
-            <a:off x="2339999" y="1432800"/>
-            <a:ext cx="698400" cy="259200"/>
-          </a:xfrm>
-          <a:prstGeom prst="rect">
-            <a:avLst/>
-          </a:prstGeom>
-          <a:noFill/>
-        </p:spPr>
-        <p:txBody>
-          <a:bodyPr wrap="square">
+            <a:off x="2717999" y="1432800"/>
+            <a:ext cx="961200" cy="259200"/>
+          </a:xfrm>
+          <a:prstGeom prst="rect">
+            <a:avLst/>
+          </a:prstGeom>
+          <a:noFill/>
+        </p:spPr>
+        <p:txBody>
+          <a:bodyPr wrap="none">
             <a:spAutoFit/>
           </a:bodyPr>
           <a:lstStyle/>
@@ -34221,8 +33381,8 @@
         </p:nvSpPr>
         <p:spPr>
           <a:xfrm>
-            <a:off x="3103199" y="1432800"/>
-            <a:ext cx="648000" cy="259200"/>
+            <a:off x="3743999" y="1432800"/>
+            <a:ext cx="802800" cy="259200"/>
           </a:xfrm>
           <a:prstGeom prst="rect">
             <a:avLst/>
@@ -34264,16 +33424,16 @@
         </p:nvSpPr>
         <p:spPr>
           <a:xfrm>
-            <a:off x="3146399" y="1432800"/>
-            <a:ext cx="604800" cy="259200"/>
-          </a:xfrm>
-          <a:prstGeom prst="rect">
-            <a:avLst/>
-          </a:prstGeom>
-          <a:noFill/>
-        </p:spPr>
-        <p:txBody>
-          <a:bodyPr wrap="square">
+            <a:off x="3787199" y="1432800"/>
+            <a:ext cx="759600" cy="259200"/>
+          </a:xfrm>
+          <a:prstGeom prst="rect">
+            <a:avLst/>
+          </a:prstGeom>
+          <a:noFill/>
+        </p:spPr>
+        <p:txBody>
+          <a:bodyPr wrap="none">
             <a:spAutoFit/>
           </a:bodyPr>
           <a:lstStyle/>
@@ -35409,7 +34569,7 @@
         <p:spPr>
           <a:xfrm>
             <a:off x="125999" y="4240800"/>
-            <a:ext cx="1152000" cy="338270"/>
+            <a:ext cx="1152000" cy="349064"/>
           </a:xfrm>
           <a:prstGeom prst="rect">
             <a:avLst/>
@@ -35452,7 +34612,7 @@
         <p:spPr>
           <a:xfrm>
             <a:off x="161999" y="4240800"/>
-            <a:ext cx="1116000" cy="338270"/>
+            <a:ext cx="1116000" cy="349064"/>
           </a:xfrm>
           <a:prstGeom prst="rect">
             <a:avLst/>
@@ -35486,7 +34646,7 @@
         <p:spPr>
           <a:xfrm>
             <a:off x="1299599" y="4240800"/>
-            <a:ext cx="5522400" cy="338270"/>
+            <a:ext cx="5522400" cy="349064"/>
           </a:xfrm>
           <a:prstGeom prst="rect">
             <a:avLst/>
@@ -35519,7 +34679,7 @@
         </p:nvSpPr>
         <p:spPr>
           <a:xfrm>
-            <a:off x="125999" y="4604270"/>
+            <a:off x="125999" y="4615064"/>
             <a:ext cx="1152000" cy="223200"/>
           </a:xfrm>
           <a:prstGeom prst="rect">
@@ -35562,7 +34722,7 @@
         </p:nvSpPr>
         <p:spPr>
           <a:xfrm>
-            <a:off x="161999" y="4604270"/>
+            <a:off x="161999" y="4615064"/>
             <a:ext cx="1116000" cy="223200"/>
           </a:xfrm>
           <a:prstGeom prst="rect">
@@ -35596,7 +34756,7 @@
         </p:nvSpPr>
         <p:spPr>
           <a:xfrm>
-            <a:off x="1299599" y="4604270"/>
+            <a:off x="1299599" y="4615064"/>
             <a:ext cx="5522400" cy="223200"/>
           </a:xfrm>
           <a:prstGeom prst="rect">
@@ -35665,33 +34825,9 @@
           </a:p>
         </p:txBody>
       </p:sp>
-      <p:pic>
-        <p:nvPicPr>
-          <p:cNvPr id="59" name="Picture 58" descr="1779266493869_4wxq4.jpg"/>
-          <p:cNvPicPr>
-            <a:picLocks noChangeAspect="1"/>
-          </p:cNvPicPr>
-          <p:nvPr/>
-        </p:nvPicPr>
-        <p:blipFill>
-          <a:blip r:embed="rId2"/>
-          <a:stretch>
-            <a:fillRect/>
-          </a:stretch>
-        </p:blipFill>
-        <p:spPr>
-          <a:xfrm>
-            <a:off x="7467299" y="756000"/>
-            <a:ext cx="1476000" cy="1968000"/>
-          </a:xfrm>
-          <a:prstGeom prst="rect">
-            <a:avLst/>
-          </a:prstGeom>
-        </p:spPr>
-      </p:pic>
-      <p:sp>
-        <p:nvSpPr>
-          <p:cNvPr id="60" name="Rectangle 59"/>
+      <p:sp>
+        <p:nvSpPr>
+          <p:cNvPr id="59" name="Rectangle 58"/>
           <p:cNvSpPr/>
           <p:nvPr/>
         </p:nvSpPr>
@@ -35732,33 +34868,9 @@
           </a:p>
         </p:txBody>
       </p:sp>
-      <p:pic>
-        <p:nvPicPr>
-          <p:cNvPr id="61" name="Picture 60" descr="1779266493870_b3d4g.jpg"/>
-          <p:cNvPicPr>
-            <a:picLocks noChangeAspect="1"/>
-          </p:cNvPicPr>
-          <p:nvPr/>
-        </p:nvPicPr>
-        <p:blipFill>
-          <a:blip r:embed="rId3"/>
-          <a:stretch>
-            <a:fillRect/>
-          </a:stretch>
-        </p:blipFill>
-        <p:spPr>
-          <a:xfrm>
-            <a:off x="10053900" y="756000"/>
-            <a:ext cx="1476000" cy="1968000"/>
-          </a:xfrm>
-          <a:prstGeom prst="rect">
-            <a:avLst/>
-          </a:prstGeom>
-        </p:spPr>
-      </p:pic>
-      <p:sp>
-        <p:nvSpPr>
-          <p:cNvPr id="62" name="Rectangle 61"/>
+      <p:sp>
+        <p:nvSpPr>
+          <p:cNvPr id="60" name="Rectangle 59"/>
           <p:cNvSpPr/>
           <p:nvPr/>
         </p:nvSpPr>
@@ -35799,33 +34911,9 @@
           </a:p>
         </p:txBody>
       </p:sp>
-      <p:pic>
-        <p:nvPicPr>
-          <p:cNvPr id="63" name="Picture 62" descr="1779266493871_0evn8.jpg"/>
-          <p:cNvPicPr>
-            <a:picLocks noChangeAspect="1"/>
-          </p:cNvPicPr>
-          <p:nvPr/>
-        </p:nvPicPr>
-        <p:blipFill>
-          <a:blip r:embed="rId4"/>
-          <a:stretch>
-            <a:fillRect/>
-          </a:stretch>
-        </p:blipFill>
-        <p:spPr>
-          <a:xfrm>
-            <a:off x="7467299" y="2760000"/>
-            <a:ext cx="1476000" cy="1968000"/>
-          </a:xfrm>
-          <a:prstGeom prst="rect">
-            <a:avLst/>
-          </a:prstGeom>
-        </p:spPr>
-      </p:pic>
-      <p:sp>
-        <p:nvSpPr>
-          <p:cNvPr id="64" name="Rectangle 63"/>
+      <p:sp>
+        <p:nvSpPr>
+          <p:cNvPr id="61" name="Rectangle 60"/>
           <p:cNvSpPr/>
           <p:nvPr/>
         </p:nvSpPr>
@@ -35866,33 +34954,9 @@
           </a:p>
         </p:txBody>
       </p:sp>
-      <p:pic>
-        <p:nvPicPr>
-          <p:cNvPr id="65" name="Picture 64" descr="1779266493873_bhdb2.jpg"/>
-          <p:cNvPicPr>
-            <a:picLocks noChangeAspect="1"/>
-          </p:cNvPicPr>
-          <p:nvPr/>
-        </p:nvPicPr>
-        <p:blipFill>
-          <a:blip r:embed="rId5"/>
-          <a:stretch>
-            <a:fillRect/>
-          </a:stretch>
-        </p:blipFill>
-        <p:spPr>
-          <a:xfrm>
-            <a:off x="10053900" y="2760000"/>
-            <a:ext cx="1476000" cy="1968000"/>
-          </a:xfrm>
-          <a:prstGeom prst="rect">
-            <a:avLst/>
-          </a:prstGeom>
-        </p:spPr>
-      </p:pic>
-      <p:sp>
-        <p:nvSpPr>
-          <p:cNvPr id="66" name="Rectangle 65"/>
+      <p:sp>
+        <p:nvSpPr>
+          <p:cNvPr id="62" name="Rectangle 61"/>
           <p:cNvSpPr/>
           <p:nvPr/>
         </p:nvSpPr>
@@ -35933,33 +34997,9 @@
           </a:p>
         </p:txBody>
       </p:sp>
-      <p:pic>
-        <p:nvPicPr>
-          <p:cNvPr id="67" name="Picture 66" descr="1779266493874_fitsi.jpg"/>
-          <p:cNvPicPr>
-            <a:picLocks noChangeAspect="1"/>
-          </p:cNvPicPr>
-          <p:nvPr/>
-        </p:nvPicPr>
-        <p:blipFill>
-          <a:blip r:embed="rId6"/>
-          <a:stretch>
-            <a:fillRect/>
-          </a:stretch>
-        </p:blipFill>
-        <p:spPr>
-          <a:xfrm>
-            <a:off x="7467299" y="4764000"/>
-            <a:ext cx="1476000" cy="1968000"/>
-          </a:xfrm>
-          <a:prstGeom prst="rect">
-            <a:avLst/>
-          </a:prstGeom>
-        </p:spPr>
-      </p:pic>
-      <p:sp>
-        <p:nvSpPr>
-          <p:cNvPr id="68" name="Rectangle 67"/>
+      <p:sp>
+        <p:nvSpPr>
+          <p:cNvPr id="63" name="Rectangle 62"/>
           <p:cNvSpPr/>
           <p:nvPr/>
         </p:nvSpPr>
@@ -36000,30 +35040,6 @@
           </a:p>
         </p:txBody>
       </p:sp>
-      <p:pic>
-        <p:nvPicPr>
-          <p:cNvPr id="69" name="Picture 68" descr="1779266493869_4wxq4.jpg"/>
-          <p:cNvPicPr>
-            <a:picLocks noChangeAspect="1"/>
-          </p:cNvPicPr>
-          <p:nvPr/>
-        </p:nvPicPr>
-        <p:blipFill>
-          <a:blip r:embed="rId2"/>
-          <a:stretch>
-            <a:fillRect/>
-          </a:stretch>
-        </p:blipFill>
-        <p:spPr>
-          <a:xfrm>
-            <a:off x="10053900" y="4764000"/>
-            <a:ext cx="1476000" cy="1968000"/>
-          </a:xfrm>
-          <a:prstGeom prst="rect">
-            <a:avLst/>
-          </a:prstGeom>
-        </p:spPr>
-      </p:pic>
     </p:spTree>
   </p:cSld>
   <p:clrMapOvr>
@@ -36478,7 +35494,7 @@
           <a:noFill/>
         </p:spPr>
         <p:txBody>
-          <a:bodyPr wrap="square">
+          <a:bodyPr wrap="none">
             <a:spAutoFit/>
           </a:bodyPr>
           <a:lstStyle/>
@@ -36504,7 +35520,7 @@
         <p:spPr>
           <a:xfrm>
             <a:off x="838799" y="1432800"/>
-            <a:ext cx="648000" cy="259200"/>
+            <a:ext cx="802800" cy="259200"/>
           </a:xfrm>
           <a:prstGeom prst="rect">
             <a:avLst/>
@@ -36547,15 +35563,15 @@
         <p:spPr>
           <a:xfrm>
             <a:off x="881999" y="1432800"/>
-            <a:ext cx="604800" cy="259200"/>
-          </a:xfrm>
-          <a:prstGeom prst="rect">
-            <a:avLst/>
-          </a:prstGeom>
-          <a:noFill/>
-        </p:spPr>
-        <p:txBody>
-          <a:bodyPr wrap="square">
+            <a:ext cx="759600" cy="259200"/>
+          </a:xfrm>
+          <a:prstGeom prst="rect">
+            <a:avLst/>
+          </a:prstGeom>
+          <a:noFill/>
+        </p:spPr>
+        <p:txBody>
+          <a:bodyPr wrap="none">
             <a:spAutoFit/>
           </a:bodyPr>
           <a:lstStyle/>
@@ -36580,8 +35596,8 @@
         </p:nvSpPr>
         <p:spPr>
           <a:xfrm>
-            <a:off x="1551599" y="1432800"/>
-            <a:ext cx="741600" cy="259200"/>
+            <a:off x="1706399" y="1432800"/>
+            <a:ext cx="1004400" cy="259200"/>
           </a:xfrm>
           <a:prstGeom prst="rect">
             <a:avLst/>
@@ -36623,16 +35639,16 @@
         </p:nvSpPr>
         <p:spPr>
           <a:xfrm>
-            <a:off x="1594799" y="1432800"/>
-            <a:ext cx="698400" cy="259200"/>
-          </a:xfrm>
-          <a:prstGeom prst="rect">
-            <a:avLst/>
-          </a:prstGeom>
-          <a:noFill/>
-        </p:spPr>
-        <p:txBody>
-          <a:bodyPr wrap="square">
+            <a:off x="1749599" y="1432800"/>
+            <a:ext cx="961200" cy="259200"/>
+          </a:xfrm>
+          <a:prstGeom prst="rect">
+            <a:avLst/>
+          </a:prstGeom>
+          <a:noFill/>
+        </p:spPr>
+        <p:txBody>
+          <a:bodyPr wrap="none">
             <a:spAutoFit/>
           </a:bodyPr>
           <a:lstStyle/>
@@ -36657,8 +35673,8 @@
         </p:nvSpPr>
         <p:spPr>
           <a:xfrm>
-            <a:off x="2357999" y="1432800"/>
-            <a:ext cx="741600" cy="259200"/>
+            <a:off x="2775599" y="1432800"/>
+            <a:ext cx="1004400" cy="259200"/>
           </a:xfrm>
           <a:prstGeom prst="rect">
             <a:avLst/>
@@ -36700,16 +35716,16 @@
         </p:nvSpPr>
         <p:spPr>
           <a:xfrm>
-            <a:off x="2401199" y="1432800"/>
-            <a:ext cx="698400" cy="259200"/>
-          </a:xfrm>
-          <a:prstGeom prst="rect">
-            <a:avLst/>
-          </a:prstGeom>
-          <a:noFill/>
-        </p:spPr>
-        <p:txBody>
-          <a:bodyPr wrap="square">
+            <a:off x="2818799" y="1432800"/>
+            <a:ext cx="961200" cy="259200"/>
+          </a:xfrm>
+          <a:prstGeom prst="rect">
+            <a:avLst/>
+          </a:prstGeom>
+          <a:noFill/>
+        </p:spPr>
+        <p:txBody>
+          <a:bodyPr wrap="none">
             <a:spAutoFit/>
           </a:bodyPr>
           <a:lstStyle/>
@@ -36734,8 +35750,8 @@
         </p:nvSpPr>
         <p:spPr>
           <a:xfrm>
-            <a:off x="3164399" y="1432800"/>
-            <a:ext cx="648000" cy="259200"/>
+            <a:off x="3844799" y="1432800"/>
+            <a:ext cx="802800" cy="259200"/>
           </a:xfrm>
           <a:prstGeom prst="rect">
             <a:avLst/>
@@ -36777,16 +35793,16 @@
         </p:nvSpPr>
         <p:spPr>
           <a:xfrm>
-            <a:off x="3207599" y="1432800"/>
-            <a:ext cx="604800" cy="259200"/>
-          </a:xfrm>
-          <a:prstGeom prst="rect">
-            <a:avLst/>
-          </a:prstGeom>
-          <a:noFill/>
-        </p:spPr>
-        <p:txBody>
-          <a:bodyPr wrap="square">
+            <a:off x="3887999" y="1432800"/>
+            <a:ext cx="759600" cy="259200"/>
+          </a:xfrm>
+          <a:prstGeom prst="rect">
+            <a:avLst/>
+          </a:prstGeom>
+          <a:noFill/>
+        </p:spPr>
+        <p:txBody>
+          <a:bodyPr wrap="none">
             <a:spAutoFit/>
           </a:bodyPr>
           <a:lstStyle/>
@@ -37034,7 +36050,7 @@
         <p:spPr>
           <a:xfrm>
             <a:off x="125999" y="2253600"/>
-            <a:ext cx="1152000" cy="223200"/>
+            <a:ext cx="1152000" cy="349064"/>
           </a:xfrm>
           <a:prstGeom prst="rect">
             <a:avLst/>
@@ -37077,7 +36093,7 @@
         <p:spPr>
           <a:xfrm>
             <a:off x="161999" y="2253600"/>
-            <a:ext cx="1116000" cy="223200"/>
+            <a:ext cx="1116000" cy="349064"/>
           </a:xfrm>
           <a:prstGeom prst="rect">
             <a:avLst/>
@@ -37111,7 +36127,7 @@
         <p:spPr>
           <a:xfrm>
             <a:off x="1299599" y="2253600"/>
-            <a:ext cx="5522400" cy="223200"/>
+            <a:ext cx="5522400" cy="349064"/>
           </a:xfrm>
           <a:prstGeom prst="rect">
             <a:avLst/>
@@ -37144,7 +36160,7 @@
         </p:nvSpPr>
         <p:spPr>
           <a:xfrm>
-            <a:off x="125999" y="2502000"/>
+            <a:off x="125999" y="2627864"/>
             <a:ext cx="1152000" cy="223200"/>
           </a:xfrm>
           <a:prstGeom prst="rect">
@@ -37187,7 +36203,7 @@
         </p:nvSpPr>
         <p:spPr>
           <a:xfrm>
-            <a:off x="161999" y="2502000"/>
+            <a:off x="161999" y="2627864"/>
             <a:ext cx="1116000" cy="223200"/>
           </a:xfrm>
           <a:prstGeom prst="rect">
@@ -37221,7 +36237,7 @@
         </p:nvSpPr>
         <p:spPr>
           <a:xfrm>
-            <a:off x="1299599" y="2502000"/>
+            <a:off x="1299599" y="2627864"/>
             <a:ext cx="5522400" cy="223200"/>
           </a:xfrm>
           <a:prstGeom prst="rect">
@@ -37255,7 +36271,7 @@
         </p:nvSpPr>
         <p:spPr>
           <a:xfrm>
-            <a:off x="125999" y="2750400"/>
+            <a:off x="125999" y="2876264"/>
             <a:ext cx="1152000" cy="223200"/>
           </a:xfrm>
           <a:prstGeom prst="rect">
@@ -37298,7 +36314,7 @@
         </p:nvSpPr>
         <p:spPr>
           <a:xfrm>
-            <a:off x="161999" y="2750400"/>
+            <a:off x="161999" y="2876264"/>
             <a:ext cx="1116000" cy="223200"/>
           </a:xfrm>
           <a:prstGeom prst="rect">
@@ -37332,7 +36348,7 @@
         </p:nvSpPr>
         <p:spPr>
           <a:xfrm>
-            <a:off x="1299599" y="2750400"/>
+            <a:off x="1299599" y="2876264"/>
             <a:ext cx="5522400" cy="223200"/>
           </a:xfrm>
           <a:prstGeom prst="rect">
@@ -37366,7 +36382,7 @@
         </p:nvSpPr>
         <p:spPr>
           <a:xfrm>
-            <a:off x="125999" y="2998800"/>
+            <a:off x="125999" y="3124664"/>
             <a:ext cx="1152000" cy="223200"/>
           </a:xfrm>
           <a:prstGeom prst="rect">
@@ -37409,7 +36425,7 @@
         </p:nvSpPr>
         <p:spPr>
           <a:xfrm>
-            <a:off x="161999" y="2998800"/>
+            <a:off x="161999" y="3124664"/>
             <a:ext cx="1116000" cy="223200"/>
           </a:xfrm>
           <a:prstGeom prst="rect">
@@ -37443,7 +36459,7 @@
         </p:nvSpPr>
         <p:spPr>
           <a:xfrm>
-            <a:off x="1299599" y="2998800"/>
+            <a:off x="1299599" y="3124664"/>
             <a:ext cx="5522400" cy="223200"/>
           </a:xfrm>
           <a:prstGeom prst="rect">
@@ -37477,7 +36493,7 @@
         </p:nvSpPr>
         <p:spPr>
           <a:xfrm>
-            <a:off x="125999" y="3247200"/>
+            <a:off x="125999" y="3373064"/>
             <a:ext cx="1152000" cy="223200"/>
           </a:xfrm>
           <a:prstGeom prst="rect">
@@ -37520,7 +36536,7 @@
         </p:nvSpPr>
         <p:spPr>
           <a:xfrm>
-            <a:off x="161999" y="3247200"/>
+            <a:off x="161999" y="3373064"/>
             <a:ext cx="1116000" cy="223200"/>
           </a:xfrm>
           <a:prstGeom prst="rect">
@@ -37554,7 +36570,7 @@
         </p:nvSpPr>
         <p:spPr>
           <a:xfrm>
-            <a:off x="1299599" y="3247200"/>
+            <a:off x="1299599" y="3373064"/>
             <a:ext cx="5522400" cy="223200"/>
           </a:xfrm>
           <a:prstGeom prst="rect">
@@ -37588,7 +36604,7 @@
         </p:nvSpPr>
         <p:spPr>
           <a:xfrm>
-            <a:off x="125999" y="3495600"/>
+            <a:off x="125999" y="3621464"/>
             <a:ext cx="1152000" cy="223200"/>
           </a:xfrm>
           <a:prstGeom prst="rect">
@@ -37631,7 +36647,7 @@
         </p:nvSpPr>
         <p:spPr>
           <a:xfrm>
-            <a:off x="161999" y="3495600"/>
+            <a:off x="161999" y="3621464"/>
             <a:ext cx="1116000" cy="223200"/>
           </a:xfrm>
           <a:prstGeom prst="rect">
@@ -37665,7 +36681,7 @@
         </p:nvSpPr>
         <p:spPr>
           <a:xfrm>
-            <a:off x="1299599" y="3495600"/>
+            <a:off x="1299599" y="3621464"/>
             <a:ext cx="5522400" cy="223200"/>
           </a:xfrm>
           <a:prstGeom prst="rect">
@@ -37699,7 +36715,7 @@
         </p:nvSpPr>
         <p:spPr>
           <a:xfrm>
-            <a:off x="125999" y="3744000"/>
+            <a:off x="125999" y="3869864"/>
             <a:ext cx="1152000" cy="223200"/>
           </a:xfrm>
           <a:prstGeom prst="rect">
@@ -37742,7 +36758,7 @@
         </p:nvSpPr>
         <p:spPr>
           <a:xfrm>
-            <a:off x="161999" y="3744000"/>
+            <a:off x="161999" y="3869864"/>
             <a:ext cx="1116000" cy="223200"/>
           </a:xfrm>
           <a:prstGeom prst="rect">
@@ -37776,7 +36792,7 @@
         </p:nvSpPr>
         <p:spPr>
           <a:xfrm>
-            <a:off x="1299599" y="3744000"/>
+            <a:off x="1299599" y="3869864"/>
             <a:ext cx="5522400" cy="223200"/>
           </a:xfrm>
           <a:prstGeom prst="rect">
@@ -37810,7 +36826,7 @@
         </p:nvSpPr>
         <p:spPr>
           <a:xfrm>
-            <a:off x="125999" y="3992400"/>
+            <a:off x="125999" y="4118264"/>
             <a:ext cx="1152000" cy="223200"/>
           </a:xfrm>
           <a:prstGeom prst="rect">
@@ -37853,7 +36869,7 @@
         </p:nvSpPr>
         <p:spPr>
           <a:xfrm>
-            <a:off x="161999" y="3992400"/>
+            <a:off x="161999" y="4118264"/>
             <a:ext cx="1116000" cy="223200"/>
           </a:xfrm>
           <a:prstGeom prst="rect">
@@ -37887,7 +36903,7 @@
         </p:nvSpPr>
         <p:spPr>
           <a:xfrm>
-            <a:off x="1299599" y="3992400"/>
+            <a:off x="1299599" y="4118264"/>
             <a:ext cx="5522400" cy="223200"/>
           </a:xfrm>
           <a:prstGeom prst="rect">
@@ -37921,8 +36937,8 @@
         </p:nvSpPr>
         <p:spPr>
           <a:xfrm>
-            <a:off x="125999" y="4240800"/>
-            <a:ext cx="1152000" cy="338270"/>
+            <a:off x="125999" y="4366664"/>
+            <a:ext cx="1152000" cy="349064"/>
           </a:xfrm>
           <a:prstGeom prst="rect">
             <a:avLst/>
@@ -37964,8 +36980,8 @@
         </p:nvSpPr>
         <p:spPr>
           <a:xfrm>
-            <a:off x="161999" y="4240800"/>
-            <a:ext cx="1116000" cy="338270"/>
+            <a:off x="161999" y="4366664"/>
+            <a:ext cx="1116000" cy="349064"/>
           </a:xfrm>
           <a:prstGeom prst="rect">
             <a:avLst/>
@@ -37998,8 +37014,8 @@
         </p:nvSpPr>
         <p:spPr>
           <a:xfrm>
-            <a:off x="1299599" y="4240800"/>
-            <a:ext cx="5522400" cy="338270"/>
+            <a:off x="1299599" y="4366664"/>
+            <a:ext cx="5522400" cy="349064"/>
           </a:xfrm>
           <a:prstGeom prst="rect">
             <a:avLst/>
@@ -38032,8 +37048,8 @@
         </p:nvSpPr>
         <p:spPr>
           <a:xfrm>
-            <a:off x="125999" y="4604270"/>
-            <a:ext cx="1152000" cy="223200"/>
+            <a:off x="125999" y="4740928"/>
+            <a:ext cx="1152000" cy="349064"/>
           </a:xfrm>
           <a:prstGeom prst="rect">
             <a:avLst/>
@@ -38075,8 +37091,8 @@
         </p:nvSpPr>
         <p:spPr>
           <a:xfrm>
-            <a:off x="161999" y="4604270"/>
-            <a:ext cx="1116000" cy="223200"/>
+            <a:off x="161999" y="4740928"/>
+            <a:ext cx="1116000" cy="349064"/>
           </a:xfrm>
           <a:prstGeom prst="rect">
             <a:avLst/>
@@ -38109,8 +37125,8 @@
         </p:nvSpPr>
         <p:spPr>
           <a:xfrm>
-            <a:off x="1299599" y="4604270"/>
-            <a:ext cx="5522400" cy="223200"/>
+            <a:off x="1299599" y="4740928"/>
+            <a:ext cx="5522400" cy="349064"/>
           </a:xfrm>
           <a:prstGeom prst="rect">
             <a:avLst/>
@@ -38178,33 +37194,9 @@
           </a:p>
         </p:txBody>
       </p:sp>
-      <p:pic>
-        <p:nvPicPr>
-          <p:cNvPr id="59" name="Picture 58" descr="1779266493878_ljoga.jpg"/>
-          <p:cNvPicPr>
-            <a:picLocks noChangeAspect="1"/>
-          </p:cNvPicPr>
-          <p:nvPr/>
-        </p:nvPicPr>
-        <p:blipFill>
-          <a:blip r:embed="rId2"/>
-          <a:stretch>
-            <a:fillRect/>
-          </a:stretch>
-        </p:blipFill>
-        <p:spPr>
-          <a:xfrm>
-            <a:off x="7467299" y="756000"/>
-            <a:ext cx="1476000" cy="1968000"/>
-          </a:xfrm>
-          <a:prstGeom prst="rect">
-            <a:avLst/>
-          </a:prstGeom>
-        </p:spPr>
-      </p:pic>
-      <p:sp>
-        <p:nvSpPr>
-          <p:cNvPr id="60" name="Rectangle 59"/>
+      <p:sp>
+        <p:nvSpPr>
+          <p:cNvPr id="59" name="Rectangle 58"/>
           <p:cNvSpPr/>
           <p:nvPr/>
         </p:nvSpPr>
@@ -38245,33 +37237,9 @@
           </a:p>
         </p:txBody>
       </p:sp>
-      <p:pic>
-        <p:nvPicPr>
-          <p:cNvPr id="61" name="Picture 60" descr="1779266493879_tfgpn.jpg"/>
-          <p:cNvPicPr>
-            <a:picLocks noChangeAspect="1"/>
-          </p:cNvPicPr>
-          <p:nvPr/>
-        </p:nvPicPr>
-        <p:blipFill>
-          <a:blip r:embed="rId3"/>
-          <a:stretch>
-            <a:fillRect/>
-          </a:stretch>
-        </p:blipFill>
-        <p:spPr>
-          <a:xfrm>
-            <a:off x="10053900" y="756000"/>
-            <a:ext cx="1476000" cy="1968000"/>
-          </a:xfrm>
-          <a:prstGeom prst="rect">
-            <a:avLst/>
-          </a:prstGeom>
-        </p:spPr>
-      </p:pic>
-      <p:sp>
-        <p:nvSpPr>
-          <p:cNvPr id="62" name="Rectangle 61"/>
+      <p:sp>
+        <p:nvSpPr>
+          <p:cNvPr id="60" name="Rectangle 59"/>
           <p:cNvSpPr/>
           <p:nvPr/>
         </p:nvSpPr>
@@ -38312,33 +37280,9 @@
           </a:p>
         </p:txBody>
       </p:sp>
-      <p:pic>
-        <p:nvPicPr>
-          <p:cNvPr id="63" name="Picture 62" descr="1779266493881_bvu5l.jpg"/>
-          <p:cNvPicPr>
-            <a:picLocks noChangeAspect="1"/>
-          </p:cNvPicPr>
-          <p:nvPr/>
-        </p:nvPicPr>
-        <p:blipFill>
-          <a:blip r:embed="rId4"/>
-          <a:stretch>
-            <a:fillRect/>
-          </a:stretch>
-        </p:blipFill>
-        <p:spPr>
-          <a:xfrm>
-            <a:off x="7467299" y="2760000"/>
-            <a:ext cx="1476000" cy="1968000"/>
-          </a:xfrm>
-          <a:prstGeom prst="rect">
-            <a:avLst/>
-          </a:prstGeom>
-        </p:spPr>
-      </p:pic>
-      <p:sp>
-        <p:nvSpPr>
-          <p:cNvPr id="64" name="Rectangle 63"/>
+      <p:sp>
+        <p:nvSpPr>
+          <p:cNvPr id="61" name="Rectangle 60"/>
           <p:cNvSpPr/>
           <p:nvPr/>
         </p:nvSpPr>
@@ -38379,33 +37323,9 @@
           </a:p>
         </p:txBody>
       </p:sp>
-      <p:pic>
-        <p:nvPicPr>
-          <p:cNvPr id="65" name="Picture 64" descr="1779266493882_p0ow7.jpg"/>
-          <p:cNvPicPr>
-            <a:picLocks noChangeAspect="1"/>
-          </p:cNvPicPr>
-          <p:nvPr/>
-        </p:nvPicPr>
-        <p:blipFill>
-          <a:blip r:embed="rId5"/>
-          <a:stretch>
-            <a:fillRect/>
-          </a:stretch>
-        </p:blipFill>
-        <p:spPr>
-          <a:xfrm>
-            <a:off x="9516600" y="2787525"/>
-            <a:ext cx="2550601" cy="1912950"/>
-          </a:xfrm>
-          <a:prstGeom prst="rect">
-            <a:avLst/>
-          </a:prstGeom>
-        </p:spPr>
-      </p:pic>
-      <p:sp>
-        <p:nvSpPr>
-          <p:cNvPr id="66" name="Rectangle 65"/>
+      <p:sp>
+        <p:nvSpPr>
+          <p:cNvPr id="62" name="Rectangle 61"/>
           <p:cNvSpPr/>
           <p:nvPr/>
         </p:nvSpPr>
@@ -38446,33 +37366,9 @@
           </a:p>
         </p:txBody>
       </p:sp>
-      <p:pic>
-        <p:nvPicPr>
-          <p:cNvPr id="67" name="Picture 66" descr="1779266493883_zlun4.jpg"/>
-          <p:cNvPicPr>
-            <a:picLocks noChangeAspect="1"/>
-          </p:cNvPicPr>
-          <p:nvPr/>
-        </p:nvPicPr>
-        <p:blipFill>
-          <a:blip r:embed="rId6"/>
-          <a:stretch>
-            <a:fillRect/>
-          </a:stretch>
-        </p:blipFill>
-        <p:spPr>
-          <a:xfrm>
-            <a:off x="7467299" y="4764000"/>
-            <a:ext cx="1476000" cy="1968000"/>
-          </a:xfrm>
-          <a:prstGeom prst="rect">
-            <a:avLst/>
-          </a:prstGeom>
-        </p:spPr>
-      </p:pic>
-      <p:sp>
-        <p:nvSpPr>
-          <p:cNvPr id="68" name="Rectangle 67"/>
+      <p:sp>
+        <p:nvSpPr>
+          <p:cNvPr id="63" name="Rectangle 62"/>
           <p:cNvSpPr/>
           <p:nvPr/>
         </p:nvSpPr>
@@ -38513,30 +37409,6 @@
           </a:p>
         </p:txBody>
       </p:sp>
-      <p:pic>
-        <p:nvPicPr>
-          <p:cNvPr id="69" name="Picture 68" descr="1779266493885_w7t6n.jpg"/>
-          <p:cNvPicPr>
-            <a:picLocks noChangeAspect="1"/>
-          </p:cNvPicPr>
-          <p:nvPr/>
-        </p:nvPicPr>
-        <p:blipFill>
-          <a:blip r:embed="rId7"/>
-          <a:stretch>
-            <a:fillRect/>
-          </a:stretch>
-        </p:blipFill>
-        <p:spPr>
-          <a:xfrm>
-            <a:off x="9516600" y="4791525"/>
-            <a:ext cx="2550601" cy="1912950"/>
-          </a:xfrm>
-          <a:prstGeom prst="rect">
-            <a:avLst/>
-          </a:prstGeom>
-        </p:spPr>
-      </p:pic>
     </p:spTree>
   </p:cSld>
   <p:clrMapOvr>
@@ -38991,7 +37863,7 @@
           <a:noFill/>
         </p:spPr>
         <p:txBody>
-          <a:bodyPr wrap="square">
+          <a:bodyPr wrap="none">
             <a:spAutoFit/>
           </a:bodyPr>
           <a:lstStyle/>
@@ -39017,7 +37889,7 @@
         <p:spPr>
           <a:xfrm>
             <a:off x="838799" y="1432800"/>
-            <a:ext cx="648000" cy="259200"/>
+            <a:ext cx="802800" cy="259200"/>
           </a:xfrm>
           <a:prstGeom prst="rect">
             <a:avLst/>
@@ -39060,15 +37932,15 @@
         <p:spPr>
           <a:xfrm>
             <a:off x="881999" y="1432800"/>
-            <a:ext cx="604800" cy="259200"/>
-          </a:xfrm>
-          <a:prstGeom prst="rect">
-            <a:avLst/>
-          </a:prstGeom>
-          <a:noFill/>
-        </p:spPr>
-        <p:txBody>
-          <a:bodyPr wrap="square">
+            <a:ext cx="759600" cy="259200"/>
+          </a:xfrm>
+          <a:prstGeom prst="rect">
+            <a:avLst/>
+          </a:prstGeom>
+          <a:noFill/>
+        </p:spPr>
+        <p:txBody>
+          <a:bodyPr wrap="none">
             <a:spAutoFit/>
           </a:bodyPr>
           <a:lstStyle/>
@@ -39093,8 +37965,8 @@
         </p:nvSpPr>
         <p:spPr>
           <a:xfrm>
-            <a:off x="1551599" y="1432800"/>
-            <a:ext cx="680400" cy="259200"/>
+            <a:off x="1706399" y="1432800"/>
+            <a:ext cx="903600" cy="259200"/>
           </a:xfrm>
           <a:prstGeom prst="rect">
             <a:avLst/>
@@ -39136,16 +38008,16 @@
         </p:nvSpPr>
         <p:spPr>
           <a:xfrm>
-            <a:off x="1594799" y="1432800"/>
-            <a:ext cx="637200" cy="259200"/>
-          </a:xfrm>
-          <a:prstGeom prst="rect">
-            <a:avLst/>
-          </a:prstGeom>
-          <a:noFill/>
-        </p:spPr>
-        <p:txBody>
-          <a:bodyPr wrap="square">
+            <a:off x="1749599" y="1432800"/>
+            <a:ext cx="860400" cy="259200"/>
+          </a:xfrm>
+          <a:prstGeom prst="rect">
+            <a:avLst/>
+          </a:prstGeom>
+          <a:noFill/>
+        </p:spPr>
+        <p:txBody>
+          <a:bodyPr wrap="none">
             <a:spAutoFit/>
           </a:bodyPr>
           <a:lstStyle/>
@@ -39170,8 +38042,8 @@
         </p:nvSpPr>
         <p:spPr>
           <a:xfrm>
-            <a:off x="2296799" y="1432800"/>
-            <a:ext cx="741600" cy="259200"/>
+            <a:off x="2674799" y="1432800"/>
+            <a:ext cx="1004400" cy="259200"/>
           </a:xfrm>
           <a:prstGeom prst="rect">
             <a:avLst/>
@@ -39213,16 +38085,16 @@
         </p:nvSpPr>
         <p:spPr>
           <a:xfrm>
-            <a:off x="2339999" y="1432800"/>
-            <a:ext cx="698400" cy="259200"/>
-          </a:xfrm>
-          <a:prstGeom prst="rect">
-            <a:avLst/>
-          </a:prstGeom>
-          <a:noFill/>
-        </p:spPr>
-        <p:txBody>
-          <a:bodyPr wrap="square">
+            <a:off x="2717999" y="1432800"/>
+            <a:ext cx="961200" cy="259200"/>
+          </a:xfrm>
+          <a:prstGeom prst="rect">
+            <a:avLst/>
+          </a:prstGeom>
+          <a:noFill/>
+        </p:spPr>
+        <p:txBody>
+          <a:bodyPr wrap="none">
             <a:spAutoFit/>
           </a:bodyPr>
           <a:lstStyle/>
@@ -39247,8 +38119,8 @@
         </p:nvSpPr>
         <p:spPr>
           <a:xfrm>
-            <a:off x="3103199" y="1432800"/>
-            <a:ext cx="648000" cy="259200"/>
+            <a:off x="3743999" y="1432800"/>
+            <a:ext cx="802800" cy="259200"/>
           </a:xfrm>
           <a:prstGeom prst="rect">
             <a:avLst/>
@@ -39290,16 +38162,16 @@
         </p:nvSpPr>
         <p:spPr>
           <a:xfrm>
-            <a:off x="3146399" y="1432800"/>
-            <a:ext cx="604800" cy="259200"/>
-          </a:xfrm>
-          <a:prstGeom prst="rect">
-            <a:avLst/>
-          </a:prstGeom>
-          <a:noFill/>
-        </p:spPr>
-        <p:txBody>
-          <a:bodyPr wrap="square">
+            <a:off x="3787199" y="1432800"/>
+            <a:ext cx="759600" cy="259200"/>
+          </a:xfrm>
+          <a:prstGeom prst="rect">
+            <a:avLst/>
+          </a:prstGeom>
+          <a:noFill/>
+        </p:spPr>
+        <p:txBody>
+          <a:bodyPr wrap="none">
             <a:spAutoFit/>
           </a:bodyPr>
           <a:lstStyle/>
@@ -40435,7 +39307,7 @@
         <p:spPr>
           <a:xfrm>
             <a:off x="125999" y="4240800"/>
-            <a:ext cx="1152000" cy="223200"/>
+            <a:ext cx="1152000" cy="349064"/>
           </a:xfrm>
           <a:prstGeom prst="rect">
             <a:avLst/>
@@ -40478,7 +39350,7 @@
         <p:spPr>
           <a:xfrm>
             <a:off x="161999" y="4240800"/>
-            <a:ext cx="1116000" cy="223200"/>
+            <a:ext cx="1116000" cy="349064"/>
           </a:xfrm>
           <a:prstGeom prst="rect">
             <a:avLst/>
@@ -40512,7 +39384,7 @@
         <p:spPr>
           <a:xfrm>
             <a:off x="1299599" y="4240800"/>
-            <a:ext cx="5522400" cy="223200"/>
+            <a:ext cx="5522400" cy="349064"/>
           </a:xfrm>
           <a:prstGeom prst="rect">
             <a:avLst/>
@@ -40545,8 +39417,8 @@
         </p:nvSpPr>
         <p:spPr>
           <a:xfrm>
-            <a:off x="125999" y="4489200"/>
-            <a:ext cx="1152000" cy="223200"/>
+            <a:off x="125999" y="4615064"/>
+            <a:ext cx="1152000" cy="349064"/>
           </a:xfrm>
           <a:prstGeom prst="rect">
             <a:avLst/>
@@ -40588,8 +39460,8 @@
         </p:nvSpPr>
         <p:spPr>
           <a:xfrm>
-            <a:off x="161999" y="4489200"/>
-            <a:ext cx="1116000" cy="223200"/>
+            <a:off x="161999" y="4615064"/>
+            <a:ext cx="1116000" cy="349064"/>
           </a:xfrm>
           <a:prstGeom prst="rect">
             <a:avLst/>
@@ -40622,8 +39494,8 @@
         </p:nvSpPr>
         <p:spPr>
           <a:xfrm>
-            <a:off x="1299599" y="4489200"/>
-            <a:ext cx="5522400" cy="223200"/>
+            <a:off x="1299599" y="4615064"/>
+            <a:ext cx="5522400" cy="349064"/>
           </a:xfrm>
           <a:prstGeom prst="rect">
             <a:avLst/>
@@ -40691,33 +39563,9 @@
           </a:p>
         </p:txBody>
       </p:sp>
-      <p:pic>
-        <p:nvPicPr>
-          <p:cNvPr id="59" name="Picture 58" descr="1779266493887_xqr8m.jpg"/>
-          <p:cNvPicPr>
-            <a:picLocks noChangeAspect="1"/>
-          </p:cNvPicPr>
-          <p:nvPr/>
-        </p:nvPicPr>
-        <p:blipFill>
-          <a:blip r:embed="rId2"/>
-          <a:stretch>
-            <a:fillRect/>
-          </a:stretch>
-        </p:blipFill>
-        <p:spPr>
-          <a:xfrm>
-            <a:off x="6929999" y="2468700"/>
-            <a:ext cx="2550601" cy="2550601"/>
-          </a:xfrm>
-          <a:prstGeom prst="rect">
-            <a:avLst/>
-          </a:prstGeom>
-        </p:spPr>
-      </p:pic>
-      <p:sp>
-        <p:nvSpPr>
-          <p:cNvPr id="60" name="Rectangle 59"/>
+      <p:sp>
+        <p:nvSpPr>
+          <p:cNvPr id="59" name="Rectangle 58"/>
           <p:cNvSpPr/>
           <p:nvPr/>
         </p:nvSpPr>
@@ -40758,30 +39606,6 @@
           </a:p>
         </p:txBody>
       </p:sp>
-      <p:pic>
-        <p:nvPicPr>
-          <p:cNvPr id="61" name="Picture 60" descr="1779266493888_93t1m.jpg"/>
-          <p:cNvPicPr>
-            <a:picLocks noChangeAspect="1"/>
-          </p:cNvPicPr>
-          <p:nvPr/>
-        </p:nvPicPr>
-        <p:blipFill>
-          <a:blip r:embed="rId3"/>
-          <a:stretch>
-            <a:fillRect/>
-          </a:stretch>
-        </p:blipFill>
-        <p:spPr>
-          <a:xfrm>
-            <a:off x="9517332" y="756000"/>
-            <a:ext cx="2549137" cy="5976001"/>
-          </a:xfrm>
-          <a:prstGeom prst="rect">
-            <a:avLst/>
-          </a:prstGeom>
-        </p:spPr>
-      </p:pic>
     </p:spTree>
   </p:cSld>
   <p:clrMapOvr>
@@ -41236,7 +40060,7 @@
           <a:noFill/>
         </p:spPr>
         <p:txBody>
-          <a:bodyPr wrap="square">
+          <a:bodyPr wrap="none">
             <a:spAutoFit/>
           </a:bodyPr>
           <a:lstStyle/>
@@ -41262,7 +40086,7 @@
         <p:spPr>
           <a:xfrm>
             <a:off x="838799" y="1432800"/>
-            <a:ext cx="648000" cy="259200"/>
+            <a:ext cx="802800" cy="259200"/>
           </a:xfrm>
           <a:prstGeom prst="rect">
             <a:avLst/>
@@ -41305,15 +40129,15 @@
         <p:spPr>
           <a:xfrm>
             <a:off x="881999" y="1432800"/>
-            <a:ext cx="604800" cy="259200"/>
-          </a:xfrm>
-          <a:prstGeom prst="rect">
-            <a:avLst/>
-          </a:prstGeom>
-          <a:noFill/>
-        </p:spPr>
-        <p:txBody>
-          <a:bodyPr wrap="square">
+            <a:ext cx="759600" cy="259200"/>
+          </a:xfrm>
+          <a:prstGeom prst="rect">
+            <a:avLst/>
+          </a:prstGeom>
+          <a:noFill/>
+        </p:spPr>
+        <p:txBody>
+          <a:bodyPr wrap="none">
             <a:spAutoFit/>
           </a:bodyPr>
           <a:lstStyle/>
@@ -41338,8 +40162,8 @@
         </p:nvSpPr>
         <p:spPr>
           <a:xfrm>
-            <a:off x="1551599" y="1432800"/>
-            <a:ext cx="680400" cy="259200"/>
+            <a:off x="1706399" y="1432800"/>
+            <a:ext cx="903600" cy="259200"/>
           </a:xfrm>
           <a:prstGeom prst="rect">
             <a:avLst/>
@@ -41381,16 +40205,16 @@
         </p:nvSpPr>
         <p:spPr>
           <a:xfrm>
-            <a:off x="1594799" y="1432800"/>
-            <a:ext cx="637200" cy="259200"/>
-          </a:xfrm>
-          <a:prstGeom prst="rect">
-            <a:avLst/>
-          </a:prstGeom>
-          <a:noFill/>
-        </p:spPr>
-        <p:txBody>
-          <a:bodyPr wrap="square">
+            <a:off x="1749599" y="1432800"/>
+            <a:ext cx="860400" cy="259200"/>
+          </a:xfrm>
+          <a:prstGeom prst="rect">
+            <a:avLst/>
+          </a:prstGeom>
+          <a:noFill/>
+        </p:spPr>
+        <p:txBody>
+          <a:bodyPr wrap="none">
             <a:spAutoFit/>
           </a:bodyPr>
           <a:lstStyle/>
@@ -41415,8 +40239,8 @@
         </p:nvSpPr>
         <p:spPr>
           <a:xfrm>
-            <a:off x="2296799" y="1432800"/>
-            <a:ext cx="741600" cy="259200"/>
+            <a:off x="2674799" y="1432800"/>
+            <a:ext cx="1004400" cy="259200"/>
           </a:xfrm>
           <a:prstGeom prst="rect">
             <a:avLst/>
@@ -41458,16 +40282,16 @@
         </p:nvSpPr>
         <p:spPr>
           <a:xfrm>
-            <a:off x="2339999" y="1432800"/>
-            <a:ext cx="698400" cy="259200"/>
-          </a:xfrm>
-          <a:prstGeom prst="rect">
-            <a:avLst/>
-          </a:prstGeom>
-          <a:noFill/>
-        </p:spPr>
-        <p:txBody>
-          <a:bodyPr wrap="square">
+            <a:off x="2717999" y="1432800"/>
+            <a:ext cx="961200" cy="259200"/>
+          </a:xfrm>
+          <a:prstGeom prst="rect">
+            <a:avLst/>
+          </a:prstGeom>
+          <a:noFill/>
+        </p:spPr>
+        <p:txBody>
+          <a:bodyPr wrap="none">
             <a:spAutoFit/>
           </a:bodyPr>
           <a:lstStyle/>
@@ -41492,8 +40316,8 @@
         </p:nvSpPr>
         <p:spPr>
           <a:xfrm>
-            <a:off x="3103199" y="1432800"/>
-            <a:ext cx="648000" cy="259200"/>
+            <a:off x="3743999" y="1432800"/>
+            <a:ext cx="802800" cy="259200"/>
           </a:xfrm>
           <a:prstGeom prst="rect">
             <a:avLst/>
@@ -41535,16 +40359,16 @@
         </p:nvSpPr>
         <p:spPr>
           <a:xfrm>
-            <a:off x="3146399" y="1432800"/>
-            <a:ext cx="604800" cy="259200"/>
-          </a:xfrm>
-          <a:prstGeom prst="rect">
-            <a:avLst/>
-          </a:prstGeom>
-          <a:noFill/>
-        </p:spPr>
-        <p:txBody>
-          <a:bodyPr wrap="square">
+            <a:off x="3787199" y="1432800"/>
+            <a:ext cx="759600" cy="259200"/>
+          </a:xfrm>
+          <a:prstGeom prst="rect">
+            <a:avLst/>
+          </a:prstGeom>
+          <a:noFill/>
+        </p:spPr>
+        <p:txBody>
+          <a:bodyPr wrap="none">
             <a:spAutoFit/>
           </a:bodyPr>
           <a:lstStyle/>
@@ -42680,7 +41504,7 @@
         <p:spPr>
           <a:xfrm>
             <a:off x="125999" y="4240800"/>
-            <a:ext cx="1152000" cy="338270"/>
+            <a:ext cx="1152000" cy="349064"/>
           </a:xfrm>
           <a:prstGeom prst="rect">
             <a:avLst/>
@@ -42723,7 +41547,7 @@
         <p:spPr>
           <a:xfrm>
             <a:off x="161999" y="4240800"/>
-            <a:ext cx="1116000" cy="338270"/>
+            <a:ext cx="1116000" cy="349064"/>
           </a:xfrm>
           <a:prstGeom prst="rect">
             <a:avLst/>
@@ -42757,7 +41581,7 @@
         <p:spPr>
           <a:xfrm>
             <a:off x="1299599" y="4240800"/>
-            <a:ext cx="5522400" cy="338270"/>
+            <a:ext cx="5522400" cy="349064"/>
           </a:xfrm>
           <a:prstGeom prst="rect">
             <a:avLst/>
@@ -42790,7 +41614,7 @@
         </p:nvSpPr>
         <p:spPr>
           <a:xfrm>
-            <a:off x="125999" y="4604270"/>
+            <a:off x="125999" y="4615064"/>
             <a:ext cx="1152000" cy="223200"/>
           </a:xfrm>
           <a:prstGeom prst="rect">
@@ -42833,7 +41657,7 @@
         </p:nvSpPr>
         <p:spPr>
           <a:xfrm>
-            <a:off x="161999" y="4604270"/>
+            <a:off x="161999" y="4615064"/>
             <a:ext cx="1116000" cy="223200"/>
           </a:xfrm>
           <a:prstGeom prst="rect">
@@ -42867,7 +41691,7 @@
         </p:nvSpPr>
         <p:spPr>
           <a:xfrm>
-            <a:off x="1299599" y="4604270"/>
+            <a:off x="1299599" y="4615064"/>
             <a:ext cx="5522400" cy="223200"/>
           </a:xfrm>
           <a:prstGeom prst="rect">
@@ -42936,33 +41760,9 @@
           </a:p>
         </p:txBody>
       </p:sp>
-      <p:pic>
-        <p:nvPicPr>
-          <p:cNvPr id="59" name="Picture 58" descr="1779266493890_fv3qk.jpg"/>
-          <p:cNvPicPr>
-            <a:picLocks noChangeAspect="1"/>
-          </p:cNvPicPr>
-          <p:nvPr/>
-        </p:nvPicPr>
-        <p:blipFill>
-          <a:blip r:embed="rId2"/>
-          <a:stretch>
-            <a:fillRect/>
-          </a:stretch>
-        </p:blipFill>
-        <p:spPr>
-          <a:xfrm>
-            <a:off x="6929999" y="1831050"/>
-            <a:ext cx="2550601" cy="3825901"/>
-          </a:xfrm>
-          <a:prstGeom prst="rect">
-            <a:avLst/>
-          </a:prstGeom>
-        </p:spPr>
-      </p:pic>
-      <p:sp>
-        <p:nvSpPr>
-          <p:cNvPr id="60" name="Rectangle 59"/>
+      <p:sp>
+        <p:nvSpPr>
+          <p:cNvPr id="59" name="Rectangle 58"/>
           <p:cNvSpPr/>
           <p:nvPr/>
         </p:nvSpPr>
@@ -43003,30 +41803,6 @@
           </a:p>
         </p:txBody>
       </p:sp>
-      <p:pic>
-        <p:nvPicPr>
-          <p:cNvPr id="61" name="Picture 60" descr="1779266493891_w3qrq.jpg"/>
-          <p:cNvPicPr>
-            <a:picLocks noChangeAspect="1"/>
-          </p:cNvPicPr>
-          <p:nvPr/>
-        </p:nvPicPr>
-        <p:blipFill>
-          <a:blip r:embed="rId3"/>
-          <a:stretch>
-            <a:fillRect/>
-          </a:stretch>
-        </p:blipFill>
-        <p:spPr>
-          <a:xfrm>
-            <a:off x="9516600" y="2468700"/>
-            <a:ext cx="2550601" cy="2550601"/>
-          </a:xfrm>
-          <a:prstGeom prst="rect">
-            <a:avLst/>
-          </a:prstGeom>
-        </p:spPr>
-      </p:pic>
     </p:spTree>
   </p:cSld>
   <p:clrMapOvr>
@@ -43481,7 +42257,7 @@
           <a:noFill/>
         </p:spPr>
         <p:txBody>
-          <a:bodyPr wrap="square">
+          <a:bodyPr wrap="none">
             <a:spAutoFit/>
           </a:bodyPr>
           <a:lstStyle/>
@@ -43507,7 +42283,7 @@
         <p:spPr>
           <a:xfrm>
             <a:off x="838799" y="1432800"/>
-            <a:ext cx="648000" cy="259200"/>
+            <a:ext cx="802800" cy="259200"/>
           </a:xfrm>
           <a:prstGeom prst="rect">
             <a:avLst/>
@@ -43550,15 +42326,15 @@
         <p:spPr>
           <a:xfrm>
             <a:off x="881999" y="1432800"/>
-            <a:ext cx="604800" cy="259200"/>
-          </a:xfrm>
-          <a:prstGeom prst="rect">
-            <a:avLst/>
-          </a:prstGeom>
-          <a:noFill/>
-        </p:spPr>
-        <p:txBody>
-          <a:bodyPr wrap="square">
+            <a:ext cx="759600" cy="259200"/>
+          </a:xfrm>
+          <a:prstGeom prst="rect">
+            <a:avLst/>
+          </a:prstGeom>
+          <a:noFill/>
+        </p:spPr>
+        <p:txBody>
+          <a:bodyPr wrap="none">
             <a:spAutoFit/>
           </a:bodyPr>
           <a:lstStyle/>
@@ -43583,8 +42359,8 @@
         </p:nvSpPr>
         <p:spPr>
           <a:xfrm>
-            <a:off x="1551599" y="1432800"/>
-            <a:ext cx="680400" cy="259200"/>
+            <a:off x="1706399" y="1432800"/>
+            <a:ext cx="903600" cy="259200"/>
           </a:xfrm>
           <a:prstGeom prst="rect">
             <a:avLst/>
@@ -43626,16 +42402,16 @@
         </p:nvSpPr>
         <p:spPr>
           <a:xfrm>
-            <a:off x="1594799" y="1432800"/>
-            <a:ext cx="637200" cy="259200"/>
-          </a:xfrm>
-          <a:prstGeom prst="rect">
-            <a:avLst/>
-          </a:prstGeom>
-          <a:noFill/>
-        </p:spPr>
-        <p:txBody>
-          <a:bodyPr wrap="square">
+            <a:off x="1749599" y="1432800"/>
+            <a:ext cx="860400" cy="259200"/>
+          </a:xfrm>
+          <a:prstGeom prst="rect">
+            <a:avLst/>
+          </a:prstGeom>
+          <a:noFill/>
+        </p:spPr>
+        <p:txBody>
+          <a:bodyPr wrap="none">
             <a:spAutoFit/>
           </a:bodyPr>
           <a:lstStyle/>
@@ -43660,8 +42436,8 @@
         </p:nvSpPr>
         <p:spPr>
           <a:xfrm>
-            <a:off x="2296799" y="1432800"/>
-            <a:ext cx="741600" cy="259200"/>
+            <a:off x="2674799" y="1432800"/>
+            <a:ext cx="1004400" cy="259200"/>
           </a:xfrm>
           <a:prstGeom prst="rect">
             <a:avLst/>
@@ -43703,16 +42479,16 @@
         </p:nvSpPr>
         <p:spPr>
           <a:xfrm>
-            <a:off x="2339999" y="1432800"/>
-            <a:ext cx="698400" cy="259200"/>
-          </a:xfrm>
-          <a:prstGeom prst="rect">
-            <a:avLst/>
-          </a:prstGeom>
-          <a:noFill/>
-        </p:spPr>
-        <p:txBody>
-          <a:bodyPr wrap="square">
+            <a:off x="2717999" y="1432800"/>
+            <a:ext cx="961200" cy="259200"/>
+          </a:xfrm>
+          <a:prstGeom prst="rect">
+            <a:avLst/>
+          </a:prstGeom>
+          <a:noFill/>
+        </p:spPr>
+        <p:txBody>
+          <a:bodyPr wrap="none">
             <a:spAutoFit/>
           </a:bodyPr>
           <a:lstStyle/>
@@ -43737,8 +42513,8 @@
         </p:nvSpPr>
         <p:spPr>
           <a:xfrm>
-            <a:off x="3103199" y="1432800"/>
-            <a:ext cx="648000" cy="259200"/>
+            <a:off x="3743999" y="1432800"/>
+            <a:ext cx="802800" cy="259200"/>
           </a:xfrm>
           <a:prstGeom prst="rect">
             <a:avLst/>
@@ -43780,16 +42556,16 @@
         </p:nvSpPr>
         <p:spPr>
           <a:xfrm>
-            <a:off x="3146399" y="1432800"/>
-            <a:ext cx="604800" cy="259200"/>
-          </a:xfrm>
-          <a:prstGeom prst="rect">
-            <a:avLst/>
-          </a:prstGeom>
-          <a:noFill/>
-        </p:spPr>
-        <p:txBody>
-          <a:bodyPr wrap="square">
+            <a:off x="3787199" y="1432800"/>
+            <a:ext cx="759600" cy="259200"/>
+          </a:xfrm>
+          <a:prstGeom prst="rect">
+            <a:avLst/>
+          </a:prstGeom>
+          <a:noFill/>
+        </p:spPr>
+        <p:txBody>
+          <a:bodyPr wrap="none">
             <a:spAutoFit/>
           </a:bodyPr>
           <a:lstStyle/>
@@ -44925,7 +43701,7 @@
         <p:spPr>
           <a:xfrm>
             <a:off x="125999" y="4240800"/>
-            <a:ext cx="1152000" cy="338270"/>
+            <a:ext cx="1152000" cy="349064"/>
           </a:xfrm>
           <a:prstGeom prst="rect">
             <a:avLst/>
@@ -44968,7 +43744,7 @@
         <p:spPr>
           <a:xfrm>
             <a:off x="161999" y="4240800"/>
-            <a:ext cx="1116000" cy="338270"/>
+            <a:ext cx="1116000" cy="349064"/>
           </a:xfrm>
           <a:prstGeom prst="rect">
             <a:avLst/>
@@ -45002,7 +43778,7 @@
         <p:spPr>
           <a:xfrm>
             <a:off x="1299599" y="4240800"/>
-            <a:ext cx="5522400" cy="338270"/>
+            <a:ext cx="5522400" cy="349064"/>
           </a:xfrm>
           <a:prstGeom prst="rect">
             <a:avLst/>
@@ -45035,8 +43811,8 @@
         </p:nvSpPr>
         <p:spPr>
           <a:xfrm>
-            <a:off x="125999" y="4604270"/>
-            <a:ext cx="1152000" cy="338270"/>
+            <a:off x="125999" y="4615064"/>
+            <a:ext cx="1152000" cy="349064"/>
           </a:xfrm>
           <a:prstGeom prst="rect">
             <a:avLst/>
@@ -45078,8 +43854,8 @@
         </p:nvSpPr>
         <p:spPr>
           <a:xfrm>
-            <a:off x="161999" y="4604270"/>
-            <a:ext cx="1116000" cy="338270"/>
+            <a:off x="161999" y="4615064"/>
+            <a:ext cx="1116000" cy="349064"/>
           </a:xfrm>
           <a:prstGeom prst="rect">
             <a:avLst/>
@@ -45112,8 +43888,8 @@
         </p:nvSpPr>
         <p:spPr>
           <a:xfrm>
-            <a:off x="1299599" y="4604270"/>
-            <a:ext cx="5522400" cy="338270"/>
+            <a:off x="1299599" y="4615064"/>
+            <a:ext cx="5522400" cy="349064"/>
           </a:xfrm>
           <a:prstGeom prst="rect">
             <a:avLst/>
@@ -45181,30 +43957,6 @@
           </a:p>
         </p:txBody>
       </p:sp>
-      <p:pic>
-        <p:nvPicPr>
-          <p:cNvPr id="59" name="Picture 58" descr="1779266493892_q7tf1.jpg"/>
-          <p:cNvPicPr>
-            <a:picLocks noChangeAspect="1"/>
-          </p:cNvPicPr>
-          <p:nvPr/>
-        </p:nvPicPr>
-        <p:blipFill>
-          <a:blip r:embed="rId2"/>
-          <a:stretch>
-            <a:fillRect/>
-          </a:stretch>
-        </p:blipFill>
-        <p:spPr>
-          <a:xfrm>
-            <a:off x="6929999" y="1928476"/>
-            <a:ext cx="5137202" cy="3631049"/>
-          </a:xfrm>
-          <a:prstGeom prst="rect">
-            <a:avLst/>
-          </a:prstGeom>
-        </p:spPr>
-      </p:pic>
     </p:spTree>
   </p:cSld>
   <p:clrMapOvr>
@@ -45659,7 +44411,7 @@
           <a:noFill/>
         </p:spPr>
         <p:txBody>
-          <a:bodyPr wrap="square">
+          <a:bodyPr wrap="none">
             <a:spAutoFit/>
           </a:bodyPr>
           <a:lstStyle/>
@@ -45685,7 +44437,7 @@
         <p:spPr>
           <a:xfrm>
             <a:off x="838799" y="1432800"/>
-            <a:ext cx="648000" cy="259200"/>
+            <a:ext cx="802800" cy="259200"/>
           </a:xfrm>
           <a:prstGeom prst="rect">
             <a:avLst/>
@@ -45728,15 +44480,15 @@
         <p:spPr>
           <a:xfrm>
             <a:off x="881999" y="1432800"/>
-            <a:ext cx="604800" cy="259200"/>
-          </a:xfrm>
-          <a:prstGeom prst="rect">
-            <a:avLst/>
-          </a:prstGeom>
-          <a:noFill/>
-        </p:spPr>
-        <p:txBody>
-          <a:bodyPr wrap="square">
+            <a:ext cx="759600" cy="259200"/>
+          </a:xfrm>
+          <a:prstGeom prst="rect">
+            <a:avLst/>
+          </a:prstGeom>
+          <a:noFill/>
+        </p:spPr>
+        <p:txBody>
+          <a:bodyPr wrap="none">
             <a:spAutoFit/>
           </a:bodyPr>
           <a:lstStyle/>
@@ -45761,8 +44513,8 @@
         </p:nvSpPr>
         <p:spPr>
           <a:xfrm>
-            <a:off x="1551599" y="1432800"/>
-            <a:ext cx="741600" cy="259200"/>
+            <a:off x="1706399" y="1432800"/>
+            <a:ext cx="1004400" cy="259200"/>
           </a:xfrm>
           <a:prstGeom prst="rect">
             <a:avLst/>
@@ -45804,16 +44556,16 @@
         </p:nvSpPr>
         <p:spPr>
           <a:xfrm>
-            <a:off x="1594799" y="1432800"/>
-            <a:ext cx="698400" cy="259200"/>
-          </a:xfrm>
-          <a:prstGeom prst="rect">
-            <a:avLst/>
-          </a:prstGeom>
-          <a:noFill/>
-        </p:spPr>
-        <p:txBody>
-          <a:bodyPr wrap="square">
+            <a:off x="1749599" y="1432800"/>
+            <a:ext cx="961200" cy="259200"/>
+          </a:xfrm>
+          <a:prstGeom prst="rect">
+            <a:avLst/>
+          </a:prstGeom>
+          <a:noFill/>
+        </p:spPr>
+        <p:txBody>
+          <a:bodyPr wrap="none">
             <a:spAutoFit/>
           </a:bodyPr>
           <a:lstStyle/>
@@ -45838,8 +44590,8 @@
         </p:nvSpPr>
         <p:spPr>
           <a:xfrm>
-            <a:off x="2357999" y="1432800"/>
-            <a:ext cx="741600" cy="259200"/>
+            <a:off x="2775599" y="1432800"/>
+            <a:ext cx="1004400" cy="259200"/>
           </a:xfrm>
           <a:prstGeom prst="rect">
             <a:avLst/>
@@ -45881,16 +44633,16 @@
         </p:nvSpPr>
         <p:spPr>
           <a:xfrm>
-            <a:off x="2401199" y="1432800"/>
-            <a:ext cx="698400" cy="259200"/>
-          </a:xfrm>
-          <a:prstGeom prst="rect">
-            <a:avLst/>
-          </a:prstGeom>
-          <a:noFill/>
-        </p:spPr>
-        <p:txBody>
-          <a:bodyPr wrap="square">
+            <a:off x="2818799" y="1432800"/>
+            <a:ext cx="961200" cy="259200"/>
+          </a:xfrm>
+          <a:prstGeom prst="rect">
+            <a:avLst/>
+          </a:prstGeom>
+          <a:noFill/>
+        </p:spPr>
+        <p:txBody>
+          <a:bodyPr wrap="none">
             <a:spAutoFit/>
           </a:bodyPr>
           <a:lstStyle/>
@@ -45915,8 +44667,8 @@
         </p:nvSpPr>
         <p:spPr>
           <a:xfrm>
-            <a:off x="3164399" y="1432800"/>
-            <a:ext cx="648000" cy="259200"/>
+            <a:off x="3844799" y="1432800"/>
+            <a:ext cx="802800" cy="259200"/>
           </a:xfrm>
           <a:prstGeom prst="rect">
             <a:avLst/>
@@ -45958,16 +44710,16 @@
         </p:nvSpPr>
         <p:spPr>
           <a:xfrm>
-            <a:off x="3207599" y="1432800"/>
-            <a:ext cx="604800" cy="259200"/>
-          </a:xfrm>
-          <a:prstGeom prst="rect">
-            <a:avLst/>
-          </a:prstGeom>
-          <a:noFill/>
-        </p:spPr>
-        <p:txBody>
-          <a:bodyPr wrap="square">
+            <a:off x="3887999" y="1432800"/>
+            <a:ext cx="759600" cy="259200"/>
+          </a:xfrm>
+          <a:prstGeom prst="rect">
+            <a:avLst/>
+          </a:prstGeom>
+          <a:noFill/>
+        </p:spPr>
+        <p:txBody>
+          <a:bodyPr wrap="none">
             <a:spAutoFit/>
           </a:bodyPr>
           <a:lstStyle/>
@@ -47103,7 +45855,7 @@
         <p:spPr>
           <a:xfrm>
             <a:off x="125999" y="4240800"/>
-            <a:ext cx="1152000" cy="338270"/>
+            <a:ext cx="1152000" cy="349064"/>
           </a:xfrm>
           <a:prstGeom prst="rect">
             <a:avLst/>
@@ -47146,7 +45898,7 @@
         <p:spPr>
           <a:xfrm>
             <a:off x="161999" y="4240800"/>
-            <a:ext cx="1116000" cy="338270"/>
+            <a:ext cx="1116000" cy="349064"/>
           </a:xfrm>
           <a:prstGeom prst="rect">
             <a:avLst/>
@@ -47180,7 +45932,7 @@
         <p:spPr>
           <a:xfrm>
             <a:off x="1299599" y="4240800"/>
-            <a:ext cx="5522400" cy="338270"/>
+            <a:ext cx="5522400" cy="349064"/>
           </a:xfrm>
           <a:prstGeom prst="rect">
             <a:avLst/>
@@ -47213,7 +45965,7 @@
         </p:nvSpPr>
         <p:spPr>
           <a:xfrm>
-            <a:off x="125999" y="4604270"/>
+            <a:off x="125999" y="4615064"/>
             <a:ext cx="1152000" cy="223200"/>
           </a:xfrm>
           <a:prstGeom prst="rect">
@@ -47256,7 +46008,7 @@
         </p:nvSpPr>
         <p:spPr>
           <a:xfrm>
-            <a:off x="161999" y="4604270"/>
+            <a:off x="161999" y="4615064"/>
             <a:ext cx="1116000" cy="223200"/>
           </a:xfrm>
           <a:prstGeom prst="rect">
@@ -47290,7 +46042,7 @@
         </p:nvSpPr>
         <p:spPr>
           <a:xfrm>
-            <a:off x="1299599" y="4604270"/>
+            <a:off x="1299599" y="4615064"/>
             <a:ext cx="5522400" cy="223200"/>
           </a:xfrm>
           <a:prstGeom prst="rect">
@@ -47359,33 +46111,9 @@
           </a:p>
         </p:txBody>
       </p:sp>
-      <p:pic>
-        <p:nvPicPr>
-          <p:cNvPr id="59" name="Picture 58" descr="1779266493897_w2rqp.jpg"/>
-          <p:cNvPicPr>
-            <a:picLocks noChangeAspect="1"/>
-          </p:cNvPicPr>
-          <p:nvPr/>
-        </p:nvPicPr>
-        <p:blipFill>
-          <a:blip r:embed="rId2"/>
-          <a:stretch>
-            <a:fillRect/>
-          </a:stretch>
-        </p:blipFill>
-        <p:spPr>
-          <a:xfrm>
-            <a:off x="7531259" y="756000"/>
-            <a:ext cx="1348080" cy="1968000"/>
-          </a:xfrm>
-          <a:prstGeom prst="rect">
-            <a:avLst/>
-          </a:prstGeom>
-        </p:spPr>
-      </p:pic>
-      <p:sp>
-        <p:nvSpPr>
-          <p:cNvPr id="60" name="Rectangle 59"/>
+      <p:sp>
+        <p:nvSpPr>
+          <p:cNvPr id="59" name="Rectangle 58"/>
           <p:cNvSpPr/>
           <p:nvPr/>
         </p:nvSpPr>
@@ -47426,33 +46154,9 @@
           </a:p>
         </p:txBody>
       </p:sp>
-      <p:pic>
-        <p:nvPicPr>
-          <p:cNvPr id="61" name="Picture 60" descr="1779266493900_wblsm.jpg"/>
-          <p:cNvPicPr>
-            <a:picLocks noChangeAspect="1"/>
-          </p:cNvPicPr>
-          <p:nvPr/>
-        </p:nvPicPr>
-        <p:blipFill>
-          <a:blip r:embed="rId3"/>
-          <a:stretch>
-            <a:fillRect/>
-          </a:stretch>
-        </p:blipFill>
-        <p:spPr>
-          <a:xfrm>
-            <a:off x="10053900" y="756000"/>
-            <a:ext cx="1476000" cy="1968000"/>
-          </a:xfrm>
-          <a:prstGeom prst="rect">
-            <a:avLst/>
-          </a:prstGeom>
-        </p:spPr>
-      </p:pic>
-      <p:sp>
-        <p:nvSpPr>
-          <p:cNvPr id="62" name="Rectangle 61"/>
+      <p:sp>
+        <p:nvSpPr>
+          <p:cNvPr id="60" name="Rectangle 59"/>
           <p:cNvSpPr/>
           <p:nvPr/>
         </p:nvSpPr>
@@ -47493,33 +46197,9 @@
           </a:p>
         </p:txBody>
       </p:sp>
-      <p:pic>
-        <p:nvPicPr>
-          <p:cNvPr id="63" name="Picture 62" descr="1779266493901_7gwfi.jpg"/>
-          <p:cNvPicPr>
-            <a:picLocks noChangeAspect="1"/>
-          </p:cNvPicPr>
-          <p:nvPr/>
-        </p:nvPicPr>
-        <p:blipFill>
-          <a:blip r:embed="rId4"/>
-          <a:stretch>
-            <a:fillRect/>
-          </a:stretch>
-        </p:blipFill>
-        <p:spPr>
-          <a:xfrm>
-            <a:off x="7467299" y="2760000"/>
-            <a:ext cx="1476000" cy="1968000"/>
-          </a:xfrm>
-          <a:prstGeom prst="rect">
-            <a:avLst/>
-          </a:prstGeom>
-        </p:spPr>
-      </p:pic>
-      <p:sp>
-        <p:nvSpPr>
-          <p:cNvPr id="64" name="Rectangle 63"/>
+      <p:sp>
+        <p:nvSpPr>
+          <p:cNvPr id="61" name="Rectangle 60"/>
           <p:cNvSpPr/>
           <p:nvPr/>
         </p:nvSpPr>
@@ -47560,33 +46240,9 @@
           </a:p>
         </p:txBody>
       </p:sp>
-      <p:pic>
-        <p:nvPicPr>
-          <p:cNvPr id="65" name="Picture 64" descr="1779266493902_nfjvx.jpg"/>
-          <p:cNvPicPr>
-            <a:picLocks noChangeAspect="1"/>
-          </p:cNvPicPr>
-          <p:nvPr/>
-        </p:nvPicPr>
-        <p:blipFill>
-          <a:blip r:embed="rId5"/>
-          <a:stretch>
-            <a:fillRect/>
-          </a:stretch>
-        </p:blipFill>
-        <p:spPr>
-          <a:xfrm>
-            <a:off x="10053900" y="2760000"/>
-            <a:ext cx="1476000" cy="1968000"/>
-          </a:xfrm>
-          <a:prstGeom prst="rect">
-            <a:avLst/>
-          </a:prstGeom>
-        </p:spPr>
-      </p:pic>
-      <p:sp>
-        <p:nvSpPr>
-          <p:cNvPr id="66" name="Rectangle 65"/>
+      <p:sp>
+        <p:nvSpPr>
+          <p:cNvPr id="62" name="Rectangle 61"/>
           <p:cNvSpPr/>
           <p:nvPr/>
         </p:nvSpPr>
@@ -47627,33 +46283,9 @@
           </a:p>
         </p:txBody>
       </p:sp>
-      <p:pic>
-        <p:nvPicPr>
-          <p:cNvPr id="67" name="Picture 66" descr="1779266493903_866yd.jpg"/>
-          <p:cNvPicPr>
-            <a:picLocks noChangeAspect="1"/>
-          </p:cNvPicPr>
-          <p:nvPr/>
-        </p:nvPicPr>
-        <p:blipFill>
-          <a:blip r:embed="rId6"/>
-          <a:stretch>
-            <a:fillRect/>
-          </a:stretch>
-        </p:blipFill>
-        <p:spPr>
-          <a:xfrm>
-            <a:off x="6929999" y="4791525"/>
-            <a:ext cx="2550601" cy="1912950"/>
-          </a:xfrm>
-          <a:prstGeom prst="rect">
-            <a:avLst/>
-          </a:prstGeom>
-        </p:spPr>
-      </p:pic>
-      <p:sp>
-        <p:nvSpPr>
-          <p:cNvPr id="68" name="Rectangle 67"/>
+      <p:sp>
+        <p:nvSpPr>
+          <p:cNvPr id="63" name="Rectangle 62"/>
           <p:cNvSpPr/>
           <p:nvPr/>
         </p:nvSpPr>
@@ -47694,30 +46326,6 @@
           </a:p>
         </p:txBody>
       </p:sp>
-      <p:pic>
-        <p:nvPicPr>
-          <p:cNvPr id="69" name="Picture 68" descr="1779266493905_w2tzj.jpg"/>
-          <p:cNvPicPr>
-            <a:picLocks noChangeAspect="1"/>
-          </p:cNvPicPr>
-          <p:nvPr/>
-        </p:nvPicPr>
-        <p:blipFill>
-          <a:blip r:embed="rId7"/>
-          <a:stretch>
-            <a:fillRect/>
-          </a:stretch>
-        </p:blipFill>
-        <p:spPr>
-          <a:xfrm>
-            <a:off x="9516600" y="4791525"/>
-            <a:ext cx="2550601" cy="1912950"/>
-          </a:xfrm>
-          <a:prstGeom prst="rect">
-            <a:avLst/>
-          </a:prstGeom>
-        </p:spPr>
-      </p:pic>
     </p:spTree>
   </p:cSld>
   <p:clrMapOvr>

--- a/物件一覧.pptx
+++ b/物件一覧.pptx
@@ -5409,9 +5409,33 @@
           </a:p>
         </p:txBody>
       </p:sp>
-      <p:sp>
-        <p:nvSpPr>
-          <p:cNvPr id="59" name="Rectangle 58"/>
+      <p:pic>
+        <p:nvPicPr>
+          <p:cNvPr id="59" name="Picture 58" descr="1779266493906_uklnd.jpg"/>
+          <p:cNvPicPr>
+            <a:picLocks noChangeAspect="1"/>
+          </p:cNvPicPr>
+          <p:nvPr/>
+        </p:nvPicPr>
+        <p:blipFill>
+          <a:blip r:embed="rId2"/>
+          <a:stretch>
+            <a:fillRect/>
+          </a:stretch>
+        </p:blipFill>
+        <p:spPr>
+          <a:xfrm>
+            <a:off x="6929999" y="2043600"/>
+            <a:ext cx="2550601" cy="3400801"/>
+          </a:xfrm>
+          <a:prstGeom prst="rect">
+            <a:avLst/>
+          </a:prstGeom>
+        </p:spPr>
+      </p:pic>
+      <p:sp>
+        <p:nvSpPr>
+          <p:cNvPr id="60" name="Rectangle 59"/>
           <p:cNvSpPr/>
           <p:nvPr/>
         </p:nvSpPr>
@@ -5452,6 +5476,30 @@
           </a:p>
         </p:txBody>
       </p:sp>
+      <p:pic>
+        <p:nvPicPr>
+          <p:cNvPr id="61" name="Picture 60" descr="1779266493908_zwzbj.jpg"/>
+          <p:cNvPicPr>
+            <a:picLocks noChangeAspect="1"/>
+          </p:cNvPicPr>
+          <p:nvPr/>
+        </p:nvPicPr>
+        <p:blipFill>
+          <a:blip r:embed="rId3"/>
+          <a:stretch>
+            <a:fillRect/>
+          </a:stretch>
+        </p:blipFill>
+        <p:spPr>
+          <a:xfrm>
+            <a:off x="9516600" y="3259386"/>
+            <a:ext cx="2550601" cy="969228"/>
+          </a:xfrm>
+          <a:prstGeom prst="rect">
+            <a:avLst/>
+          </a:prstGeom>
+        </p:spPr>
+      </p:pic>
     </p:spTree>
   </p:cSld>
   <p:clrMapOvr>
@@ -7606,9 +7654,33 @@
           </a:p>
         </p:txBody>
       </p:sp>
-      <p:sp>
-        <p:nvSpPr>
-          <p:cNvPr id="59" name="Rectangle 58"/>
+      <p:pic>
+        <p:nvPicPr>
+          <p:cNvPr id="59" name="Picture 58" descr="1779266493910_33qi5.jpg"/>
+          <p:cNvPicPr>
+            <a:picLocks noChangeAspect="1"/>
+          </p:cNvPicPr>
+          <p:nvPr/>
+        </p:nvPicPr>
+        <p:blipFill>
+          <a:blip r:embed="rId2"/>
+          <a:stretch>
+            <a:fillRect/>
+          </a:stretch>
+        </p:blipFill>
+        <p:spPr>
+          <a:xfrm>
+            <a:off x="6929999" y="2468700"/>
+            <a:ext cx="2550601" cy="2550601"/>
+          </a:xfrm>
+          <a:prstGeom prst="rect">
+            <a:avLst/>
+          </a:prstGeom>
+        </p:spPr>
+      </p:pic>
+      <p:sp>
+        <p:nvSpPr>
+          <p:cNvPr id="60" name="Rectangle 59"/>
           <p:cNvSpPr/>
           <p:nvPr/>
         </p:nvSpPr>
@@ -7649,6 +7721,30 @@
           </a:p>
         </p:txBody>
       </p:sp>
+      <p:pic>
+        <p:nvPicPr>
+          <p:cNvPr id="61" name="Picture 60" descr="1779266493911_yhc4b.jpg"/>
+          <p:cNvPicPr>
+            <a:picLocks noChangeAspect="1"/>
+          </p:cNvPicPr>
+          <p:nvPr/>
+        </p:nvPicPr>
+        <p:blipFill>
+          <a:blip r:embed="rId3"/>
+          <a:stretch>
+            <a:fillRect/>
+          </a:stretch>
+        </p:blipFill>
+        <p:spPr>
+          <a:xfrm>
+            <a:off x="9576863" y="756000"/>
+            <a:ext cx="2430075" cy="5976001"/>
+          </a:xfrm>
+          <a:prstGeom prst="rect">
+            <a:avLst/>
+          </a:prstGeom>
+        </p:spPr>
+      </p:pic>
     </p:spTree>
   </p:cSld>
   <p:clrMapOvr>
@@ -9803,9 +9899,33 @@
           </a:p>
         </p:txBody>
       </p:sp>
-      <p:sp>
-        <p:nvSpPr>
-          <p:cNvPr id="59" name="Rectangle 58"/>
+      <p:pic>
+        <p:nvPicPr>
+          <p:cNvPr id="59" name="Picture 58" descr="1779266493913_rax0d.jpg"/>
+          <p:cNvPicPr>
+            <a:picLocks noChangeAspect="1"/>
+          </p:cNvPicPr>
+          <p:nvPr/>
+        </p:nvPicPr>
+        <p:blipFill>
+          <a:blip r:embed="rId2"/>
+          <a:stretch>
+            <a:fillRect/>
+          </a:stretch>
+        </p:blipFill>
+        <p:spPr>
+          <a:xfrm>
+            <a:off x="7221299" y="756000"/>
+            <a:ext cx="1968000" cy="1968000"/>
+          </a:xfrm>
+          <a:prstGeom prst="rect">
+            <a:avLst/>
+          </a:prstGeom>
+        </p:spPr>
+      </p:pic>
+      <p:sp>
+        <p:nvSpPr>
+          <p:cNvPr id="60" name="Rectangle 59"/>
           <p:cNvSpPr/>
           <p:nvPr/>
         </p:nvSpPr>
@@ -9846,9 +9966,33 @@
           </a:p>
         </p:txBody>
       </p:sp>
-      <p:sp>
-        <p:nvSpPr>
-          <p:cNvPr id="60" name="Rectangle 59"/>
+      <p:pic>
+        <p:nvPicPr>
+          <p:cNvPr id="61" name="Picture 60" descr="1779266493914_itmy2.jpg"/>
+          <p:cNvPicPr>
+            <a:picLocks noChangeAspect="1"/>
+          </p:cNvPicPr>
+          <p:nvPr/>
+        </p:nvPicPr>
+        <p:blipFill>
+          <a:blip r:embed="rId3"/>
+          <a:stretch>
+            <a:fillRect/>
+          </a:stretch>
+        </p:blipFill>
+        <p:spPr>
+          <a:xfrm>
+            <a:off x="10299900" y="756000"/>
+            <a:ext cx="984000" cy="1968000"/>
+          </a:xfrm>
+          <a:prstGeom prst="rect">
+            <a:avLst/>
+          </a:prstGeom>
+        </p:spPr>
+      </p:pic>
+      <p:sp>
+        <p:nvSpPr>
+          <p:cNvPr id="62" name="Rectangle 61"/>
           <p:cNvSpPr/>
           <p:nvPr/>
         </p:nvSpPr>
@@ -9889,9 +10033,33 @@
           </a:p>
         </p:txBody>
       </p:sp>
-      <p:sp>
-        <p:nvSpPr>
-          <p:cNvPr id="61" name="Rectangle 60"/>
+      <p:pic>
+        <p:nvPicPr>
+          <p:cNvPr id="63" name="Picture 62" descr="1779266493915_g11l4.jpg"/>
+          <p:cNvPicPr>
+            <a:picLocks noChangeAspect="1"/>
+          </p:cNvPicPr>
+          <p:nvPr/>
+        </p:nvPicPr>
+        <p:blipFill>
+          <a:blip r:embed="rId4"/>
+          <a:stretch>
+            <a:fillRect/>
+          </a:stretch>
+        </p:blipFill>
+        <p:spPr>
+          <a:xfrm>
+            <a:off x="7356144" y="2760000"/>
+            <a:ext cx="1698311" cy="1968000"/>
+          </a:xfrm>
+          <a:prstGeom prst="rect">
+            <a:avLst/>
+          </a:prstGeom>
+        </p:spPr>
+      </p:pic>
+      <p:sp>
+        <p:nvSpPr>
+          <p:cNvPr id="64" name="Rectangle 63"/>
           <p:cNvSpPr/>
           <p:nvPr/>
         </p:nvSpPr>
@@ -9932,9 +10100,33 @@
           </a:p>
         </p:txBody>
       </p:sp>
-      <p:sp>
-        <p:nvSpPr>
-          <p:cNvPr id="62" name="Rectangle 61"/>
+      <p:pic>
+        <p:nvPicPr>
+          <p:cNvPr id="65" name="Picture 64" descr="1779266493916_a1snz.jpg"/>
+          <p:cNvPicPr>
+            <a:picLocks noChangeAspect="1"/>
+          </p:cNvPicPr>
+          <p:nvPr/>
+        </p:nvPicPr>
+        <p:blipFill>
+          <a:blip r:embed="rId5"/>
+          <a:stretch>
+            <a:fillRect/>
+          </a:stretch>
+        </p:blipFill>
+        <p:spPr>
+          <a:xfrm>
+            <a:off x="9937050" y="2760000"/>
+            <a:ext cx="1709700" cy="1968000"/>
+          </a:xfrm>
+          <a:prstGeom prst="rect">
+            <a:avLst/>
+          </a:prstGeom>
+        </p:spPr>
+      </p:pic>
+      <p:sp>
+        <p:nvSpPr>
+          <p:cNvPr id="66" name="Rectangle 65"/>
           <p:cNvSpPr/>
           <p:nvPr/>
         </p:nvSpPr>
@@ -9975,9 +10167,33 @@
           </a:p>
         </p:txBody>
       </p:sp>
-      <p:sp>
-        <p:nvSpPr>
-          <p:cNvPr id="63" name="Rectangle 62"/>
+      <p:pic>
+        <p:nvPicPr>
+          <p:cNvPr id="67" name="Picture 66" descr="1779266493918_oydm3.jpg"/>
+          <p:cNvPicPr>
+            <a:picLocks noChangeAspect="1"/>
+          </p:cNvPicPr>
+          <p:nvPr/>
+        </p:nvPicPr>
+        <p:blipFill>
+          <a:blip r:embed="rId6"/>
+          <a:stretch>
+            <a:fillRect/>
+          </a:stretch>
+        </p:blipFill>
+        <p:spPr>
+          <a:xfrm>
+            <a:off x="7713299" y="4764000"/>
+            <a:ext cx="984000" cy="1968000"/>
+          </a:xfrm>
+          <a:prstGeom prst="rect">
+            <a:avLst/>
+          </a:prstGeom>
+        </p:spPr>
+      </p:pic>
+      <p:sp>
+        <p:nvSpPr>
+          <p:cNvPr id="68" name="Rectangle 67"/>
           <p:cNvSpPr/>
           <p:nvPr/>
         </p:nvSpPr>
@@ -10018,9 +10234,33 @@
           </a:p>
         </p:txBody>
       </p:sp>
-      <p:sp>
-        <p:nvSpPr>
-          <p:cNvPr id="64" name="Rectangle 63"/>
+      <p:pic>
+        <p:nvPicPr>
+          <p:cNvPr id="69" name="Picture 68" descr="1779266493920_va8h2.jpg"/>
+          <p:cNvPicPr>
+            <a:picLocks noChangeAspect="1"/>
+          </p:cNvPicPr>
+          <p:nvPr/>
+        </p:nvPicPr>
+        <p:blipFill>
+          <a:blip r:embed="rId7"/>
+          <a:stretch>
+            <a:fillRect/>
+          </a:stretch>
+        </p:blipFill>
+        <p:spPr>
+          <a:xfrm>
+            <a:off x="9917370" y="4764000"/>
+            <a:ext cx="1749060" cy="1968000"/>
+          </a:xfrm>
+          <a:prstGeom prst="rect">
+            <a:avLst/>
+          </a:prstGeom>
+        </p:spPr>
+      </p:pic>
+      <p:sp>
+        <p:nvSpPr>
+          <p:cNvPr id="70" name="Rectangle 69"/>
           <p:cNvSpPr/>
           <p:nvPr/>
         </p:nvSpPr>
@@ -10065,7 +10305,7 @@
       </p:sp>
       <p:sp>
         <p:nvSpPr>
-          <p:cNvPr id="65" name="TextBox 64"/>
+          <p:cNvPr id="71" name="TextBox 70"/>
           <p:cNvSpPr txBox="1"/>
           <p:nvPr/>
         </p:nvSpPr>
@@ -12251,9 +12491,33 @@
           </a:p>
         </p:txBody>
       </p:sp>
-      <p:sp>
-        <p:nvSpPr>
-          <p:cNvPr id="59" name="Rectangle 58"/>
+      <p:pic>
+        <p:nvPicPr>
+          <p:cNvPr id="59" name="Picture 58" descr="1779266493924_pg1l0.jpg"/>
+          <p:cNvPicPr>
+            <a:picLocks noChangeAspect="1"/>
+          </p:cNvPicPr>
+          <p:nvPr/>
+        </p:nvPicPr>
+        <p:blipFill>
+          <a:blip r:embed="rId2"/>
+          <a:stretch>
+            <a:fillRect/>
+          </a:stretch>
+        </p:blipFill>
+        <p:spPr>
+          <a:xfrm>
+            <a:off x="6929999" y="965699"/>
+            <a:ext cx="2550601" cy="2550601"/>
+          </a:xfrm>
+          <a:prstGeom prst="rect">
+            <a:avLst/>
+          </a:prstGeom>
+        </p:spPr>
+      </p:pic>
+      <p:sp>
+        <p:nvSpPr>
+          <p:cNvPr id="60" name="Rectangle 59"/>
           <p:cNvSpPr/>
           <p:nvPr/>
         </p:nvSpPr>
@@ -12294,9 +12558,33 @@
           </a:p>
         </p:txBody>
       </p:sp>
-      <p:sp>
-        <p:nvSpPr>
-          <p:cNvPr id="60" name="Rectangle 59"/>
+      <p:pic>
+        <p:nvPicPr>
+          <p:cNvPr id="61" name="Picture 60" descr="1779266493926_o9heg.jpg"/>
+          <p:cNvPicPr>
+            <a:picLocks noChangeAspect="1"/>
+          </p:cNvPicPr>
+          <p:nvPr/>
+        </p:nvPicPr>
+        <p:blipFill>
+          <a:blip r:embed="rId3"/>
+          <a:stretch>
+            <a:fillRect/>
+          </a:stretch>
+        </p:blipFill>
+        <p:spPr>
+          <a:xfrm>
+            <a:off x="9516600" y="965699"/>
+            <a:ext cx="2550601" cy="2550601"/>
+          </a:xfrm>
+          <a:prstGeom prst="rect">
+            <a:avLst/>
+          </a:prstGeom>
+        </p:spPr>
+      </p:pic>
+      <p:sp>
+        <p:nvSpPr>
+          <p:cNvPr id="62" name="Rectangle 61"/>
           <p:cNvSpPr/>
           <p:nvPr/>
         </p:nvSpPr>
@@ -12337,9 +12625,33 @@
           </a:p>
         </p:txBody>
       </p:sp>
-      <p:sp>
-        <p:nvSpPr>
-          <p:cNvPr id="61" name="Rectangle 60"/>
+      <p:pic>
+        <p:nvPicPr>
+          <p:cNvPr id="63" name="Picture 62" descr="1779266493927_ue5qp.jpg"/>
+          <p:cNvPicPr>
+            <a:picLocks noChangeAspect="1"/>
+          </p:cNvPicPr>
+          <p:nvPr/>
+        </p:nvPicPr>
+        <p:blipFill>
+          <a:blip r:embed="rId4"/>
+          <a:stretch>
+            <a:fillRect/>
+          </a:stretch>
+        </p:blipFill>
+        <p:spPr>
+          <a:xfrm>
+            <a:off x="6929999" y="3971699"/>
+            <a:ext cx="2550601" cy="2550601"/>
+          </a:xfrm>
+          <a:prstGeom prst="rect">
+            <a:avLst/>
+          </a:prstGeom>
+        </p:spPr>
+      </p:pic>
+      <p:sp>
+        <p:nvSpPr>
+          <p:cNvPr id="64" name="Rectangle 63"/>
           <p:cNvSpPr/>
           <p:nvPr/>
         </p:nvSpPr>
@@ -12380,6 +12692,30 @@
           </a:p>
         </p:txBody>
       </p:sp>
+      <p:pic>
+        <p:nvPicPr>
+          <p:cNvPr id="65" name="Picture 64" descr="1779266493928_jr5aw.jpg"/>
+          <p:cNvPicPr>
+            <a:picLocks noChangeAspect="1"/>
+          </p:cNvPicPr>
+          <p:nvPr/>
+        </p:nvPicPr>
+        <p:blipFill>
+          <a:blip r:embed="rId5"/>
+          <a:stretch>
+            <a:fillRect/>
+          </a:stretch>
+        </p:blipFill>
+        <p:spPr>
+          <a:xfrm>
+            <a:off x="9516600" y="3971699"/>
+            <a:ext cx="2550601" cy="2550601"/>
+          </a:xfrm>
+          <a:prstGeom prst="rect">
+            <a:avLst/>
+          </a:prstGeom>
+        </p:spPr>
+      </p:pic>
     </p:spTree>
   </p:cSld>
   <p:clrMapOvr>
@@ -14534,9 +14870,33 @@
           </a:p>
         </p:txBody>
       </p:sp>
-      <p:sp>
-        <p:nvSpPr>
-          <p:cNvPr id="59" name="Rectangle 58"/>
+      <p:pic>
+        <p:nvPicPr>
+          <p:cNvPr id="59" name="Picture 58" descr="1779266493930_yt6kq.jpg"/>
+          <p:cNvPicPr>
+            <a:picLocks noChangeAspect="1"/>
+          </p:cNvPicPr>
+          <p:nvPr/>
+        </p:nvPicPr>
+        <p:blipFill>
+          <a:blip r:embed="rId2"/>
+          <a:stretch>
+            <a:fillRect/>
+          </a:stretch>
+        </p:blipFill>
+        <p:spPr>
+          <a:xfrm>
+            <a:off x="6929999" y="2468700"/>
+            <a:ext cx="2550601" cy="2550601"/>
+          </a:xfrm>
+          <a:prstGeom prst="rect">
+            <a:avLst/>
+          </a:prstGeom>
+        </p:spPr>
+      </p:pic>
+      <p:sp>
+        <p:nvSpPr>
+          <p:cNvPr id="60" name="Rectangle 59"/>
           <p:cNvSpPr/>
           <p:nvPr/>
         </p:nvSpPr>
@@ -14577,6 +14937,30 @@
           </a:p>
         </p:txBody>
       </p:sp>
+      <p:pic>
+        <p:nvPicPr>
+          <p:cNvPr id="61" name="Picture 60" descr="1779266493931_dinsd.jpg"/>
+          <p:cNvPicPr>
+            <a:picLocks noChangeAspect="1"/>
+          </p:cNvPicPr>
+          <p:nvPr/>
+        </p:nvPicPr>
+        <p:blipFill>
+          <a:blip r:embed="rId3"/>
+          <a:stretch>
+            <a:fillRect/>
+          </a:stretch>
+        </p:blipFill>
+        <p:spPr>
+          <a:xfrm>
+            <a:off x="9516600" y="2468700"/>
+            <a:ext cx="2550601" cy="2550601"/>
+          </a:xfrm>
+          <a:prstGeom prst="rect">
+            <a:avLst/>
+          </a:prstGeom>
+        </p:spPr>
+      </p:pic>
     </p:spTree>
   </p:cSld>
   <p:clrMapOvr>
@@ -16731,9 +17115,33 @@
           </a:p>
         </p:txBody>
       </p:sp>
-      <p:sp>
-        <p:nvSpPr>
-          <p:cNvPr id="59" name="Rectangle 58"/>
+      <p:pic>
+        <p:nvPicPr>
+          <p:cNvPr id="59" name="Picture 58" descr="1779266493933_wxm5q.jpg"/>
+          <p:cNvPicPr>
+            <a:picLocks noChangeAspect="1"/>
+          </p:cNvPicPr>
+          <p:nvPr/>
+        </p:nvPicPr>
+        <p:blipFill>
+          <a:blip r:embed="rId2"/>
+          <a:stretch>
+            <a:fillRect/>
+          </a:stretch>
+        </p:blipFill>
+        <p:spPr>
+          <a:xfrm>
+            <a:off x="6929999" y="2787525"/>
+            <a:ext cx="2550601" cy="1912950"/>
+          </a:xfrm>
+          <a:prstGeom prst="rect">
+            <a:avLst/>
+          </a:prstGeom>
+        </p:spPr>
+      </p:pic>
+      <p:sp>
+        <p:nvSpPr>
+          <p:cNvPr id="60" name="Rectangle 59"/>
           <p:cNvSpPr/>
           <p:nvPr/>
         </p:nvSpPr>
@@ -16774,6 +17182,30 @@
           </a:p>
         </p:txBody>
       </p:sp>
+      <p:pic>
+        <p:nvPicPr>
+          <p:cNvPr id="61" name="Picture 60" descr="1779266493934_f1ymd.jpg"/>
+          <p:cNvPicPr>
+            <a:picLocks noChangeAspect="1"/>
+          </p:cNvPicPr>
+          <p:nvPr/>
+        </p:nvPicPr>
+        <p:blipFill>
+          <a:blip r:embed="rId3"/>
+          <a:stretch>
+            <a:fillRect/>
+          </a:stretch>
+        </p:blipFill>
+        <p:spPr>
+          <a:xfrm>
+            <a:off x="9516600" y="2468700"/>
+            <a:ext cx="2550601" cy="2550601"/>
+          </a:xfrm>
+          <a:prstGeom prst="rect">
+            <a:avLst/>
+          </a:prstGeom>
+        </p:spPr>
+      </p:pic>
     </p:spTree>
   </p:cSld>
   <p:clrMapOvr>
@@ -19005,9 +19437,33 @@
           </a:p>
         </p:txBody>
       </p:sp>
-      <p:sp>
-        <p:nvSpPr>
-          <p:cNvPr id="61" name="Rectangle 60"/>
+      <p:pic>
+        <p:nvPicPr>
+          <p:cNvPr id="61" name="Picture 60" descr="1779266493936_8ygdh.jpg"/>
+          <p:cNvPicPr>
+            <a:picLocks noChangeAspect="1"/>
+          </p:cNvPicPr>
+          <p:nvPr/>
+        </p:nvPicPr>
+        <p:blipFill>
+          <a:blip r:embed="rId2"/>
+          <a:stretch>
+            <a:fillRect/>
+          </a:stretch>
+        </p:blipFill>
+        <p:spPr>
+          <a:xfrm>
+            <a:off x="6929999" y="2787525"/>
+            <a:ext cx="2550601" cy="1912950"/>
+          </a:xfrm>
+          <a:prstGeom prst="rect">
+            <a:avLst/>
+          </a:prstGeom>
+        </p:spPr>
+      </p:pic>
+      <p:sp>
+        <p:nvSpPr>
+          <p:cNvPr id="62" name="Rectangle 61"/>
           <p:cNvSpPr/>
           <p:nvPr/>
         </p:nvSpPr>
@@ -19048,6 +19504,30 @@
           </a:p>
         </p:txBody>
       </p:sp>
+      <p:pic>
+        <p:nvPicPr>
+          <p:cNvPr id="63" name="Picture 62" descr="1779266493938_bfux8.jpg"/>
+          <p:cNvPicPr>
+            <a:picLocks noChangeAspect="1"/>
+          </p:cNvPicPr>
+          <p:nvPr/>
+        </p:nvPicPr>
+        <p:blipFill>
+          <a:blip r:embed="rId3"/>
+          <a:stretch>
+            <a:fillRect/>
+          </a:stretch>
+        </p:blipFill>
+        <p:spPr>
+          <a:xfrm>
+            <a:off x="9516600" y="2468700"/>
+            <a:ext cx="2550601" cy="2550601"/>
+          </a:xfrm>
+          <a:prstGeom prst="rect">
+            <a:avLst/>
+          </a:prstGeom>
+        </p:spPr>
+      </p:pic>
     </p:spTree>
   </p:cSld>
   <p:clrMapOvr>
@@ -21254,9 +21734,33 @@
           </a:p>
         </p:txBody>
       </p:sp>
-      <p:sp>
-        <p:nvSpPr>
-          <p:cNvPr id="57" name="Rectangle 56"/>
+      <p:pic>
+        <p:nvPicPr>
+          <p:cNvPr id="57" name="Picture 56" descr="1779265156830_a0xmv.jpg"/>
+          <p:cNvPicPr>
+            <a:picLocks noChangeAspect="1"/>
+          </p:cNvPicPr>
+          <p:nvPr/>
+        </p:nvPicPr>
+        <p:blipFill>
+          <a:blip r:embed="rId2"/>
+          <a:stretch>
+            <a:fillRect/>
+          </a:stretch>
+        </p:blipFill>
+        <p:spPr>
+          <a:xfrm>
+            <a:off x="7368749" y="756000"/>
+            <a:ext cx="1673100" cy="2970000"/>
+          </a:xfrm>
+          <a:prstGeom prst="rect">
+            <a:avLst/>
+          </a:prstGeom>
+        </p:spPr>
+      </p:pic>
+      <p:sp>
+        <p:nvSpPr>
+          <p:cNvPr id="58" name="Rectangle 57"/>
           <p:cNvSpPr/>
           <p:nvPr/>
         </p:nvSpPr>
@@ -21297,9 +21801,33 @@
           </a:p>
         </p:txBody>
       </p:sp>
-      <p:sp>
-        <p:nvSpPr>
-          <p:cNvPr id="58" name="Rectangle 57"/>
+      <p:pic>
+        <p:nvPicPr>
+          <p:cNvPr id="59" name="Picture 58" descr="1779266421349_v405i.jpg"/>
+          <p:cNvPicPr>
+            <a:picLocks noChangeAspect="1"/>
+          </p:cNvPicPr>
+          <p:nvPr/>
+        </p:nvPicPr>
+        <p:blipFill>
+          <a:blip r:embed="rId3"/>
+          <a:stretch>
+            <a:fillRect/>
+          </a:stretch>
+        </p:blipFill>
+        <p:spPr>
+          <a:xfrm>
+            <a:off x="10009773" y="756000"/>
+            <a:ext cx="1564255" cy="2970000"/>
+          </a:xfrm>
+          <a:prstGeom prst="rect">
+            <a:avLst/>
+          </a:prstGeom>
+        </p:spPr>
+      </p:pic>
+      <p:sp>
+        <p:nvSpPr>
+          <p:cNvPr id="60" name="Rectangle 59"/>
           <p:cNvSpPr/>
           <p:nvPr/>
         </p:nvSpPr>
@@ -21340,6 +21868,30 @@
           </a:p>
         </p:txBody>
       </p:sp>
+      <p:pic>
+        <p:nvPicPr>
+          <p:cNvPr id="61" name="Picture 60" descr="1779266476803_np7vt.jpg"/>
+          <p:cNvPicPr>
+            <a:picLocks noChangeAspect="1"/>
+          </p:cNvPicPr>
+          <p:nvPr/>
+        </p:nvPicPr>
+        <p:blipFill>
+          <a:blip r:embed="rId4"/>
+          <a:stretch>
+            <a:fillRect/>
+          </a:stretch>
+        </p:blipFill>
+        <p:spPr>
+          <a:xfrm>
+            <a:off x="7091549" y="3762000"/>
+            <a:ext cx="2227500" cy="2970000"/>
+          </a:xfrm>
+          <a:prstGeom prst="rect">
+            <a:avLst/>
+          </a:prstGeom>
+        </p:spPr>
+      </p:pic>
     </p:spTree>
   </p:cSld>
   <p:clrMapOvr>
@@ -23494,9 +24046,33 @@
           </a:p>
         </p:txBody>
       </p:sp>
-      <p:sp>
-        <p:nvSpPr>
-          <p:cNvPr id="59" name="Rectangle 58"/>
+      <p:pic>
+        <p:nvPicPr>
+          <p:cNvPr id="59" name="Picture 58" descr="1779265924924_1niqd.jpg"/>
+          <p:cNvPicPr>
+            <a:picLocks noChangeAspect="1"/>
+          </p:cNvPicPr>
+          <p:nvPr/>
+        </p:nvPicPr>
+        <p:blipFill>
+          <a:blip r:embed="rId2"/>
+          <a:stretch>
+            <a:fillRect/>
+          </a:stretch>
+        </p:blipFill>
+        <p:spPr>
+          <a:xfrm>
+            <a:off x="6929999" y="1300525"/>
+            <a:ext cx="2550601" cy="4886951"/>
+          </a:xfrm>
+          <a:prstGeom prst="rect">
+            <a:avLst/>
+          </a:prstGeom>
+        </p:spPr>
+      </p:pic>
+      <p:sp>
+        <p:nvSpPr>
+          <p:cNvPr id="60" name="Rectangle 59"/>
           <p:cNvSpPr/>
           <p:nvPr/>
         </p:nvSpPr>
@@ -23537,6 +24113,30 @@
           </a:p>
         </p:txBody>
       </p:sp>
+      <p:pic>
+        <p:nvPicPr>
+          <p:cNvPr id="61" name="Picture 60" descr="1779265934882_ei4zq.jpg"/>
+          <p:cNvPicPr>
+            <a:picLocks noChangeAspect="1"/>
+          </p:cNvPicPr>
+          <p:nvPr/>
+        </p:nvPicPr>
+        <p:blipFill>
+          <a:blip r:embed="rId3"/>
+          <a:stretch>
+            <a:fillRect/>
+          </a:stretch>
+        </p:blipFill>
+        <p:spPr>
+          <a:xfrm>
+            <a:off x="9516600" y="2787525"/>
+            <a:ext cx="2550601" cy="1912950"/>
+          </a:xfrm>
+          <a:prstGeom prst="rect">
+            <a:avLst/>
+          </a:prstGeom>
+        </p:spPr>
+      </p:pic>
     </p:spTree>
   </p:cSld>
   <p:clrMapOvr>
@@ -25820,9 +26420,33 @@
           </a:p>
         </p:txBody>
       </p:sp>
-      <p:sp>
-        <p:nvSpPr>
-          <p:cNvPr id="59" name="Rectangle 58"/>
+      <p:pic>
+        <p:nvPicPr>
+          <p:cNvPr id="59" name="Picture 58" descr="1779267449728_ygvh2.jpg"/>
+          <p:cNvPicPr>
+            <a:picLocks noChangeAspect="1"/>
+          </p:cNvPicPr>
+          <p:nvPr/>
+        </p:nvPicPr>
+        <p:blipFill>
+          <a:blip r:embed="rId2"/>
+          <a:stretch>
+            <a:fillRect/>
+          </a:stretch>
+        </p:blipFill>
+        <p:spPr>
+          <a:xfrm>
+            <a:off x="6929999" y="2043600"/>
+            <a:ext cx="2550601" cy="3400801"/>
+          </a:xfrm>
+          <a:prstGeom prst="rect">
+            <a:avLst/>
+          </a:prstGeom>
+        </p:spPr>
+      </p:pic>
+      <p:sp>
+        <p:nvSpPr>
+          <p:cNvPr id="60" name="Rectangle 59"/>
           <p:cNvSpPr/>
           <p:nvPr/>
         </p:nvSpPr>
@@ -25863,6 +26487,30 @@
           </a:p>
         </p:txBody>
       </p:sp>
+      <p:pic>
+        <p:nvPicPr>
+          <p:cNvPr id="61" name="Picture 60" descr="1779267467536_cwtm4.jpg"/>
+          <p:cNvPicPr>
+            <a:picLocks noChangeAspect="1"/>
+          </p:cNvPicPr>
+          <p:nvPr/>
+        </p:nvPicPr>
+        <p:blipFill>
+          <a:blip r:embed="rId3"/>
+          <a:stretch>
+            <a:fillRect/>
+          </a:stretch>
+        </p:blipFill>
+        <p:spPr>
+          <a:xfrm>
+            <a:off x="9619110" y="756000"/>
+            <a:ext cx="2345580" cy="5976001"/>
+          </a:xfrm>
+          <a:prstGeom prst="rect">
+            <a:avLst/>
+          </a:prstGeom>
+        </p:spPr>
+      </p:pic>
     </p:spTree>
   </p:cSld>
   <p:clrMapOvr>
@@ -28069,6 +28717,30 @@
           </a:p>
         </p:txBody>
       </p:sp>
+      <p:pic>
+        <p:nvPicPr>
+          <p:cNvPr id="57" name="Picture 56" descr="1779267690200_0zk74.jpg"/>
+          <p:cNvPicPr>
+            <a:picLocks noChangeAspect="1"/>
+          </p:cNvPicPr>
+          <p:nvPr/>
+        </p:nvPicPr>
+        <p:blipFill>
+          <a:blip r:embed="rId2"/>
+          <a:stretch>
+            <a:fillRect/>
+          </a:stretch>
+        </p:blipFill>
+        <p:spPr>
+          <a:xfrm>
+            <a:off x="6929999" y="1928856"/>
+            <a:ext cx="5137202" cy="3630289"/>
+          </a:xfrm>
+          <a:prstGeom prst="rect">
+            <a:avLst/>
+          </a:prstGeom>
+        </p:spPr>
+      </p:pic>
     </p:spTree>
   </p:cSld>
   <p:clrMapOvr>
@@ -30223,6 +30895,30 @@
           </a:p>
         </p:txBody>
       </p:sp>
+      <p:pic>
+        <p:nvPicPr>
+          <p:cNvPr id="59" name="Picture 58" descr="1779267814073_qe07r.jpg"/>
+          <p:cNvPicPr>
+            <a:picLocks noChangeAspect="1"/>
+          </p:cNvPicPr>
+          <p:nvPr/>
+        </p:nvPicPr>
+        <p:blipFill>
+          <a:blip r:embed="rId2"/>
+          <a:stretch>
+            <a:fillRect/>
+          </a:stretch>
+        </p:blipFill>
+        <p:spPr>
+          <a:xfrm>
+            <a:off x="6929999" y="1928856"/>
+            <a:ext cx="5137202" cy="3630289"/>
+          </a:xfrm>
+          <a:prstGeom prst="rect">
+            <a:avLst/>
+          </a:prstGeom>
+        </p:spPr>
+      </p:pic>
     </p:spTree>
   </p:cSld>
   <p:clrMapOvr>
@@ -32377,9 +33073,33 @@
           </a:p>
         </p:txBody>
       </p:sp>
-      <p:sp>
-        <p:nvSpPr>
-          <p:cNvPr id="59" name="Rectangle 58"/>
+      <p:pic>
+        <p:nvPicPr>
+          <p:cNvPr id="59" name="Picture 58" descr="1779266493847_ygpze.jpg"/>
+          <p:cNvPicPr>
+            <a:picLocks noChangeAspect="1"/>
+          </p:cNvPicPr>
+          <p:nvPr/>
+        </p:nvPicPr>
+        <p:blipFill>
+          <a:blip r:embed="rId2"/>
+          <a:stretch>
+            <a:fillRect/>
+          </a:stretch>
+        </p:blipFill>
+        <p:spPr>
+          <a:xfrm>
+            <a:off x="7221299" y="756000"/>
+            <a:ext cx="1968000" cy="1968000"/>
+          </a:xfrm>
+          <a:prstGeom prst="rect">
+            <a:avLst/>
+          </a:prstGeom>
+        </p:spPr>
+      </p:pic>
+      <p:sp>
+        <p:nvSpPr>
+          <p:cNvPr id="60" name="Rectangle 59"/>
           <p:cNvSpPr/>
           <p:nvPr/>
         </p:nvSpPr>
@@ -32420,9 +33140,33 @@
           </a:p>
         </p:txBody>
       </p:sp>
-      <p:sp>
-        <p:nvSpPr>
-          <p:cNvPr id="60" name="Rectangle 59"/>
+      <p:pic>
+        <p:nvPicPr>
+          <p:cNvPr id="61" name="Picture 60" descr="1779266493849_4g0nx.jpg"/>
+          <p:cNvPicPr>
+            <a:picLocks noChangeAspect="1"/>
+          </p:cNvPicPr>
+          <p:nvPr/>
+        </p:nvPicPr>
+        <p:blipFill>
+          <a:blip r:embed="rId3"/>
+          <a:stretch>
+            <a:fillRect/>
+          </a:stretch>
+        </p:blipFill>
+        <p:spPr>
+          <a:xfrm>
+            <a:off x="9807900" y="756000"/>
+            <a:ext cx="1968000" cy="1968000"/>
+          </a:xfrm>
+          <a:prstGeom prst="rect">
+            <a:avLst/>
+          </a:prstGeom>
+        </p:spPr>
+      </p:pic>
+      <p:sp>
+        <p:nvSpPr>
+          <p:cNvPr id="62" name="Rectangle 61"/>
           <p:cNvSpPr/>
           <p:nvPr/>
         </p:nvSpPr>
@@ -32463,9 +33207,33 @@
           </a:p>
         </p:txBody>
       </p:sp>
-      <p:sp>
-        <p:nvSpPr>
-          <p:cNvPr id="61" name="Rectangle 60"/>
+      <p:pic>
+        <p:nvPicPr>
+          <p:cNvPr id="63" name="Picture 62" descr="1779266493850_ejf0l.jpg"/>
+          <p:cNvPicPr>
+            <a:picLocks noChangeAspect="1"/>
+          </p:cNvPicPr>
+          <p:nvPr/>
+        </p:nvPicPr>
+        <p:blipFill>
+          <a:blip r:embed="rId4"/>
+          <a:stretch>
+            <a:fillRect/>
+          </a:stretch>
+        </p:blipFill>
+        <p:spPr>
+          <a:xfrm>
+            <a:off x="7221299" y="2760000"/>
+            <a:ext cx="1968000" cy="1968000"/>
+          </a:xfrm>
+          <a:prstGeom prst="rect">
+            <a:avLst/>
+          </a:prstGeom>
+        </p:spPr>
+      </p:pic>
+      <p:sp>
+        <p:nvSpPr>
+          <p:cNvPr id="64" name="Rectangle 63"/>
           <p:cNvSpPr/>
           <p:nvPr/>
         </p:nvSpPr>
@@ -32506,9 +33274,33 @@
           </a:p>
         </p:txBody>
       </p:sp>
-      <p:sp>
-        <p:nvSpPr>
-          <p:cNvPr id="62" name="Rectangle 61"/>
+      <p:pic>
+        <p:nvPicPr>
+          <p:cNvPr id="65" name="Picture 64" descr="1779266493851_j8xjv.jpg"/>
+          <p:cNvPicPr>
+            <a:picLocks noChangeAspect="1"/>
+          </p:cNvPicPr>
+          <p:nvPr/>
+        </p:nvPicPr>
+        <p:blipFill>
+          <a:blip r:embed="rId5"/>
+          <a:stretch>
+            <a:fillRect/>
+          </a:stretch>
+        </p:blipFill>
+        <p:spPr>
+          <a:xfrm>
+            <a:off x="9807900" y="2760000"/>
+            <a:ext cx="1968000" cy="1968000"/>
+          </a:xfrm>
+          <a:prstGeom prst="rect">
+            <a:avLst/>
+          </a:prstGeom>
+        </p:spPr>
+      </p:pic>
+      <p:sp>
+        <p:nvSpPr>
+          <p:cNvPr id="66" name="Rectangle 65"/>
           <p:cNvSpPr/>
           <p:nvPr/>
         </p:nvSpPr>
@@ -32549,9 +33341,33 @@
           </a:p>
         </p:txBody>
       </p:sp>
-      <p:sp>
-        <p:nvSpPr>
-          <p:cNvPr id="63" name="Rectangle 62"/>
+      <p:pic>
+        <p:nvPicPr>
+          <p:cNvPr id="67" name="Picture 66" descr="1779266493852_c0liv.jpg"/>
+          <p:cNvPicPr>
+            <a:picLocks noChangeAspect="1"/>
+          </p:cNvPicPr>
+          <p:nvPr/>
+        </p:nvPicPr>
+        <p:blipFill>
+          <a:blip r:embed="rId6"/>
+          <a:stretch>
+            <a:fillRect/>
+          </a:stretch>
+        </p:blipFill>
+        <p:spPr>
+          <a:xfrm>
+            <a:off x="7221299" y="4764000"/>
+            <a:ext cx="1968000" cy="1968000"/>
+          </a:xfrm>
+          <a:prstGeom prst="rect">
+            <a:avLst/>
+          </a:prstGeom>
+        </p:spPr>
+      </p:pic>
+      <p:sp>
+        <p:nvSpPr>
+          <p:cNvPr id="68" name="Rectangle 67"/>
           <p:cNvSpPr/>
           <p:nvPr/>
         </p:nvSpPr>
@@ -32592,9 +33408,33 @@
           </a:p>
         </p:txBody>
       </p:sp>
-      <p:sp>
-        <p:nvSpPr>
-          <p:cNvPr id="64" name="Rectangle 63"/>
+      <p:pic>
+        <p:nvPicPr>
+          <p:cNvPr id="69" name="Picture 68" descr="1779266493853_lxo14.jpg"/>
+          <p:cNvPicPr>
+            <a:picLocks noChangeAspect="1"/>
+          </p:cNvPicPr>
+          <p:nvPr/>
+        </p:nvPicPr>
+        <p:blipFill>
+          <a:blip r:embed="rId7"/>
+          <a:stretch>
+            <a:fillRect/>
+          </a:stretch>
+        </p:blipFill>
+        <p:spPr>
+          <a:xfrm>
+            <a:off x="9807900" y="4764000"/>
+            <a:ext cx="1968000" cy="1968000"/>
+          </a:xfrm>
+          <a:prstGeom prst="rect">
+            <a:avLst/>
+          </a:prstGeom>
+        </p:spPr>
+      </p:pic>
+      <p:sp>
+        <p:nvSpPr>
+          <p:cNvPr id="70" name="Rectangle 69"/>
           <p:cNvSpPr/>
           <p:nvPr/>
         </p:nvSpPr>
@@ -32639,7 +33479,7 @@
       </p:sp>
       <p:sp>
         <p:nvSpPr>
-          <p:cNvPr id="65" name="TextBox 64"/>
+          <p:cNvPr id="71" name="TextBox 70"/>
           <p:cNvSpPr txBox="1"/>
           <p:nvPr/>
         </p:nvSpPr>
@@ -34825,9 +35665,33 @@
           </a:p>
         </p:txBody>
       </p:sp>
-      <p:sp>
-        <p:nvSpPr>
-          <p:cNvPr id="59" name="Rectangle 58"/>
+      <p:pic>
+        <p:nvPicPr>
+          <p:cNvPr id="59" name="Picture 58" descr="1779266493869_4wxq4.jpg"/>
+          <p:cNvPicPr>
+            <a:picLocks noChangeAspect="1"/>
+          </p:cNvPicPr>
+          <p:nvPr/>
+        </p:nvPicPr>
+        <p:blipFill>
+          <a:blip r:embed="rId2"/>
+          <a:stretch>
+            <a:fillRect/>
+          </a:stretch>
+        </p:blipFill>
+        <p:spPr>
+          <a:xfrm>
+            <a:off x="7467299" y="756000"/>
+            <a:ext cx="1476000" cy="1968000"/>
+          </a:xfrm>
+          <a:prstGeom prst="rect">
+            <a:avLst/>
+          </a:prstGeom>
+        </p:spPr>
+      </p:pic>
+      <p:sp>
+        <p:nvSpPr>
+          <p:cNvPr id="60" name="Rectangle 59"/>
           <p:cNvSpPr/>
           <p:nvPr/>
         </p:nvSpPr>
@@ -34868,9 +35732,33 @@
           </a:p>
         </p:txBody>
       </p:sp>
-      <p:sp>
-        <p:nvSpPr>
-          <p:cNvPr id="60" name="Rectangle 59"/>
+      <p:pic>
+        <p:nvPicPr>
+          <p:cNvPr id="61" name="Picture 60" descr="1779266493870_b3d4g.jpg"/>
+          <p:cNvPicPr>
+            <a:picLocks noChangeAspect="1"/>
+          </p:cNvPicPr>
+          <p:nvPr/>
+        </p:nvPicPr>
+        <p:blipFill>
+          <a:blip r:embed="rId3"/>
+          <a:stretch>
+            <a:fillRect/>
+          </a:stretch>
+        </p:blipFill>
+        <p:spPr>
+          <a:xfrm>
+            <a:off x="10053900" y="756000"/>
+            <a:ext cx="1476000" cy="1968000"/>
+          </a:xfrm>
+          <a:prstGeom prst="rect">
+            <a:avLst/>
+          </a:prstGeom>
+        </p:spPr>
+      </p:pic>
+      <p:sp>
+        <p:nvSpPr>
+          <p:cNvPr id="62" name="Rectangle 61"/>
           <p:cNvSpPr/>
           <p:nvPr/>
         </p:nvSpPr>
@@ -34911,9 +35799,33 @@
           </a:p>
         </p:txBody>
       </p:sp>
-      <p:sp>
-        <p:nvSpPr>
-          <p:cNvPr id="61" name="Rectangle 60"/>
+      <p:pic>
+        <p:nvPicPr>
+          <p:cNvPr id="63" name="Picture 62" descr="1779266493871_0evn8.jpg"/>
+          <p:cNvPicPr>
+            <a:picLocks noChangeAspect="1"/>
+          </p:cNvPicPr>
+          <p:nvPr/>
+        </p:nvPicPr>
+        <p:blipFill>
+          <a:blip r:embed="rId4"/>
+          <a:stretch>
+            <a:fillRect/>
+          </a:stretch>
+        </p:blipFill>
+        <p:spPr>
+          <a:xfrm>
+            <a:off x="7467299" y="2760000"/>
+            <a:ext cx="1476000" cy="1968000"/>
+          </a:xfrm>
+          <a:prstGeom prst="rect">
+            <a:avLst/>
+          </a:prstGeom>
+        </p:spPr>
+      </p:pic>
+      <p:sp>
+        <p:nvSpPr>
+          <p:cNvPr id="64" name="Rectangle 63"/>
           <p:cNvSpPr/>
           <p:nvPr/>
         </p:nvSpPr>
@@ -34954,9 +35866,33 @@
           </a:p>
         </p:txBody>
       </p:sp>
-      <p:sp>
-        <p:nvSpPr>
-          <p:cNvPr id="62" name="Rectangle 61"/>
+      <p:pic>
+        <p:nvPicPr>
+          <p:cNvPr id="65" name="Picture 64" descr="1779266493873_bhdb2.jpg"/>
+          <p:cNvPicPr>
+            <a:picLocks noChangeAspect="1"/>
+          </p:cNvPicPr>
+          <p:nvPr/>
+        </p:nvPicPr>
+        <p:blipFill>
+          <a:blip r:embed="rId5"/>
+          <a:stretch>
+            <a:fillRect/>
+          </a:stretch>
+        </p:blipFill>
+        <p:spPr>
+          <a:xfrm>
+            <a:off x="10053900" y="2760000"/>
+            <a:ext cx="1476000" cy="1968000"/>
+          </a:xfrm>
+          <a:prstGeom prst="rect">
+            <a:avLst/>
+          </a:prstGeom>
+        </p:spPr>
+      </p:pic>
+      <p:sp>
+        <p:nvSpPr>
+          <p:cNvPr id="66" name="Rectangle 65"/>
           <p:cNvSpPr/>
           <p:nvPr/>
         </p:nvSpPr>
@@ -34997,9 +35933,33 @@
           </a:p>
         </p:txBody>
       </p:sp>
-      <p:sp>
-        <p:nvSpPr>
-          <p:cNvPr id="63" name="Rectangle 62"/>
+      <p:pic>
+        <p:nvPicPr>
+          <p:cNvPr id="67" name="Picture 66" descr="1779266493874_fitsi.jpg"/>
+          <p:cNvPicPr>
+            <a:picLocks noChangeAspect="1"/>
+          </p:cNvPicPr>
+          <p:nvPr/>
+        </p:nvPicPr>
+        <p:blipFill>
+          <a:blip r:embed="rId6"/>
+          <a:stretch>
+            <a:fillRect/>
+          </a:stretch>
+        </p:blipFill>
+        <p:spPr>
+          <a:xfrm>
+            <a:off x="7467299" y="4764000"/>
+            <a:ext cx="1476000" cy="1968000"/>
+          </a:xfrm>
+          <a:prstGeom prst="rect">
+            <a:avLst/>
+          </a:prstGeom>
+        </p:spPr>
+      </p:pic>
+      <p:sp>
+        <p:nvSpPr>
+          <p:cNvPr id="68" name="Rectangle 67"/>
           <p:cNvSpPr/>
           <p:nvPr/>
         </p:nvSpPr>
@@ -35040,6 +36000,30 @@
           </a:p>
         </p:txBody>
       </p:sp>
+      <p:pic>
+        <p:nvPicPr>
+          <p:cNvPr id="69" name="Picture 68" descr="1779266493869_4wxq4.jpg"/>
+          <p:cNvPicPr>
+            <a:picLocks noChangeAspect="1"/>
+          </p:cNvPicPr>
+          <p:nvPr/>
+        </p:nvPicPr>
+        <p:blipFill>
+          <a:blip r:embed="rId2"/>
+          <a:stretch>
+            <a:fillRect/>
+          </a:stretch>
+        </p:blipFill>
+        <p:spPr>
+          <a:xfrm>
+            <a:off x="10053900" y="4764000"/>
+            <a:ext cx="1476000" cy="1968000"/>
+          </a:xfrm>
+          <a:prstGeom prst="rect">
+            <a:avLst/>
+          </a:prstGeom>
+        </p:spPr>
+      </p:pic>
     </p:spTree>
   </p:cSld>
   <p:clrMapOvr>
@@ -37194,9 +38178,33 @@
           </a:p>
         </p:txBody>
       </p:sp>
-      <p:sp>
-        <p:nvSpPr>
-          <p:cNvPr id="59" name="Rectangle 58"/>
+      <p:pic>
+        <p:nvPicPr>
+          <p:cNvPr id="59" name="Picture 58" descr="1779266493878_ljoga.jpg"/>
+          <p:cNvPicPr>
+            <a:picLocks noChangeAspect="1"/>
+          </p:cNvPicPr>
+          <p:nvPr/>
+        </p:nvPicPr>
+        <p:blipFill>
+          <a:blip r:embed="rId2"/>
+          <a:stretch>
+            <a:fillRect/>
+          </a:stretch>
+        </p:blipFill>
+        <p:spPr>
+          <a:xfrm>
+            <a:off x="7467299" y="756000"/>
+            <a:ext cx="1476000" cy="1968000"/>
+          </a:xfrm>
+          <a:prstGeom prst="rect">
+            <a:avLst/>
+          </a:prstGeom>
+        </p:spPr>
+      </p:pic>
+      <p:sp>
+        <p:nvSpPr>
+          <p:cNvPr id="60" name="Rectangle 59"/>
           <p:cNvSpPr/>
           <p:nvPr/>
         </p:nvSpPr>
@@ -37237,9 +38245,33 @@
           </a:p>
         </p:txBody>
       </p:sp>
-      <p:sp>
-        <p:nvSpPr>
-          <p:cNvPr id="60" name="Rectangle 59"/>
+      <p:pic>
+        <p:nvPicPr>
+          <p:cNvPr id="61" name="Picture 60" descr="1779266493879_tfgpn.jpg"/>
+          <p:cNvPicPr>
+            <a:picLocks noChangeAspect="1"/>
+          </p:cNvPicPr>
+          <p:nvPr/>
+        </p:nvPicPr>
+        <p:blipFill>
+          <a:blip r:embed="rId3"/>
+          <a:stretch>
+            <a:fillRect/>
+          </a:stretch>
+        </p:blipFill>
+        <p:spPr>
+          <a:xfrm>
+            <a:off x="10053900" y="756000"/>
+            <a:ext cx="1476000" cy="1968000"/>
+          </a:xfrm>
+          <a:prstGeom prst="rect">
+            <a:avLst/>
+          </a:prstGeom>
+        </p:spPr>
+      </p:pic>
+      <p:sp>
+        <p:nvSpPr>
+          <p:cNvPr id="62" name="Rectangle 61"/>
           <p:cNvSpPr/>
           <p:nvPr/>
         </p:nvSpPr>
@@ -37280,9 +38312,33 @@
           </a:p>
         </p:txBody>
       </p:sp>
-      <p:sp>
-        <p:nvSpPr>
-          <p:cNvPr id="61" name="Rectangle 60"/>
+      <p:pic>
+        <p:nvPicPr>
+          <p:cNvPr id="63" name="Picture 62" descr="1779266493881_bvu5l.jpg"/>
+          <p:cNvPicPr>
+            <a:picLocks noChangeAspect="1"/>
+          </p:cNvPicPr>
+          <p:nvPr/>
+        </p:nvPicPr>
+        <p:blipFill>
+          <a:blip r:embed="rId4"/>
+          <a:stretch>
+            <a:fillRect/>
+          </a:stretch>
+        </p:blipFill>
+        <p:spPr>
+          <a:xfrm>
+            <a:off x="7467299" y="2760000"/>
+            <a:ext cx="1476000" cy="1968000"/>
+          </a:xfrm>
+          <a:prstGeom prst="rect">
+            <a:avLst/>
+          </a:prstGeom>
+        </p:spPr>
+      </p:pic>
+      <p:sp>
+        <p:nvSpPr>
+          <p:cNvPr id="64" name="Rectangle 63"/>
           <p:cNvSpPr/>
           <p:nvPr/>
         </p:nvSpPr>
@@ -37323,9 +38379,33 @@
           </a:p>
         </p:txBody>
       </p:sp>
-      <p:sp>
-        <p:nvSpPr>
-          <p:cNvPr id="62" name="Rectangle 61"/>
+      <p:pic>
+        <p:nvPicPr>
+          <p:cNvPr id="65" name="Picture 64" descr="1779266493882_p0ow7.jpg"/>
+          <p:cNvPicPr>
+            <a:picLocks noChangeAspect="1"/>
+          </p:cNvPicPr>
+          <p:nvPr/>
+        </p:nvPicPr>
+        <p:blipFill>
+          <a:blip r:embed="rId5"/>
+          <a:stretch>
+            <a:fillRect/>
+          </a:stretch>
+        </p:blipFill>
+        <p:spPr>
+          <a:xfrm>
+            <a:off x="9516600" y="2787525"/>
+            <a:ext cx="2550601" cy="1912950"/>
+          </a:xfrm>
+          <a:prstGeom prst="rect">
+            <a:avLst/>
+          </a:prstGeom>
+        </p:spPr>
+      </p:pic>
+      <p:sp>
+        <p:nvSpPr>
+          <p:cNvPr id="66" name="Rectangle 65"/>
           <p:cNvSpPr/>
           <p:nvPr/>
         </p:nvSpPr>
@@ -37366,9 +38446,33 @@
           </a:p>
         </p:txBody>
       </p:sp>
-      <p:sp>
-        <p:nvSpPr>
-          <p:cNvPr id="63" name="Rectangle 62"/>
+      <p:pic>
+        <p:nvPicPr>
+          <p:cNvPr id="67" name="Picture 66" descr="1779266493883_zlun4.jpg"/>
+          <p:cNvPicPr>
+            <a:picLocks noChangeAspect="1"/>
+          </p:cNvPicPr>
+          <p:nvPr/>
+        </p:nvPicPr>
+        <p:blipFill>
+          <a:blip r:embed="rId6"/>
+          <a:stretch>
+            <a:fillRect/>
+          </a:stretch>
+        </p:blipFill>
+        <p:spPr>
+          <a:xfrm>
+            <a:off x="7467299" y="4764000"/>
+            <a:ext cx="1476000" cy="1968000"/>
+          </a:xfrm>
+          <a:prstGeom prst="rect">
+            <a:avLst/>
+          </a:prstGeom>
+        </p:spPr>
+      </p:pic>
+      <p:sp>
+        <p:nvSpPr>
+          <p:cNvPr id="68" name="Rectangle 67"/>
           <p:cNvSpPr/>
           <p:nvPr/>
         </p:nvSpPr>
@@ -37409,6 +38513,30 @@
           </a:p>
         </p:txBody>
       </p:sp>
+      <p:pic>
+        <p:nvPicPr>
+          <p:cNvPr id="69" name="Picture 68" descr="1779266493885_w7t6n.jpg"/>
+          <p:cNvPicPr>
+            <a:picLocks noChangeAspect="1"/>
+          </p:cNvPicPr>
+          <p:nvPr/>
+        </p:nvPicPr>
+        <p:blipFill>
+          <a:blip r:embed="rId7"/>
+          <a:stretch>
+            <a:fillRect/>
+          </a:stretch>
+        </p:blipFill>
+        <p:spPr>
+          <a:xfrm>
+            <a:off x="9516600" y="4791525"/>
+            <a:ext cx="2550601" cy="1912950"/>
+          </a:xfrm>
+          <a:prstGeom prst="rect">
+            <a:avLst/>
+          </a:prstGeom>
+        </p:spPr>
+      </p:pic>
     </p:spTree>
   </p:cSld>
   <p:clrMapOvr>
@@ -39563,9 +40691,33 @@
           </a:p>
         </p:txBody>
       </p:sp>
-      <p:sp>
-        <p:nvSpPr>
-          <p:cNvPr id="59" name="Rectangle 58"/>
+      <p:pic>
+        <p:nvPicPr>
+          <p:cNvPr id="59" name="Picture 58" descr="1779266493887_xqr8m.jpg"/>
+          <p:cNvPicPr>
+            <a:picLocks noChangeAspect="1"/>
+          </p:cNvPicPr>
+          <p:nvPr/>
+        </p:nvPicPr>
+        <p:blipFill>
+          <a:blip r:embed="rId2"/>
+          <a:stretch>
+            <a:fillRect/>
+          </a:stretch>
+        </p:blipFill>
+        <p:spPr>
+          <a:xfrm>
+            <a:off x="6929999" y="2468700"/>
+            <a:ext cx="2550601" cy="2550601"/>
+          </a:xfrm>
+          <a:prstGeom prst="rect">
+            <a:avLst/>
+          </a:prstGeom>
+        </p:spPr>
+      </p:pic>
+      <p:sp>
+        <p:nvSpPr>
+          <p:cNvPr id="60" name="Rectangle 59"/>
           <p:cNvSpPr/>
           <p:nvPr/>
         </p:nvSpPr>
@@ -39606,6 +40758,30 @@
           </a:p>
         </p:txBody>
       </p:sp>
+      <p:pic>
+        <p:nvPicPr>
+          <p:cNvPr id="61" name="Picture 60" descr="1779266493888_93t1m.jpg"/>
+          <p:cNvPicPr>
+            <a:picLocks noChangeAspect="1"/>
+          </p:cNvPicPr>
+          <p:nvPr/>
+        </p:nvPicPr>
+        <p:blipFill>
+          <a:blip r:embed="rId3"/>
+          <a:stretch>
+            <a:fillRect/>
+          </a:stretch>
+        </p:blipFill>
+        <p:spPr>
+          <a:xfrm>
+            <a:off x="9517332" y="756000"/>
+            <a:ext cx="2549137" cy="5976001"/>
+          </a:xfrm>
+          <a:prstGeom prst="rect">
+            <a:avLst/>
+          </a:prstGeom>
+        </p:spPr>
+      </p:pic>
     </p:spTree>
   </p:cSld>
   <p:clrMapOvr>
@@ -41760,9 +42936,33 @@
           </a:p>
         </p:txBody>
       </p:sp>
-      <p:sp>
-        <p:nvSpPr>
-          <p:cNvPr id="59" name="Rectangle 58"/>
+      <p:pic>
+        <p:nvPicPr>
+          <p:cNvPr id="59" name="Picture 58" descr="1779266493890_fv3qk.jpg"/>
+          <p:cNvPicPr>
+            <a:picLocks noChangeAspect="1"/>
+          </p:cNvPicPr>
+          <p:nvPr/>
+        </p:nvPicPr>
+        <p:blipFill>
+          <a:blip r:embed="rId2"/>
+          <a:stretch>
+            <a:fillRect/>
+          </a:stretch>
+        </p:blipFill>
+        <p:spPr>
+          <a:xfrm>
+            <a:off x="6929999" y="1831050"/>
+            <a:ext cx="2550601" cy="3825901"/>
+          </a:xfrm>
+          <a:prstGeom prst="rect">
+            <a:avLst/>
+          </a:prstGeom>
+        </p:spPr>
+      </p:pic>
+      <p:sp>
+        <p:nvSpPr>
+          <p:cNvPr id="60" name="Rectangle 59"/>
           <p:cNvSpPr/>
           <p:nvPr/>
         </p:nvSpPr>
@@ -41803,6 +43003,30 @@
           </a:p>
         </p:txBody>
       </p:sp>
+      <p:pic>
+        <p:nvPicPr>
+          <p:cNvPr id="61" name="Picture 60" descr="1779266493891_w3qrq.jpg"/>
+          <p:cNvPicPr>
+            <a:picLocks noChangeAspect="1"/>
+          </p:cNvPicPr>
+          <p:nvPr/>
+        </p:nvPicPr>
+        <p:blipFill>
+          <a:blip r:embed="rId3"/>
+          <a:stretch>
+            <a:fillRect/>
+          </a:stretch>
+        </p:blipFill>
+        <p:spPr>
+          <a:xfrm>
+            <a:off x="9516600" y="2468700"/>
+            <a:ext cx="2550601" cy="2550601"/>
+          </a:xfrm>
+          <a:prstGeom prst="rect">
+            <a:avLst/>
+          </a:prstGeom>
+        </p:spPr>
+      </p:pic>
     </p:spTree>
   </p:cSld>
   <p:clrMapOvr>
@@ -43957,6 +45181,30 @@
           </a:p>
         </p:txBody>
       </p:sp>
+      <p:pic>
+        <p:nvPicPr>
+          <p:cNvPr id="59" name="Picture 58" descr="1779266493892_q7tf1.jpg"/>
+          <p:cNvPicPr>
+            <a:picLocks noChangeAspect="1"/>
+          </p:cNvPicPr>
+          <p:nvPr/>
+        </p:nvPicPr>
+        <p:blipFill>
+          <a:blip r:embed="rId2"/>
+          <a:stretch>
+            <a:fillRect/>
+          </a:stretch>
+        </p:blipFill>
+        <p:spPr>
+          <a:xfrm>
+            <a:off x="6929999" y="1928476"/>
+            <a:ext cx="5137202" cy="3631049"/>
+          </a:xfrm>
+          <a:prstGeom prst="rect">
+            <a:avLst/>
+          </a:prstGeom>
+        </p:spPr>
+      </p:pic>
     </p:spTree>
   </p:cSld>
   <p:clrMapOvr>
@@ -46111,9 +47359,33 @@
           </a:p>
         </p:txBody>
       </p:sp>
-      <p:sp>
-        <p:nvSpPr>
-          <p:cNvPr id="59" name="Rectangle 58"/>
+      <p:pic>
+        <p:nvPicPr>
+          <p:cNvPr id="59" name="Picture 58" descr="1779266493897_w2rqp.jpg"/>
+          <p:cNvPicPr>
+            <a:picLocks noChangeAspect="1"/>
+          </p:cNvPicPr>
+          <p:nvPr/>
+        </p:nvPicPr>
+        <p:blipFill>
+          <a:blip r:embed="rId2"/>
+          <a:stretch>
+            <a:fillRect/>
+          </a:stretch>
+        </p:blipFill>
+        <p:spPr>
+          <a:xfrm>
+            <a:off x="7531259" y="756000"/>
+            <a:ext cx="1348080" cy="1968000"/>
+          </a:xfrm>
+          <a:prstGeom prst="rect">
+            <a:avLst/>
+          </a:prstGeom>
+        </p:spPr>
+      </p:pic>
+      <p:sp>
+        <p:nvSpPr>
+          <p:cNvPr id="60" name="Rectangle 59"/>
           <p:cNvSpPr/>
           <p:nvPr/>
         </p:nvSpPr>
@@ -46154,9 +47426,33 @@
           </a:p>
         </p:txBody>
       </p:sp>
-      <p:sp>
-        <p:nvSpPr>
-          <p:cNvPr id="60" name="Rectangle 59"/>
+      <p:pic>
+        <p:nvPicPr>
+          <p:cNvPr id="61" name="Picture 60" descr="1779266493900_wblsm.jpg"/>
+          <p:cNvPicPr>
+            <a:picLocks noChangeAspect="1"/>
+          </p:cNvPicPr>
+          <p:nvPr/>
+        </p:nvPicPr>
+        <p:blipFill>
+          <a:blip r:embed="rId3"/>
+          <a:stretch>
+            <a:fillRect/>
+          </a:stretch>
+        </p:blipFill>
+        <p:spPr>
+          <a:xfrm>
+            <a:off x="10053900" y="756000"/>
+            <a:ext cx="1476000" cy="1968000"/>
+          </a:xfrm>
+          <a:prstGeom prst="rect">
+            <a:avLst/>
+          </a:prstGeom>
+        </p:spPr>
+      </p:pic>
+      <p:sp>
+        <p:nvSpPr>
+          <p:cNvPr id="62" name="Rectangle 61"/>
           <p:cNvSpPr/>
           <p:nvPr/>
         </p:nvSpPr>
@@ -46197,9 +47493,33 @@
           </a:p>
         </p:txBody>
       </p:sp>
-      <p:sp>
-        <p:nvSpPr>
-          <p:cNvPr id="61" name="Rectangle 60"/>
+      <p:pic>
+        <p:nvPicPr>
+          <p:cNvPr id="63" name="Picture 62" descr="1779266493901_7gwfi.jpg"/>
+          <p:cNvPicPr>
+            <a:picLocks noChangeAspect="1"/>
+          </p:cNvPicPr>
+          <p:nvPr/>
+        </p:nvPicPr>
+        <p:blipFill>
+          <a:blip r:embed="rId4"/>
+          <a:stretch>
+            <a:fillRect/>
+          </a:stretch>
+        </p:blipFill>
+        <p:spPr>
+          <a:xfrm>
+            <a:off x="7467299" y="2760000"/>
+            <a:ext cx="1476000" cy="1968000"/>
+          </a:xfrm>
+          <a:prstGeom prst="rect">
+            <a:avLst/>
+          </a:prstGeom>
+        </p:spPr>
+      </p:pic>
+      <p:sp>
+        <p:nvSpPr>
+          <p:cNvPr id="64" name="Rectangle 63"/>
           <p:cNvSpPr/>
           <p:nvPr/>
         </p:nvSpPr>
@@ -46240,9 +47560,33 @@
           </a:p>
         </p:txBody>
       </p:sp>
-      <p:sp>
-        <p:nvSpPr>
-          <p:cNvPr id="62" name="Rectangle 61"/>
+      <p:pic>
+        <p:nvPicPr>
+          <p:cNvPr id="65" name="Picture 64" descr="1779266493902_nfjvx.jpg"/>
+          <p:cNvPicPr>
+            <a:picLocks noChangeAspect="1"/>
+          </p:cNvPicPr>
+          <p:nvPr/>
+        </p:nvPicPr>
+        <p:blipFill>
+          <a:blip r:embed="rId5"/>
+          <a:stretch>
+            <a:fillRect/>
+          </a:stretch>
+        </p:blipFill>
+        <p:spPr>
+          <a:xfrm>
+            <a:off x="10053900" y="2760000"/>
+            <a:ext cx="1476000" cy="1968000"/>
+          </a:xfrm>
+          <a:prstGeom prst="rect">
+            <a:avLst/>
+          </a:prstGeom>
+        </p:spPr>
+      </p:pic>
+      <p:sp>
+        <p:nvSpPr>
+          <p:cNvPr id="66" name="Rectangle 65"/>
           <p:cNvSpPr/>
           <p:nvPr/>
         </p:nvSpPr>
@@ -46283,9 +47627,33 @@
           </a:p>
         </p:txBody>
       </p:sp>
-      <p:sp>
-        <p:nvSpPr>
-          <p:cNvPr id="63" name="Rectangle 62"/>
+      <p:pic>
+        <p:nvPicPr>
+          <p:cNvPr id="67" name="Picture 66" descr="1779266493903_866yd.jpg"/>
+          <p:cNvPicPr>
+            <a:picLocks noChangeAspect="1"/>
+          </p:cNvPicPr>
+          <p:nvPr/>
+        </p:nvPicPr>
+        <p:blipFill>
+          <a:blip r:embed="rId6"/>
+          <a:stretch>
+            <a:fillRect/>
+          </a:stretch>
+        </p:blipFill>
+        <p:spPr>
+          <a:xfrm>
+            <a:off x="6929999" y="4791525"/>
+            <a:ext cx="2550601" cy="1912950"/>
+          </a:xfrm>
+          <a:prstGeom prst="rect">
+            <a:avLst/>
+          </a:prstGeom>
+        </p:spPr>
+      </p:pic>
+      <p:sp>
+        <p:nvSpPr>
+          <p:cNvPr id="68" name="Rectangle 67"/>
           <p:cNvSpPr/>
           <p:nvPr/>
         </p:nvSpPr>
@@ -46326,6 +47694,30 @@
           </a:p>
         </p:txBody>
       </p:sp>
+      <p:pic>
+        <p:nvPicPr>
+          <p:cNvPr id="69" name="Picture 68" descr="1779266493905_w2tzj.jpg"/>
+          <p:cNvPicPr>
+            <a:picLocks noChangeAspect="1"/>
+          </p:cNvPicPr>
+          <p:nvPr/>
+        </p:nvPicPr>
+        <p:blipFill>
+          <a:blip r:embed="rId7"/>
+          <a:stretch>
+            <a:fillRect/>
+          </a:stretch>
+        </p:blipFill>
+        <p:spPr>
+          <a:xfrm>
+            <a:off x="9516600" y="4791525"/>
+            <a:ext cx="2550601" cy="1912950"/>
+          </a:xfrm>
+          <a:prstGeom prst="rect">
+            <a:avLst/>
+          </a:prstGeom>
+        </p:spPr>
+      </p:pic>
     </p:spTree>
   </p:cSld>
   <p:clrMapOvr>
